--- a/docs/entrega/Apresentacao-Classificador-de-Ambiente.pptx
+++ b/docs/entrega/Apresentacao-Classificador-de-Ambiente.pptx
@@ -124,20 +124,20 @@
   <p:extLst>
     <p:ext uri="{521415D9-36F7-43E2-AB2F-B90AF26B5E84}">
       <p14:sectionLst xmlns:p14="http://schemas.microsoft.com/office/powerpoint/2010/main">
-        <p14:section name="Introdução" id="{feb2d81f-ddf2-6118-ce75-36bfa8633261}">
+        <p14:section name="Introdução" id="{430d8084-e52b-12ae-c775-d97a73e6800b}">
           <p14:sldIdLst>
             <p14:sldId id="256"/>
             <p14:sldId id="257"/>
             <p14:sldId id="258"/>
           </p14:sldIdLst>
         </p14:section>
-        <p14:section name="Hardware e testes iniciais" id="{a62db21d-cf53-d12e-c12a-2edb49dbc47b}">
+        <p14:section name="Hardware e testes iniciais" id="{139ff67f-f3a6-ce44-8b74-448bd5392502}">
           <p14:sldIdLst>
             <p14:sldId id="259"/>
             <p14:sldId id="260"/>
           </p14:sldIdLst>
         </p14:section>
-        <p14:section name="Dados e modelo" id="{2b9e246d-e7fd-a5e1-5072-787ad5ad7e41}">
+        <p14:section name="Dados e modelo" id="{9f68146c-c6d7-324e-5dd7-898f835d251d}">
           <p14:sldIdLst>
             <p14:sldId id="261"/>
             <p14:sldId id="262"/>
@@ -146,7 +146,7 @@
             <p14:sldId id="265"/>
           </p14:sldIdLst>
         </p14:section>
-        <p14:section name="Embarcado" id="{bc386dd5-f5d4-a86e-282a-c1b9095e9878}">
+        <p14:section name="Embarcado" id="{7ce1bbc2-645e-6dcb-80e6-a56a0bb76bf1}">
           <p14:sldIdLst>
             <p14:sldId id="266"/>
             <p14:sldId id="267"/>
@@ -154,13 +154,13 @@
             <p14:sldId id="269"/>
           </p14:sldIdLst>
         </p14:section>
-        <p14:section name="Produto" id="{3720d5df-b7ba-5342-7f99-7213935a0776}">
+        <p14:section name="Produto" id="{db73f74f-4f5d-2955-a171-e5e3f362d44c}">
           <p14:sldIdLst>
             <p14:sldId id="270"/>
             <p14:sldId id="271"/>
           </p14:sldIdLst>
         </p14:section>
-        <p14:section name="Conclusão" id="{6074ada9-57cd-7308-9013-01ed1191c589}">
+        <p14:section name="Conclusão" id="{665790a2-52d1-4e29-d263-3aca856341fa}">
           <p14:sldIdLst>
             <p14:sldId id="272"/>
             <p14:sldId id="273"/>
@@ -13135,7 +13135,7 @@
                   <a:srgbClr val="FFFFFF"/>
                 </a:solidFill>
               </a:rPr>
-              <a:t>Rafaela Santana  ·  Miriam  ·  Sara Coutinho</a:t>
+              <a:t>Rafaela Santana  ·  Miriam Aguiar  ·  Sara Coutinho</a:t>
             </a:r>
             <a:endParaRPr lang="en-US" sz="1300" dirty="0"/>
           </a:p>

--- a/docs/entrega/Apresentacao-Classificador-de-Ambiente.pptx
+++ b/docs/entrega/Apresentacao-Classificador-de-Ambiente.pptx
@@ -124,20 +124,20 @@
   <p:extLst>
     <p:ext uri="{521415D9-36F7-43E2-AB2F-B90AF26B5E84}">
       <p14:sectionLst xmlns:p14="http://schemas.microsoft.com/office/powerpoint/2010/main">
-        <p14:section name="Introdução" id="{430d8084-e52b-12ae-c775-d97a73e6800b}">
+        <p14:section name="Introdução" id="{b38a3b94-8447-62a3-82bb-2f8e64df8ff0}">
           <p14:sldIdLst>
             <p14:sldId id="256"/>
             <p14:sldId id="257"/>
             <p14:sldId id="258"/>
           </p14:sldIdLst>
         </p14:section>
-        <p14:section name="Hardware e testes iniciais" id="{139ff67f-f3a6-ce44-8b74-448bd5392502}">
+        <p14:section name="Hardware e testes iniciais" id="{8f160ea4-ae59-da4b-bfc7-308a13cd2975}">
           <p14:sldIdLst>
             <p14:sldId id="259"/>
             <p14:sldId id="260"/>
           </p14:sldIdLst>
         </p14:section>
-        <p14:section name="Dados e modelo" id="{9f68146c-c6d7-324e-5dd7-898f835d251d}">
+        <p14:section name="Dados e modelo" id="{a6f2a077-8327-86c8-8c96-afb7a5da9356}">
           <p14:sldIdLst>
             <p14:sldId id="261"/>
             <p14:sldId id="262"/>
@@ -146,7 +146,7 @@
             <p14:sldId id="265"/>
           </p14:sldIdLst>
         </p14:section>
-        <p14:section name="Embarcado" id="{7ce1bbc2-645e-6dcb-80e6-a56a0bb76bf1}">
+        <p14:section name="Embarcado" id="{b368a336-3588-dd1b-b7e0-028e68b68697}">
           <p14:sldIdLst>
             <p14:sldId id="266"/>
             <p14:sldId id="267"/>
@@ -154,13 +154,13 @@
             <p14:sldId id="269"/>
           </p14:sldIdLst>
         </p14:section>
-        <p14:section name="Produto" id="{db73f74f-4f5d-2955-a171-e5e3f362d44c}">
+        <p14:section name="Produto" id="{a7398df0-af20-f055-8803-755f32a3444c}">
           <p14:sldIdLst>
             <p14:sldId id="270"/>
             <p14:sldId id="271"/>
           </p14:sldIdLst>
         </p14:section>
-        <p14:section name="Conclusão" id="{665790a2-52d1-4e29-d263-3aca856341fa}">
+        <p14:section name="Conclusão" id="{80e859af-9247-6d2f-88d5-5aba7be5da92}">
           <p14:sldIdLst>
             <p14:sldId id="272"/>
             <p14:sldId id="273"/>
@@ -1374,7 +1374,7 @@
           <a:p>
             <a:r>
               <a:rPr lang="en-US" dirty="0"/>
-              <a:t>Apresentar a equipe (Rafaela Santana, Miriam e Sara Coutinho) e a unidade curricular IA Embarcada e Modelos Compactos, com o professor Rodrigo Kobashikawa Rosa. Depois, apresentar o projeto: um sistema que lê temperatura, umidade e presença e classifica o ambiente em quatro estados dentro da própria placa, sem depender de nuvem. A foto mostra os componentes usados no início da montagem.</a:t>
+              <a:t>Apresentar a equipe (Rafaela Santana, Miriam Aguiar e Sara Coutinho) e a unidade curricular IA Embarcada e Modelos Compactos, com o professor Rodrigo Kobashikawa Rosa. Depois, apresentar o projeto: um sistema que lê temperatura, umidade e presença e classifica o ambiente em quatro estados dentro da própria placa, sem depender de nuvem. A foto mostra os componentes usados no início da montagem.</a:t>
             </a:r>
             <a:endParaRPr lang="en-US" dirty="0"/>
           </a:p>
@@ -4332,7 +4332,7 @@
                   <a:srgbClr val="FFFFFF"/>
                 </a:solidFill>
               </a:rPr>
-              <a:t>Rafaela Santana  ·  Miriam  ·  Sara Coutinho</a:t>
+              <a:t>Rafaela Santana  ·  Miriam Aguiar  ·  Sara Coutinho</a:t>
             </a:r>
             <a:endParaRPr lang="en-US" sz="1400" dirty="0"/>
           </a:p>

--- a/docs/entrega/Apresentacao-Classificador-de-Ambiente.pptx
+++ b/docs/entrega/Apresentacao-Classificador-de-Ambiente.pptx
@@ -22,10 +22,9 @@
     <p:sldId id="270" r:id="rId16"/>
     <p:sldId id="271" r:id="rId17"/>
     <p:sldId id="272" r:id="rId18"/>
-    <p:sldId id="273" r:id="rId19"/>
   </p:sldIdLst>
   <p:notesMasterIdLst>
-    <p:notesMasterId r:id="rId20"/>
+    <p:notesMasterId r:id="rId19"/>
   </p:notesMasterIdLst>
   <p:sldSz cx="12192000" cy="6858000"/>
   <p:notesSz cx="6858000" cy="12192000"/>
@@ -124,20 +123,20 @@
   <p:extLst>
     <p:ext uri="{521415D9-36F7-43E2-AB2F-B90AF26B5E84}">
       <p14:sectionLst xmlns:p14="http://schemas.microsoft.com/office/powerpoint/2010/main">
-        <p14:section name="Introdução" id="{b38a3b94-8447-62a3-82bb-2f8e64df8ff0}">
+        <p14:section name="Introdução" id="{81b45da7-10da-759b-3782-a72122f18fb8}">
           <p14:sldIdLst>
             <p14:sldId id="256"/>
             <p14:sldId id="257"/>
             <p14:sldId id="258"/>
           </p14:sldIdLst>
         </p14:section>
-        <p14:section name="Hardware e testes iniciais" id="{8f160ea4-ae59-da4b-bfc7-308a13cd2975}">
+        <p14:section name="Hardware e testes iniciais" id="{a8dcf3dc-8ca6-a28d-bb2b-08aa9477338c}">
           <p14:sldIdLst>
             <p14:sldId id="259"/>
             <p14:sldId id="260"/>
           </p14:sldIdLst>
         </p14:section>
-        <p14:section name="Dados e modelo" id="{a6f2a077-8327-86c8-8c96-afb7a5da9356}">
+        <p14:section name="Dados e modelo" id="{f9d19f86-7fbc-8f8b-97d6-1a3e8a2c1022}">
           <p14:sldIdLst>
             <p14:sldId id="261"/>
             <p14:sldId id="262"/>
@@ -146,24 +145,23 @@
             <p14:sldId id="265"/>
           </p14:sldIdLst>
         </p14:section>
-        <p14:section name="Embarcado" id="{b368a336-3588-dd1b-b7e0-028e68b68697}">
+        <p14:section name="Embarcado" id="{9b289496-7dde-5c41-3561-7d7a00b4348d}">
           <p14:sldIdLst>
             <p14:sldId id="266"/>
             <p14:sldId id="267"/>
             <p14:sldId id="268"/>
-            <p14:sldId id="269"/>
           </p14:sldIdLst>
         </p14:section>
-        <p14:section name="Produto" id="{a7398df0-af20-f055-8803-755f32a3444c}">
+        <p14:section name="Produto" id="{61b8b0d8-0ccd-853f-d4e8-682f72c27e4f}">
           <p14:sldIdLst>
+            <p14:sldId id="269"/>
             <p14:sldId id="270"/>
-            <p14:sldId id="271"/>
           </p14:sldIdLst>
         </p14:section>
-        <p14:section name="Conclusão" id="{80e859af-9247-6d2f-88d5-5aba7be5da92}">
+        <p14:section name="Conclusão" id="{b9de8c2c-3b27-2ee9-8d0d-de0f31614e6a}">
           <p14:sldIdLst>
+            <p14:sldId id="271"/>
             <p14:sldId id="272"/>
-            <p14:sldId id="273"/>
           </p14:sldIdLst>
         </p14:section>
       </p14:sectionLst>
@@ -1638,7 +1636,7 @@
           <a:p>
             <a:r>
               <a:rPr lang="en-US" dirty="0"/>
-              <a:t>Quantização: técnica para redes neurais. Nosso modelo não tem pesos; quantizar não economiza nada relevante e poderia deslocar limiares. If/else: o modelo já é if/else, mas com limiares aprendidos dos dados. As regras manuais existem e protegem o sistema fora do domínio. O valor do ML é o pipeline: com rótulos reais, basta retreinar.</a:t>
+              <a:t>Além de classificar, a placa prevê a temperatura em 60 segundos com erro médio de cerca de 1 °C, melhor que repetir a leitura atual ou extrapolar a tendência. Atenção: a regressão foi treinada com janelas sintéticas. Robustez: fora da faixa de treino, a árvore não é usada, porque não sabe extrapolar; quem decide são as regras.</a:t>
             </a:r>
             <a:endParaRPr lang="en-US" dirty="0"/>
           </a:p>
@@ -1726,7 +1724,7 @@
           <a:p>
             <a:r>
               <a:rPr lang="en-US" dirty="0"/>
-              <a:t>Além de classificar, a placa prevê a temperatura em 60 segundos com erro médio de cerca de 1 °C, melhor que repetir a leitura atual ou extrapolar a tendência. Atenção: a regressão foi treinada com janelas sintéticas. Robustez: fora da faixa de treino, a árvore não é usada, porque não sabe extrapolar; quem decide são as regras.</a:t>
+              <a:t>A gravação é simples: BOOTSEL, copiar o UF2 e a placa reinicia com o novo firmware. O print é da primeira execução real: a placa lendo 26,7 °C e 61 % e classificando como normal. Hoje a saída é em JSON, com médias, tendência e previsão.</a:t>
             </a:r>
             <a:endParaRPr lang="en-US" dirty="0"/>
           </a:p>
@@ -1814,7 +1812,7 @@
           <a:p>
             <a:r>
               <a:rPr lang="en-US" dirty="0"/>
-              <a:t>A gravação é simples: BOOTSEL, copiar o UF2 e a placa reinicia com o novo firmware. O print é da primeira execução real: a placa lendo 26,7 °C e 61 % e classificando como normal. Hoje a saída é em JSON, com médias, tendência e previsão.</a:t>
+              <a:t>A placa envia a leitura por HTTPS para uma Edge Function do Supabase. A função confere o token do dispositivo e valida os valores antes de gravar. O banco tem regras de segurança (RLS) e a chave de administrador nunca fica na placa nem no site. O painel React, publicado na Vercel, lê pela USB ou pela nuvem e tem um simulador.</a:t>
             </a:r>
             <a:endParaRPr lang="en-US" dirty="0"/>
           </a:p>
@@ -1902,7 +1900,7 @@
           <a:p>
             <a:r>
               <a:rPr lang="en-US" dirty="0"/>
-              <a:t>A placa envia a leitura por HTTPS para uma Edge Function do Supabase. A função confere o token do dispositivo e valida os valores antes de gravar. O banco tem regras de segurança (RLS) e a chave de administrador nunca fica na placa nem no site. O painel React, publicado na Vercel, lê pela USB ou pela nuvem e tem um simulador.</a:t>
+              <a:t>Vídeo de 10 segundos: o protótipo na bancada e o painel publicado mostrando as leituras chegando. O QR code abre o painel ao vivo, para quem quiser acompanhar no celular.</a:t>
             </a:r>
             <a:endParaRPr lang="en-US" dirty="0"/>
           </a:p>
@@ -1990,7 +1988,7 @@
           <a:p>
             <a:r>
               <a:rPr lang="en-US" dirty="0"/>
-              <a:t>Vídeo de 10 segundos: o protótipo na bancada e o painel publicado mostrando as leituras chegando. O QR code abre o painel ao vivo, para quem quiser acompanhar no celular.</a:t>
+              <a:t>Fechar com transparência: o sistema funciona de ponta a ponta e o modelo é preciso, mas aprende uma política definida por nós, com boa parte dos dados sintética. O próximo passo natural é a validação em campo com rótulos observados.</a:t>
             </a:r>
             <a:endParaRPr lang="en-US" dirty="0"/>
           </a:p>
@@ -2078,7 +2076,7 @@
           <a:p>
             <a:r>
               <a:rPr lang="en-US" dirty="0"/>
-              <a:t>Fechar com transparência: o sistema funciona de ponta a ponta e o modelo é preciso, mas aprende uma política definida por nós, com boa parte dos dados sintética. O próximo passo natural é a validação em campo com rótulos observados.</a:t>
+              <a:t>Agradecer e abrir para perguntas. O QR code leva ao repositório com o código, os dados e a documentação completa.</a:t>
             </a:r>
             <a:endParaRPr lang="en-US" dirty="0"/>
           </a:p>
@@ -2102,94 +2100,6 @@
             <a:fld id="{F7021451-1387-4CA6-816F-3879F97B5CBC}" type="slidenum">
               <a:rPr lang="en-US"/>
               <a:t>17</a:t>
-            </a:fld>
-            <a:endParaRPr lang="en-US"/>
-          </a:p>
-        </p:txBody>
-      </p:sp>
-    </p:spTree>
-    <p:extLst>
-      <p:ext uri="{BB962C8B-B14F-4D97-AF65-F5344CB8AC3E}">
-        <p14:creationId xmlns:p14="http://schemas.microsoft.com/office/powerpoint/2010/main" val="1024086991"/>
-      </p:ext>
-    </p:extLst>
-  </p:cSld>
-  <p:clrMapOvr>
-    <a:masterClrMapping/>
-  </p:clrMapOvr>
-</p:notes>
-</file>
-
-<file path=ppt/notesSlides/notesSlide18.xml><?xml version="1.0" encoding="utf-8"?>
-<p:notes xmlns:a="http://schemas.openxmlformats.org/drawingml/2006/main" xmlns:r="http://schemas.openxmlformats.org/officeDocument/2006/relationships" xmlns:p="http://schemas.openxmlformats.org/presentationml/2006/main">
-  <p:cSld>
-    <p:spTree>
-      <p:nvGrpSpPr>
-        <p:cNvPr id="1" name=""/>
-        <p:cNvGrpSpPr/>
-        <p:nvPr/>
-      </p:nvGrpSpPr>
-      <p:grpSpPr>
-        <a:xfrm>
-          <a:off x="0" y="0"/>
-          <a:ext cx="0" cy="0"/>
-          <a:chOff x="0" y="0"/>
-          <a:chExt cx="0" cy="0"/>
-        </a:xfrm>
-      </p:grpSpPr>
-      <p:sp>
-        <p:nvSpPr>
-          <p:cNvPr id="2" name="Slide Image Placeholder 1"/>
-          <p:cNvSpPr>
-            <a:spLocks noGrp="1" noRot="1" noChangeAspect="1"/>
-          </p:cNvSpPr>
-          <p:nvPr>
-            <p:ph type="sldImg"/>
-          </p:nvPr>
-        </p:nvSpPr>
-        <p:spPr/>
-      </p:sp>
-      <p:sp>
-        <p:nvSpPr>
-          <p:cNvPr id="3" name="Notes Placeholder 2"/>
-          <p:cNvSpPr>
-            <a:spLocks noGrp="1"/>
-          </p:cNvSpPr>
-          <p:nvPr>
-            <p:ph type="body" idx="1"/>
-          </p:nvPr>
-        </p:nvSpPr>
-        <p:spPr/>
-        <p:txBody>
-          <a:bodyPr/>
-          <a:lstStyle/>
-          <a:p>
-            <a:r>
-              <a:rPr lang="en-US" dirty="0"/>
-              <a:t>Agradecer e abrir para perguntas. O QR code leva ao repositório com o código, os dados e a documentação completa.</a:t>
-            </a:r>
-            <a:endParaRPr lang="en-US" dirty="0"/>
-          </a:p>
-        </p:txBody>
-      </p:sp>
-      <p:sp>
-        <p:nvSpPr>
-          <p:cNvPr id="4" name="Slide Number Placeholder 3"/>
-          <p:cNvSpPr>
-            <a:spLocks noGrp="1"/>
-          </p:cNvSpPr>
-          <p:nvPr>
-            <p:ph type="sldNum" sz="quarter" idx="10"/>
-          </p:nvPr>
-        </p:nvSpPr>
-        <p:spPr/>
-        <p:txBody>
-          <a:bodyPr/>
-          <a:lstStyle/>
-          <a:p>
-            <a:fld id="{F7021451-1387-4CA6-816F-3879F97B5CBC}" type="slidenum">
-              <a:rPr lang="en-US"/>
-              <a:t>18</a:t>
             </a:fld>
             <a:endParaRPr lang="en-US"/>
           </a:p>
@@ -8279,7 +8189,7 @@
                   <a:srgbClr val="3F8A70"/>
                 </a:solidFill>
               </a:rPr>
-              <a:t>11 · DECISÕES TÉCNICAS</a:t>
+              <a:t>11 · PREVISÃO E ROBUSTEZ</a:t>
             </a:r>
             <a:endParaRPr lang="en-US" sz="1200" dirty="0"/>
           </a:p>
@@ -8317,22 +8227,107 @@
                   <a:srgbClr val="15291F"/>
                 </a:solidFill>
               </a:rPr>
-              <a:t>Por que não quantização? Por que não só if/else?</a:t>
+              <a:t>Antecipar o alerta e não confiar no modelo às cegas</a:t>
             </a:r>
             <a:endParaRPr lang="en-US" sz="3400" dirty="0"/>
           </a:p>
         </p:txBody>
       </p:sp>
-      <p:sp>
-        <p:nvSpPr>
-          <p:cNvPr id="4" name="decisao-0"/>
+      <p:graphicFrame>
+        <p:nvGraphicFramePr>
+          <p:cNvPr id="4" name="grafico-regressao" descr=""/>
+          <p:cNvGraphicFramePr/>
+          <p:nvPr/>
+        </p:nvGraphicFramePr>
+        <p:xfrm>
+          <a:off x="548640" y="1600200"/>
+          <a:ext cx="5394960" cy="3108960"/>
+        </p:xfrm>
+        <a:graphic xmlns:a="http://schemas.openxmlformats.org/drawingml/2006/main">
+          <a:graphicData uri="http://schemas.openxmlformats.org/drawingml/2006/chart">
+            <c:chart xmlns:c="http://schemas.openxmlformats.org/drawingml/2006/chart" r:id="rId1"/>
+          </a:graphicData>
+        </a:graphic>
+      </p:graphicFrame>
+      <p:sp>
+        <p:nvSpPr>
+          <p:cNvPr id="5" name="regressao-info"/>
           <p:cNvSpPr/>
           <p:nvPr/>
         </p:nvSpPr>
         <p:spPr>
           <a:xfrm>
-            <a:off x="548640" y="1600200"/>
-            <a:ext cx="5440680" cy="4526280"/>
+            <a:off x="548640" y="4846320"/>
+            <a:ext cx="5394960" cy="1280160"/>
+          </a:xfrm>
+          <a:prstGeom prst="roundRect">
+            <a:avLst>
+              <a:gd name="adj" fmla="val 8571"/>
+            </a:avLst>
+          </a:prstGeom>
+          <a:solidFill>
+            <a:srgbClr val="F8EADF"/>
+          </a:solidFill>
+          <a:ln/>
+        </p:spPr>
+      </p:sp>
+      <p:sp>
+        <p:nvSpPr>
+          <p:cNvPr id="6" name="Text 3"/>
+          <p:cNvSpPr txBox="1"/>
+          <p:nvPr/>
+        </p:nvSpPr>
+        <p:spPr>
+          <a:xfrm>
+            <a:off x="822960" y="4937760"/>
+            <a:ext cx="4892040" cy="1097280"/>
+          </a:xfrm>
+          <a:prstGeom prst="rect">
+            <a:avLst/>
+          </a:prstGeom>
+          <a:noFill/>
+          <a:ln/>
+        </p:spPr>
+        <p:txBody>
+          <a:bodyPr wrap="square" lIns="0" tIns="0" rIns="0" bIns="0" rtlCol="0" anchor="ctr"/>
+          <a:lstStyle/>
+          <a:p>
+            <a:pPr indent="0" marL="0">
+              <a:buNone/>
+            </a:pPr>
+            <a:r>
+              <a:rPr lang="en-US" sz="1300" b="1" dirty="0">
+                <a:solidFill>
+                  <a:srgbClr val="D98A52"/>
+                </a:solidFill>
+              </a:rPr>
+              <a:t>Regressão linear embarcada: </a:t>
+            </a:r>
+            <a:pPr indent="0" marL="0">
+              <a:buNone/>
+            </a:pPr>
+            <a:r>
+              <a:rPr lang="en-US" sz="1300" dirty="0">
+                <a:solidFill>
+                  <a:srgbClr val="15291F"/>
+                </a:solidFill>
+              </a:rPr>
+              <a:t>10 coeficientes sobre a janela das últimas 10 leituras. Se a temperatura prevista mudar a classe para pior, a placa sinaliza alerta_futuro.</a:t>
+            </a:r>
+            <a:endParaRPr lang="en-US" sz="1300" dirty="0"/>
+          </a:p>
+        </p:txBody>
+      </p:sp>
+      <p:sp>
+        <p:nvSpPr>
+          <p:cNvPr id="7" name="ood"/>
+          <p:cNvSpPr/>
+          <p:nvPr/>
+        </p:nvSpPr>
+        <p:spPr>
+          <a:xfrm>
+            <a:off x="6263640" y="1600200"/>
+            <a:ext cx="5349240" cy="4526280"/>
           </a:xfrm>
           <a:prstGeom prst="roundRect">
             <a:avLst>
@@ -8347,94 +8342,14 @@
       </p:sp>
       <p:sp>
         <p:nvSpPr>
-          <p:cNvPr id="5" name="icon-bg-LuSigma"/>
-          <p:cNvSpPr/>
-          <p:nvPr/>
-        </p:nvSpPr>
-        <p:spPr>
-          <a:xfrm>
-            <a:off x="822960" y="1810512"/>
-            <a:ext cx="685800" cy="685800"/>
-          </a:xfrm>
-          <a:prstGeom prst="ellipse">
-            <a:avLst/>
-          </a:prstGeom>
-          <a:solidFill>
-            <a:srgbClr val="F8EADF"/>
-          </a:solidFill>
-          <a:ln/>
-        </p:spPr>
-      </p:sp>
-      <p:pic>
-        <p:nvPicPr>
-          <p:cNvPr id="6" name="icon-LuSigma" descr="preencoded.png">    </p:cNvPr>
-          <p:cNvPicPr>
-            <a:picLocks noChangeAspect="1"/>
-          </p:cNvPicPr>
-          <p:nvPr/>
-        </p:nvPicPr>
-        <p:blipFill>
-          <a:blip r:embed="rId1"/>
-          <a:stretch>
-            <a:fillRect/>
-          </a:stretch>
-        </p:blipFill>
-        <p:spPr>
-          <a:xfrm>
-            <a:off x="994410" y="1981962"/>
-            <a:ext cx="342900" cy="342900"/>
-          </a:xfrm>
-          <a:prstGeom prst="rect">
-            <a:avLst/>
-          </a:prstGeom>
-        </p:spPr>
-      </p:pic>
-      <p:sp>
-        <p:nvSpPr>
-          <p:cNvPr id="7" name="Text 4"/>
-          <p:cNvSpPr txBox="1"/>
-          <p:nvPr/>
-        </p:nvSpPr>
-        <p:spPr>
-          <a:xfrm>
-            <a:off x="1691640" y="1920240"/>
-            <a:ext cx="4114800" cy="457200"/>
-          </a:xfrm>
-          <a:prstGeom prst="rect">
-            <a:avLst/>
-          </a:prstGeom>
-          <a:noFill/>
-          <a:ln/>
-        </p:spPr>
-        <p:txBody>
-          <a:bodyPr wrap="square" lIns="0" tIns="0" rIns="0" bIns="0" rtlCol="0" anchor="ctr"/>
-          <a:lstStyle/>
-          <a:p>
-            <a:pPr indent="0" marL="0">
-              <a:buNone/>
-            </a:pPr>
-            <a:r>
-              <a:rPr lang="en-US" sz="2000" b="1" dirty="0">
-                <a:solidFill>
-                  <a:srgbClr val="15291F"/>
-                </a:solidFill>
-              </a:rPr>
-              <a:t>Quantização (INT8)</a:t>
-            </a:r>
-            <a:endParaRPr lang="en-US" sz="2000" dirty="0"/>
-          </a:p>
-        </p:txBody>
-      </p:sp>
-      <p:sp>
-        <p:nvSpPr>
           <p:cNvPr id="8" name="Text 5"/>
           <p:cNvSpPr txBox="1"/>
           <p:nvPr/>
         </p:nvSpPr>
         <p:spPr>
           <a:xfrm>
-            <a:off x="868680" y="2743200"/>
-            <a:ext cx="4846320" cy="2514600"/>
+            <a:off x="6537960" y="1783080"/>
+            <a:ext cx="4846320" cy="320040"/>
           </a:xfrm>
           <a:prstGeom prst="rect">
             <a:avLst/>
@@ -8446,111 +8361,117 @@
           <a:bodyPr wrap="square" lIns="0" tIns="0" rIns="0" bIns="0" rtlCol="0" anchor="t"/>
           <a:lstStyle/>
           <a:p>
-            <a:pPr marL="342900" indent="-342900">
-              <a:spcAft>
-                <a:spcPts val="900"/>
-              </a:spcAft>
-              <a:buSzPct val="100000"/>
-              <a:buChar char="•"/>
-            </a:pPr>
-            <a:r>
-              <a:rPr lang="en-US" sz="1500" dirty="0">
+            <a:pPr indent="0" marL="0">
+              <a:buNone/>
+            </a:pPr>
+            <a:r>
+              <a:rPr lang="en-US" sz="1600" b="1" dirty="0">
                 <a:solidFill>
                   <a:srgbClr val="15291F"/>
                 </a:solidFill>
               </a:rPr>
-              <a:t>Serve para redes neurais: comprime pesos.</a:t>
-            </a:r>
-            <a:endParaRPr lang="en-US" sz="1500" dirty="0"/>
-          </a:p>
-          <a:p>
-            <a:pPr marL="342900" indent="-342900">
-              <a:spcAft>
-                <a:spcPts val="900"/>
-              </a:spcAft>
-              <a:buSzPct val="100000"/>
-              <a:buChar char="•"/>
-            </a:pPr>
-            <a:r>
-              <a:rPr lang="en-US" sz="1500" dirty="0">
-                <a:solidFill>
-                  <a:srgbClr val="15291F"/>
-                </a:solidFill>
-              </a:rPr>
-              <a:t>A árvore não tem pesos, só 12 comparações.</a:t>
-            </a:r>
-            <a:endParaRPr lang="en-US" sz="1500" dirty="0"/>
-          </a:p>
-          <a:p>
-            <a:pPr marL="342900" indent="-342900">
-              <a:spcAft>
-                <a:spcPts val="900"/>
-              </a:spcAft>
-              <a:buSzPct val="100000"/>
-              <a:buChar char="•"/>
-            </a:pPr>
-            <a:r>
-              <a:rPr lang="en-US" sz="1500" dirty="0">
-                <a:solidFill>
-                  <a:srgbClr val="15291F"/>
-                </a:solidFill>
-              </a:rPr>
-              <a:t>O modelo ocupa centenas de bytes em 264 kB.</a:t>
-            </a:r>
-            <a:endParaRPr lang="en-US" sz="1500" dirty="0"/>
-          </a:p>
-          <a:p>
-            <a:pPr marL="342900" indent="-342900">
-              <a:spcAft>
-                <a:spcPts val="900"/>
-              </a:spcAft>
-              <a:buSzPct val="100000"/>
-              <a:buChar char="•"/>
-            </a:pPr>
-            <a:r>
-              <a:rPr lang="en-US" sz="1500" dirty="0">
-                <a:solidFill>
-                  <a:srgbClr val="15291F"/>
-                </a:solidFill>
-              </a:rPr>
-              <a:t>Arredondar 29,95 °C mudaria a decisão.</a:t>
-            </a:r>
-            <a:endParaRPr lang="en-US" sz="1500" dirty="0"/>
-          </a:p>
-          <a:p>
-            <a:pPr marL="342900" indent="-342900">
-              <a:spcAft>
-                <a:spcPts val="900"/>
-              </a:spcAft>
-              <a:buSzPct val="100000"/>
-              <a:buChar char="•"/>
-            </a:pPr>
-            <a:r>
-              <a:rPr lang="en-US" sz="1500" dirty="0">
-                <a:solidFill>
-                  <a:srgbClr val="15291F"/>
-                </a:solidFill>
-              </a:rPr>
-              <a:t>A MLP exigiria TFLite Micro, mais pesado.</a:t>
-            </a:r>
-            <a:endParaRPr lang="en-US" sz="1500" dirty="0"/>
-          </a:p>
-        </p:txBody>
-      </p:sp>
-      <p:sp>
-        <p:nvSpPr>
-          <p:cNvPr id="9" name="conclusao-decisao-0"/>
+              <a:t>Proteção fora do domínio de treino</a:t>
+            </a:r>
+            <a:endParaRPr lang="en-US" sz="1600" dirty="0"/>
+          </a:p>
+        </p:txBody>
+      </p:sp>
+      <p:sp>
+        <p:nvSpPr>
+          <p:cNvPr id="9" name="ood-leitura"/>
           <p:cNvSpPr/>
           <p:nvPr/>
         </p:nvSpPr>
         <p:spPr>
           <a:xfrm>
-            <a:off x="822960" y="5349240"/>
-            <a:ext cx="4892040" cy="566928"/>
+            <a:off x="7498080" y="2286000"/>
+            <a:ext cx="2880360" cy="548640"/>
           </a:xfrm>
           <a:prstGeom prst="roundRect">
             <a:avLst>
-              <a:gd name="adj" fmla="val 19355"/>
+              <a:gd name="adj" fmla="val 20000"/>
+            </a:avLst>
+          </a:prstGeom>
+          <a:solidFill>
+            <a:srgbClr val="FFFFFF"/>
+          </a:solidFill>
+          <a:ln/>
+        </p:spPr>
+      </p:sp>
+      <p:sp>
+        <p:nvSpPr>
+          <p:cNvPr id="10" name="Text 7"/>
+          <p:cNvSpPr txBox="1"/>
+          <p:nvPr/>
+        </p:nvSpPr>
+        <p:spPr>
+          <a:xfrm>
+            <a:off x="7589520" y="2286000"/>
+            <a:ext cx="2697480" cy="548640"/>
+          </a:xfrm>
+          <a:prstGeom prst="rect">
+            <a:avLst/>
+          </a:prstGeom>
+          <a:noFill/>
+          <a:ln/>
+        </p:spPr>
+        <p:txBody>
+          <a:bodyPr wrap="square" lIns="0" tIns="0" rIns="0" bIns="0" rtlCol="0" anchor="ctr"/>
+          <a:lstStyle/>
+          <a:p>
+            <a:pPr algn="ctr" indent="0" marL="0">
+              <a:buNone/>
+            </a:pPr>
+            <a:r>
+              <a:rPr lang="en-US" sz="1300" b="1" dirty="0">
+                <a:solidFill>
+                  <a:srgbClr val="15291F"/>
+                </a:solidFill>
+              </a:rPr>
+              <a:t>Nova leitura</a:t>
+            </a:r>
+            <a:endParaRPr lang="en-US" sz="1300" dirty="0"/>
+          </a:p>
+        </p:txBody>
+      </p:sp>
+      <p:sp>
+        <p:nvSpPr>
+          <p:cNvPr id="11" name="Shape 8"/>
+          <p:cNvSpPr/>
+          <p:nvPr/>
+        </p:nvSpPr>
+        <p:spPr>
+          <a:xfrm>
+            <a:off x="8938260" y="2834640"/>
+            <a:ext cx="0" cy="320040"/>
+          </a:xfrm>
+          <a:prstGeom prst="line">
+            <a:avLst/>
+          </a:prstGeom>
+          <a:noFill/>
+          <a:ln w="19050">
+            <a:solidFill>
+              <a:srgbClr val="5E6F67"/>
+            </a:solidFill>
+            <a:prstDash val="solid"/>
+            <a:tailEnd type="triangle"/>
+          </a:ln>
+        </p:spPr>
+      </p:sp>
+      <p:sp>
+        <p:nvSpPr>
+          <p:cNvPr id="12" name="ood-teste"/>
+          <p:cNvSpPr/>
+          <p:nvPr/>
+        </p:nvSpPr>
+        <p:spPr>
+          <a:xfrm>
+            <a:off x="7040880" y="3154680"/>
+            <a:ext cx="3794760" cy="777240"/>
+          </a:xfrm>
+          <a:prstGeom prst="roundRect">
+            <a:avLst>
+              <a:gd name="adj" fmla="val 14118"/>
             </a:avLst>
           </a:prstGeom>
           <a:solidFill>
@@ -8561,14 +8482,14 @@
       </p:sp>
       <p:sp>
         <p:nvSpPr>
-          <p:cNvPr id="10" name="Text 7"/>
+          <p:cNvPr id="13" name="Text 10"/>
           <p:cNvSpPr txBox="1"/>
           <p:nvPr/>
         </p:nvSpPr>
         <p:spPr>
           <a:xfrm>
-            <a:off x="1005840" y="5349240"/>
-            <a:ext cx="4572000" cy="566928"/>
+            <a:off x="7132320" y="3154680"/>
+            <a:ext cx="3611880" cy="777240"/>
           </a:xfrm>
           <a:prstGeom prst="rect">
             <a:avLst/>
@@ -8580,56 +8501,170 @@
           <a:bodyPr wrap="square" lIns="0" tIns="0" rIns="0" bIns="0" rtlCol="0" anchor="ctr"/>
           <a:lstStyle/>
           <a:p>
-            <a:pPr indent="0" marL="0">
-              <a:buNone/>
-            </a:pPr>
-            <a:r>
-              <a:rPr lang="en-US" sz="1500" b="1" dirty="0">
+            <a:pPr algn="ctr" indent="0" marL="0">
+              <a:buNone/>
+            </a:pPr>
+            <a:r>
+              <a:rPr lang="en-US" sz="1300" b="1" dirty="0">
                 <a:solidFill>
                   <a:srgbClr val="FFFFFF"/>
                 </a:solidFill>
               </a:rPr>
-              <a:t>Sem pesos, não há o que quantizar.</a:t>
-            </a:r>
-            <a:endParaRPr lang="en-US" sz="1500" dirty="0"/>
-          </a:p>
-        </p:txBody>
-      </p:sp>
-      <p:sp>
-        <p:nvSpPr>
-          <p:cNvPr id="11" name="decisao-1"/>
+              <a:t>T entre 20 e 39,8 °C</a:t>
+            </a:r>
+            <a:endParaRPr lang="en-US" sz="1300" dirty="0"/>
+          </a:p>
+          <a:p>
+            <a:pPr algn="ctr" indent="0" marL="0">
+              <a:buNone/>
+            </a:pPr>
+            <a:r>
+              <a:rPr lang="en-US" sz="1300" b="1" dirty="0">
+                <a:solidFill>
+                  <a:srgbClr val="FFFFFF"/>
+                </a:solidFill>
+              </a:rPr>
+              <a:t>e U entre 40 e 98 %?</a:t>
+            </a:r>
+            <a:endParaRPr lang="en-US" sz="1300" dirty="0"/>
+          </a:p>
+        </p:txBody>
+      </p:sp>
+      <p:sp>
+        <p:nvSpPr>
+          <p:cNvPr id="14" name="Shape 11"/>
           <p:cNvSpPr/>
           <p:nvPr/>
         </p:nvSpPr>
         <p:spPr>
           <a:xfrm>
-            <a:off x="6172200" y="1600200"/>
-            <a:ext cx="5440680" cy="4526280"/>
+            <a:off x="7726680" y="3931920"/>
+            <a:ext cx="0" cy="457200"/>
+          </a:xfrm>
+          <a:prstGeom prst="line">
+            <a:avLst/>
+          </a:prstGeom>
+          <a:noFill/>
+          <a:ln w="19050">
+            <a:solidFill>
+              <a:srgbClr val="3F8A70"/>
+            </a:solidFill>
+            <a:prstDash val="solid"/>
+            <a:tailEnd type="triangle"/>
+          </a:ln>
+        </p:spPr>
+      </p:sp>
+      <p:sp>
+        <p:nvSpPr>
+          <p:cNvPr id="15" name="Shape 12"/>
+          <p:cNvSpPr/>
+          <p:nvPr/>
+        </p:nvSpPr>
+        <p:spPr>
+          <a:xfrm>
+            <a:off x="10241280" y="3931920"/>
+            <a:ext cx="0" cy="457200"/>
+          </a:xfrm>
+          <a:prstGeom prst="line">
+            <a:avLst/>
+          </a:prstGeom>
+          <a:noFill/>
+          <a:ln w="19050">
+            <a:solidFill>
+              <a:srgbClr val="CC665E"/>
+            </a:solidFill>
+            <a:prstDash val="solid"/>
+            <a:tailEnd type="triangle"/>
+          </a:ln>
+        </p:spPr>
+      </p:sp>
+      <p:sp>
+        <p:nvSpPr>
+          <p:cNvPr id="16" name="Text 13"/>
+          <p:cNvSpPr txBox="1"/>
+          <p:nvPr/>
+        </p:nvSpPr>
+        <p:spPr>
+          <a:xfrm>
+            <a:off x="7818120" y="4005072"/>
+            <a:ext cx="548640" cy="274320"/>
+          </a:xfrm>
+          <a:prstGeom prst="rect">
+            <a:avLst/>
+          </a:prstGeom>
+          <a:noFill/>
+          <a:ln/>
+        </p:spPr>
+        <p:txBody>
+          <a:bodyPr wrap="square" lIns="0" tIns="0" rIns="0" bIns="0" rtlCol="0" anchor="t"/>
+          <a:lstStyle/>
+          <a:p>
+            <a:pPr indent="0" marL="0">
+              <a:buNone/>
+            </a:pPr>
+            <a:r>
+              <a:rPr lang="en-US" sz="1100" b="1" dirty="0">
+                <a:solidFill>
+                  <a:srgbClr val="3F8A70"/>
+                </a:solidFill>
+              </a:rPr>
+              <a:t>sim</a:t>
+            </a:r>
+            <a:endParaRPr lang="en-US" sz="1100" dirty="0"/>
+          </a:p>
+        </p:txBody>
+      </p:sp>
+      <p:sp>
+        <p:nvSpPr>
+          <p:cNvPr id="17" name="Text 14"/>
+          <p:cNvSpPr txBox="1"/>
+          <p:nvPr/>
+        </p:nvSpPr>
+        <p:spPr>
+          <a:xfrm>
+            <a:off x="10332720" y="4005072"/>
+            <a:ext cx="548640" cy="274320"/>
+          </a:xfrm>
+          <a:prstGeom prst="rect">
+            <a:avLst/>
+          </a:prstGeom>
+          <a:noFill/>
+          <a:ln/>
+        </p:spPr>
+        <p:txBody>
+          <a:bodyPr wrap="square" lIns="0" tIns="0" rIns="0" bIns="0" rtlCol="0" anchor="t"/>
+          <a:lstStyle/>
+          <a:p>
+            <a:pPr indent="0" marL="0">
+              <a:buNone/>
+            </a:pPr>
+            <a:r>
+              <a:rPr lang="en-US" sz="1100" b="1" dirty="0">
+                <a:solidFill>
+                  <a:srgbClr val="CC665E"/>
+                </a:solidFill>
+              </a:rPr>
+              <a:t>não</a:t>
+            </a:r>
+            <a:endParaRPr lang="en-US" sz="1100" dirty="0"/>
+          </a:p>
+        </p:txBody>
+      </p:sp>
+      <p:sp>
+        <p:nvSpPr>
+          <p:cNvPr id="18" name="ood-arvore"/>
+          <p:cNvSpPr/>
+          <p:nvPr/>
+        </p:nvSpPr>
+        <p:spPr>
+          <a:xfrm>
+            <a:off x="6537960" y="4389120"/>
+            <a:ext cx="2377440" cy="685800"/>
           </a:xfrm>
           <a:prstGeom prst="roundRect">
             <a:avLst>
-              <a:gd name="adj" fmla="val 2424"/>
+              <a:gd name="adj" fmla="val 16000"/>
             </a:avLst>
-          </a:prstGeom>
-          <a:solidFill>
-            <a:srgbClr val="EEF4F0"/>
-          </a:solidFill>
-          <a:ln/>
-        </p:spPr>
-      </p:sp>
-      <p:sp>
-        <p:nvSpPr>
-          <p:cNvPr id="12" name="icon-bg-LuGitBranch"/>
-          <p:cNvSpPr/>
-          <p:nvPr/>
-        </p:nvSpPr>
-        <p:spPr>
-          <a:xfrm>
-            <a:off x="6446520" y="1810512"/>
-            <a:ext cx="685800" cy="685800"/>
-          </a:xfrm>
-          <a:prstGeom prst="ellipse">
-            <a:avLst/>
           </a:prstGeom>
           <a:solidFill>
             <a:srgbClr val="E1EFE8"/>
@@ -8637,40 +8672,16 @@
           <a:ln/>
         </p:spPr>
       </p:sp>
-      <p:pic>
-        <p:nvPicPr>
-          <p:cNvPr id="13" name="icon-LuGitBranch" descr="preencoded.png">    </p:cNvPr>
-          <p:cNvPicPr>
-            <a:picLocks noChangeAspect="1"/>
-          </p:cNvPicPr>
-          <p:nvPr/>
-        </p:nvPicPr>
-        <p:blipFill>
-          <a:blip r:embed="rId2"/>
-          <a:stretch>
-            <a:fillRect/>
-          </a:stretch>
-        </p:blipFill>
-        <p:spPr>
-          <a:xfrm>
-            <a:off x="6617970" y="1981962"/>
-            <a:ext cx="342900" cy="342900"/>
-          </a:xfrm>
-          <a:prstGeom prst="rect">
-            <a:avLst/>
-          </a:prstGeom>
-        </p:spPr>
-      </p:pic>
-      <p:sp>
-        <p:nvSpPr>
-          <p:cNvPr id="14" name="Text 10"/>
+      <p:sp>
+        <p:nvSpPr>
+          <p:cNvPr id="19" name="Text 16"/>
           <p:cNvSpPr txBox="1"/>
           <p:nvPr/>
         </p:nvSpPr>
         <p:spPr>
           <a:xfrm>
-            <a:off x="7315200" y="1920240"/>
-            <a:ext cx="4114800" cy="457200"/>
+            <a:off x="6629400" y="4389120"/>
+            <a:ext cx="2194560" cy="685800"/>
           </a:xfrm>
           <a:prstGeom prst="rect">
             <a:avLst/>
@@ -8682,165 +8693,53 @@
           <a:bodyPr wrap="square" lIns="0" tIns="0" rIns="0" bIns="0" rtlCol="0" anchor="ctr"/>
           <a:lstStyle/>
           <a:p>
-            <a:pPr indent="0" marL="0">
-              <a:buNone/>
-            </a:pPr>
-            <a:r>
-              <a:rPr lang="en-US" sz="2000" b="1" dirty="0">
-                <a:solidFill>
-                  <a:srgbClr val="15291F"/>
-                </a:solidFill>
-              </a:rPr>
-              <a:t>If/else escrito à mão</a:t>
-            </a:r>
-            <a:endParaRPr lang="en-US" sz="2000" dirty="0"/>
-          </a:p>
-        </p:txBody>
-      </p:sp>
-      <p:sp>
-        <p:nvSpPr>
-          <p:cNvPr id="15" name="Text 11"/>
-          <p:cNvSpPr txBox="1"/>
-          <p:nvPr/>
-        </p:nvSpPr>
-        <p:spPr>
-          <a:xfrm>
-            <a:off x="6492240" y="2743200"/>
-            <a:ext cx="4846320" cy="2514600"/>
-          </a:xfrm>
-          <a:prstGeom prst="rect">
-            <a:avLst/>
-          </a:prstGeom>
-          <a:noFill/>
-          <a:ln/>
-        </p:spPr>
-        <p:txBody>
-          <a:bodyPr wrap="square" lIns="0" tIns="0" rIns="0" bIns="0" rtlCol="0" anchor="t"/>
-          <a:lstStyle/>
-          <a:p>
-            <a:pPr marL="342900" indent="-342900">
-              <a:spcAft>
-                <a:spcPts val="900"/>
-              </a:spcAft>
-              <a:buSzPct val="100000"/>
-              <a:buChar char="•"/>
-            </a:pPr>
-            <a:r>
-              <a:rPr lang="en-US" sz="1500" dirty="0">
-                <a:solidFill>
-                  <a:srgbClr val="15291F"/>
-                </a:solidFill>
-              </a:rPr>
-              <a:t>O modelo já é if/else, gerado a partir dos dados.</a:t>
-            </a:r>
-            <a:endParaRPr lang="en-US" sz="1500" dirty="0"/>
-          </a:p>
-          <a:p>
-            <a:pPr marL="342900" indent="-342900">
-              <a:spcAft>
-                <a:spcPts val="900"/>
-              </a:spcAft>
-              <a:buSzPct val="100000"/>
-              <a:buChar char="•"/>
-            </a:pPr>
-            <a:r>
-              <a:rPr lang="en-US" sz="1500" dirty="0">
-                <a:solidFill>
-                  <a:srgbClr val="15291F"/>
-                </a:solidFill>
-              </a:rPr>
-              <a:t>Os limiares foram aprendidos, não digitados.</a:t>
-            </a:r>
-            <a:endParaRPr lang="en-US" sz="1500" dirty="0"/>
-          </a:p>
-          <a:p>
-            <a:pPr marL="342900" indent="-342900">
-              <a:spcAft>
-                <a:spcPts val="900"/>
-              </a:spcAft>
-              <a:buSzPct val="100000"/>
-              <a:buChar char="•"/>
-            </a:pPr>
-            <a:r>
-              <a:rPr lang="en-US" sz="1500" dirty="0">
-                <a:solidFill>
-                  <a:srgbClr val="15291F"/>
-                </a:solidFill>
-              </a:rPr>
-              <a:t>Regras manuais são o fallback fora do domínio.</a:t>
-            </a:r>
-            <a:endParaRPr lang="en-US" sz="1500" dirty="0"/>
-          </a:p>
-          <a:p>
-            <a:pPr marL="342900" indent="-342900">
-              <a:spcAft>
-                <a:spcPts val="900"/>
-              </a:spcAft>
-              <a:buSzPct val="100000"/>
-              <a:buChar char="•"/>
-            </a:pPr>
-            <a:r>
-              <a:rPr lang="en-US" sz="1500" dirty="0">
-                <a:solidFill>
-                  <a:srgbClr val="15291F"/>
-                </a:solidFill>
-              </a:rPr>
-              <a:t>Com rótulos reais não há regra conhecida: basta retreinar.</a:t>
-            </a:r>
-            <a:endParaRPr lang="en-US" sz="1500" dirty="0"/>
-          </a:p>
-          <a:p>
-            <a:pPr marL="342900" indent="-342900">
-              <a:spcAft>
-                <a:spcPts val="900"/>
-              </a:spcAft>
-              <a:buSzPct val="100000"/>
-              <a:buChar char="•"/>
-            </a:pPr>
-            <a:r>
-              <a:rPr lang="en-US" sz="1500" dirty="0">
-                <a:solidFill>
-                  <a:srgbClr val="15291F"/>
-                </a:solidFill>
-              </a:rPr>
-              <a:t>A previsão de +60 s é uma regressão, não um if.</a:t>
-            </a:r>
-            <a:endParaRPr lang="en-US" sz="1500" dirty="0"/>
-          </a:p>
-        </p:txBody>
-      </p:sp>
-      <p:sp>
-        <p:nvSpPr>
-          <p:cNvPr id="16" name="conclusao-decisao-1"/>
+            <a:pPr algn="ctr" indent="0" marL="0">
+              <a:buNone/>
+            </a:pPr>
+            <a:r>
+              <a:rPr lang="en-US" sz="1300" b="1" dirty="0">
+                <a:solidFill>
+                  <a:srgbClr val="3F8A70"/>
+                </a:solidFill>
+              </a:rPr>
+              <a:t>Árvore de decisão</a:t>
+            </a:r>
+            <a:endParaRPr lang="en-US" sz="1300" dirty="0"/>
+          </a:p>
+        </p:txBody>
+      </p:sp>
+      <p:sp>
+        <p:nvSpPr>
+          <p:cNvPr id="20" name="ood-regras"/>
           <p:cNvSpPr/>
           <p:nvPr/>
         </p:nvSpPr>
         <p:spPr>
           <a:xfrm>
-            <a:off x="6446520" y="5349240"/>
-            <a:ext cx="4892040" cy="566928"/>
+            <a:off x="9098280" y="4389120"/>
+            <a:ext cx="2331720" cy="685800"/>
           </a:xfrm>
           <a:prstGeom prst="roundRect">
             <a:avLst>
-              <a:gd name="adj" fmla="val 19355"/>
+              <a:gd name="adj" fmla="val 16000"/>
             </a:avLst>
           </a:prstGeom>
           <a:solidFill>
-            <a:srgbClr val="0E211A"/>
+            <a:srgbClr val="F6E1DF"/>
           </a:solidFill>
           <a:ln/>
         </p:spPr>
       </p:sp>
       <p:sp>
         <p:nvSpPr>
-          <p:cNvPr id="17" name="Text 13"/>
+          <p:cNvPr id="21" name="Text 18"/>
           <p:cNvSpPr txBox="1"/>
           <p:nvPr/>
         </p:nvSpPr>
         <p:spPr>
           <a:xfrm>
-            <a:off x="6629400" y="5349240"/>
-            <a:ext cx="4572000" cy="566928"/>
+            <a:off x="9189720" y="4389120"/>
+            <a:ext cx="2148840" cy="685800"/>
           </a:xfrm>
           <a:prstGeom prst="rect">
             <a:avLst/>
@@ -8852,18 +8751,54 @@
           <a:bodyPr wrap="square" lIns="0" tIns="0" rIns="0" bIns="0" rtlCol="0" anchor="ctr"/>
           <a:lstStyle/>
           <a:p>
-            <a:pPr indent="0" marL="0">
-              <a:buNone/>
-            </a:pPr>
-            <a:r>
-              <a:rPr lang="en-US" sz="1500" b="1" dirty="0">
-                <a:solidFill>
-                  <a:srgbClr val="FFFFFF"/>
-                </a:solidFill>
-              </a:rPr>
-              <a:t>O ML gera o if/else; as regras dão segurança.</a:t>
-            </a:r>
-            <a:endParaRPr lang="en-US" sz="1500" dirty="0"/>
+            <a:pPr algn="ctr" indent="0" marL="0">
+              <a:buNone/>
+            </a:pPr>
+            <a:r>
+              <a:rPr lang="en-US" sz="1300" b="1" dirty="0">
+                <a:solidFill>
+                  <a:srgbClr val="CC665E"/>
+                </a:solidFill>
+              </a:rPr>
+              <a:t>Regras determinísticas</a:t>
+            </a:r>
+            <a:endParaRPr lang="en-US" sz="1300" dirty="0"/>
+          </a:p>
+        </p:txBody>
+      </p:sp>
+      <p:sp>
+        <p:nvSpPr>
+          <p:cNvPr id="22" name="Text 19"/>
+          <p:cNvSpPr txBox="1"/>
+          <p:nvPr/>
+        </p:nvSpPr>
+        <p:spPr>
+          <a:xfrm>
+            <a:off x="6537960" y="5303520"/>
+            <a:ext cx="4892040" cy="640080"/>
+          </a:xfrm>
+          <a:prstGeom prst="rect">
+            <a:avLst/>
+          </a:prstGeom>
+          <a:noFill/>
+          <a:ln/>
+        </p:spPr>
+        <p:txBody>
+          <a:bodyPr wrap="square" lIns="0" tIns="0" rIns="0" bIns="0" rtlCol="0" anchor="t"/>
+          <a:lstStyle/>
+          <a:p>
+            <a:pPr indent="0" marL="0">
+              <a:buNone/>
+            </a:pPr>
+            <a:r>
+              <a:rPr lang="en-US" sz="1200" dirty="0">
+                <a:solidFill>
+                  <a:srgbClr val="5E6F67"/>
+                </a:solidFill>
+              </a:rPr>
+              <a:t>Leitura inválida (NaN ou fora dos limites físicos): inferência suspensa e atuadores desligados.</a:t>
+            </a:r>
+            <a:endParaRPr lang="en-US" sz="1200" dirty="0"/>
           </a:p>
         </p:txBody>
       </p:sp>
@@ -8969,7 +8904,7 @@
                   <a:srgbClr val="3F8A70"/>
                 </a:solidFill>
               </a:rPr>
-              <a:t>12 · PREVISÃO E ROBUSTEZ</a:t>
+              <a:t>12 · GRAVAÇÃO E EXECUÇÃO</a:t>
             </a:r>
             <a:endParaRPr lang="en-US" sz="1200" dirty="0"/>
           </a:p>
@@ -9007,60 +8942,64 @@
                   <a:srgbClr val="15291F"/>
                 </a:solidFill>
               </a:rPr>
-              <a:t>Antecipar o alerta e não confiar no modelo às cegas</a:t>
+              <a:t>Firmware gravado e rodando no Pico W</a:t>
             </a:r>
             <a:endParaRPr lang="en-US" sz="3400" dirty="0"/>
           </a:p>
         </p:txBody>
       </p:sp>
-      <p:graphicFrame>
-        <p:nvGraphicFramePr>
-          <p:cNvPr id="4" name="grafico-regressao" descr=""/>
-          <p:cNvGraphicFramePr/>
-          <p:nvPr/>
-        </p:nvGraphicFramePr>
-        <p:xfrm>
-          <a:off x="548640" y="1600200"/>
-          <a:ext cx="5394960" cy="3108960"/>
-        </p:xfrm>
-        <a:graphic xmlns:a="http://schemas.openxmlformats.org/drawingml/2006/main">
-          <a:graphicData uri="http://schemas.openxmlformats.org/drawingml/2006/chart">
-            <c:chart xmlns:c="http://schemas.openxmlformats.org/drawingml/2006/chart" r:id="rId1"/>
-          </a:graphicData>
-        </a:graphic>
-      </p:graphicFrame>
-      <p:sp>
-        <p:nvSpPr>
-          <p:cNvPr id="5" name="regressao-info"/>
+      <p:sp>
+        <p:nvSpPr>
+          <p:cNvPr id="4" name="passo-0"/>
           <p:cNvSpPr/>
           <p:nvPr/>
         </p:nvSpPr>
         <p:spPr>
           <a:xfrm>
-            <a:off x="548640" y="4846320"/>
-            <a:ext cx="5394960" cy="1280160"/>
+            <a:off x="548640" y="1600200"/>
+            <a:ext cx="4937760" cy="960120"/>
           </a:xfrm>
           <a:prstGeom prst="roundRect">
             <a:avLst>
-              <a:gd name="adj" fmla="val 8571"/>
+              <a:gd name="adj" fmla="val 11429"/>
             </a:avLst>
           </a:prstGeom>
           <a:solidFill>
-            <a:srgbClr val="F8EADF"/>
+            <a:srgbClr val="EEF4F0"/>
           </a:solidFill>
           <a:ln/>
         </p:spPr>
       </p:sp>
       <p:sp>
         <p:nvSpPr>
-          <p:cNvPr id="6" name="Text 3"/>
+          <p:cNvPr id="5" name="Shape 3"/>
+          <p:cNvSpPr/>
+          <p:nvPr/>
+        </p:nvSpPr>
+        <p:spPr>
+          <a:xfrm>
+            <a:off x="749808" y="1801368"/>
+            <a:ext cx="548640" cy="548640"/>
+          </a:xfrm>
+          <a:prstGeom prst="ellipse">
+            <a:avLst/>
+          </a:prstGeom>
+          <a:solidFill>
+            <a:srgbClr val="0E211A"/>
+          </a:solidFill>
+          <a:ln/>
+        </p:spPr>
+      </p:sp>
+      <p:sp>
+        <p:nvSpPr>
+          <p:cNvPr id="6" name="Text 4"/>
           <p:cNvSpPr txBox="1"/>
           <p:nvPr/>
         </p:nvSpPr>
         <p:spPr>
           <a:xfrm>
-            <a:off x="822960" y="4937760"/>
-            <a:ext cx="4892040" cy="1097280"/>
+            <a:off x="749808" y="1801368"/>
+            <a:ext cx="548640" cy="548640"/>
           </a:xfrm>
           <a:prstGeom prst="rect">
             <a:avLst/>
@@ -9072,42 +9011,553 @@
           <a:bodyPr wrap="square" lIns="0" tIns="0" rIns="0" bIns="0" rtlCol="0" anchor="ctr"/>
           <a:lstStyle/>
           <a:p>
-            <a:pPr indent="0" marL="0">
-              <a:buNone/>
-            </a:pPr>
-            <a:r>
-              <a:rPr lang="en-US" sz="1300" b="1" dirty="0">
-                <a:solidFill>
-                  <a:srgbClr val="D98A52"/>
-                </a:solidFill>
-              </a:rPr>
-              <a:t>Regressão linear embarcada: </a:t>
-            </a:r>
-            <a:pPr indent="0" marL="0">
-              <a:buNone/>
-            </a:pPr>
-            <a:r>
-              <a:rPr lang="en-US" sz="1300" dirty="0">
+            <a:pPr algn="ctr" indent="0" marL="0">
+              <a:buNone/>
+            </a:pPr>
+            <a:r>
+              <a:rPr lang="en-US" sz="1800" b="1" dirty="0">
+                <a:solidFill>
+                  <a:srgbClr val="FFFFFF"/>
+                </a:solidFill>
+              </a:rPr>
+              <a:t>1</a:t>
+            </a:r>
+            <a:endParaRPr lang="en-US" sz="1800" dirty="0"/>
+          </a:p>
+        </p:txBody>
+      </p:sp>
+      <p:sp>
+        <p:nvSpPr>
+          <p:cNvPr id="7" name="Text 5"/>
+          <p:cNvSpPr txBox="1"/>
+          <p:nvPr/>
+        </p:nvSpPr>
+        <p:spPr>
+          <a:xfrm>
+            <a:off x="1508760" y="1709928"/>
+            <a:ext cx="3840480" cy="320040"/>
+          </a:xfrm>
+          <a:prstGeom prst="rect">
+            <a:avLst/>
+          </a:prstGeom>
+          <a:noFill/>
+          <a:ln/>
+        </p:spPr>
+        <p:txBody>
+          <a:bodyPr wrap="square" lIns="0" tIns="0" rIns="0" bIns="0" rtlCol="0" anchor="t"/>
+          <a:lstStyle/>
+          <a:p>
+            <a:pPr indent="0" marL="0">
+              <a:buNone/>
+            </a:pPr>
+            <a:r>
+              <a:rPr lang="en-US" sz="1600" b="1" dirty="0">
                 <a:solidFill>
                   <a:srgbClr val="15291F"/>
                 </a:solidFill>
               </a:rPr>
-              <a:t>10 coeficientes sobre a janela das últimas 10 leituras. Se a temperatura prevista mudar a classe para pior, a placa sinaliza alerta_futuro.</a:t>
-            </a:r>
-            <a:endParaRPr lang="en-US" sz="1300" dirty="0"/>
-          </a:p>
-        </p:txBody>
-      </p:sp>
-      <p:sp>
-        <p:nvSpPr>
-          <p:cNvPr id="7" name="ood"/>
+              <a:t>BOOTSEL</a:t>
+            </a:r>
+            <a:endParaRPr lang="en-US" sz="1600" dirty="0"/>
+          </a:p>
+        </p:txBody>
+      </p:sp>
+      <p:sp>
+        <p:nvSpPr>
+          <p:cNvPr id="8" name="Text 6"/>
+          <p:cNvSpPr txBox="1"/>
+          <p:nvPr/>
+        </p:nvSpPr>
+        <p:spPr>
+          <a:xfrm>
+            <a:off x="1508760" y="2039112"/>
+            <a:ext cx="3840480" cy="457200"/>
+          </a:xfrm>
+          <a:prstGeom prst="rect">
+            <a:avLst/>
+          </a:prstGeom>
+          <a:noFill/>
+          <a:ln/>
+        </p:spPr>
+        <p:txBody>
+          <a:bodyPr wrap="square" lIns="0" tIns="0" rIns="0" bIns="0" rtlCol="0" anchor="t"/>
+          <a:lstStyle/>
+          <a:p>
+            <a:pPr indent="0" marL="0">
+              <a:buNone/>
+            </a:pPr>
+            <a:r>
+              <a:rPr lang="en-US" sz="1200" dirty="0">
+                <a:solidFill>
+                  <a:srgbClr val="5E6F67"/>
+                </a:solidFill>
+              </a:rPr>
+              <a:t>Segurar o botão ao conectar: a placa vira o drive RPI-RP2</a:t>
+            </a:r>
+            <a:endParaRPr lang="en-US" sz="1200" dirty="0"/>
+          </a:p>
+        </p:txBody>
+      </p:sp>
+      <p:sp>
+        <p:nvSpPr>
+          <p:cNvPr id="9" name="passo-1"/>
           <p:cNvSpPr/>
           <p:nvPr/>
         </p:nvSpPr>
         <p:spPr>
           <a:xfrm>
-            <a:off x="6263640" y="1600200"/>
-            <a:ext cx="5349240" cy="4526280"/>
+            <a:off x="548640" y="2697480"/>
+            <a:ext cx="4937760" cy="960120"/>
+          </a:xfrm>
+          <a:prstGeom prst="roundRect">
+            <a:avLst>
+              <a:gd name="adj" fmla="val 11429"/>
+            </a:avLst>
+          </a:prstGeom>
+          <a:solidFill>
+            <a:srgbClr val="EEF4F0"/>
+          </a:solidFill>
+          <a:ln/>
+        </p:spPr>
+      </p:sp>
+      <p:sp>
+        <p:nvSpPr>
+          <p:cNvPr id="10" name="Shape 8"/>
+          <p:cNvSpPr/>
+          <p:nvPr/>
+        </p:nvSpPr>
+        <p:spPr>
+          <a:xfrm>
+            <a:off x="749808" y="2898648"/>
+            <a:ext cx="548640" cy="548640"/>
+          </a:xfrm>
+          <a:prstGeom prst="ellipse">
+            <a:avLst/>
+          </a:prstGeom>
+          <a:solidFill>
+            <a:srgbClr val="0E211A"/>
+          </a:solidFill>
+          <a:ln/>
+        </p:spPr>
+      </p:sp>
+      <p:sp>
+        <p:nvSpPr>
+          <p:cNvPr id="11" name="Text 9"/>
+          <p:cNvSpPr txBox="1"/>
+          <p:nvPr/>
+        </p:nvSpPr>
+        <p:spPr>
+          <a:xfrm>
+            <a:off x="749808" y="2898648"/>
+            <a:ext cx="548640" cy="548640"/>
+          </a:xfrm>
+          <a:prstGeom prst="rect">
+            <a:avLst/>
+          </a:prstGeom>
+          <a:noFill/>
+          <a:ln/>
+        </p:spPr>
+        <p:txBody>
+          <a:bodyPr wrap="square" lIns="0" tIns="0" rIns="0" bIns="0" rtlCol="0" anchor="ctr"/>
+          <a:lstStyle/>
+          <a:p>
+            <a:pPr algn="ctr" indent="0" marL="0">
+              <a:buNone/>
+            </a:pPr>
+            <a:r>
+              <a:rPr lang="en-US" sz="1800" b="1" dirty="0">
+                <a:solidFill>
+                  <a:srgbClr val="FFFFFF"/>
+                </a:solidFill>
+              </a:rPr>
+              <a:t>2</a:t>
+            </a:r>
+            <a:endParaRPr lang="en-US" sz="1800" dirty="0"/>
+          </a:p>
+        </p:txBody>
+      </p:sp>
+      <p:sp>
+        <p:nvSpPr>
+          <p:cNvPr id="12" name="Text 10"/>
+          <p:cNvSpPr txBox="1"/>
+          <p:nvPr/>
+        </p:nvSpPr>
+        <p:spPr>
+          <a:xfrm>
+            <a:off x="1508760" y="2807208"/>
+            <a:ext cx="3840480" cy="320040"/>
+          </a:xfrm>
+          <a:prstGeom prst="rect">
+            <a:avLst/>
+          </a:prstGeom>
+          <a:noFill/>
+          <a:ln/>
+        </p:spPr>
+        <p:txBody>
+          <a:bodyPr wrap="square" lIns="0" tIns="0" rIns="0" bIns="0" rtlCol="0" anchor="t"/>
+          <a:lstStyle/>
+          <a:p>
+            <a:pPr indent="0" marL="0">
+              <a:buNone/>
+            </a:pPr>
+            <a:r>
+              <a:rPr lang="en-US" sz="1600" b="1" dirty="0">
+                <a:solidFill>
+                  <a:srgbClr val="15291F"/>
+                </a:solidFill>
+              </a:rPr>
+              <a:t>UF2</a:t>
+            </a:r>
+            <a:endParaRPr lang="en-US" sz="1600" dirty="0"/>
+          </a:p>
+        </p:txBody>
+      </p:sp>
+      <p:sp>
+        <p:nvSpPr>
+          <p:cNvPr id="13" name="Text 11"/>
+          <p:cNvSpPr txBox="1"/>
+          <p:nvPr/>
+        </p:nvSpPr>
+        <p:spPr>
+          <a:xfrm>
+            <a:off x="1508760" y="3136392"/>
+            <a:ext cx="3840480" cy="457200"/>
+          </a:xfrm>
+          <a:prstGeom prst="rect">
+            <a:avLst/>
+          </a:prstGeom>
+          <a:noFill/>
+          <a:ln/>
+        </p:spPr>
+        <p:txBody>
+          <a:bodyPr wrap="square" lIns="0" tIns="0" rIns="0" bIns="0" rtlCol="0" anchor="t"/>
+          <a:lstStyle/>
+          <a:p>
+            <a:pPr indent="0" marL="0">
+              <a:buNone/>
+            </a:pPr>
+            <a:r>
+              <a:rPr lang="en-US" sz="1200" dirty="0">
+                <a:solidFill>
+                  <a:srgbClr val="5E6F67"/>
+                </a:solidFill>
+              </a:rPr>
+              <a:t>Copiar tinyml_tree.uf2 para o drive</a:t>
+            </a:r>
+            <a:endParaRPr lang="en-US" sz="1200" dirty="0"/>
+          </a:p>
+        </p:txBody>
+      </p:sp>
+      <p:sp>
+        <p:nvSpPr>
+          <p:cNvPr id="14" name="passo-2"/>
+          <p:cNvSpPr/>
+          <p:nvPr/>
+        </p:nvSpPr>
+        <p:spPr>
+          <a:xfrm>
+            <a:off x="548640" y="3794760"/>
+            <a:ext cx="4937760" cy="960120"/>
+          </a:xfrm>
+          <a:prstGeom prst="roundRect">
+            <a:avLst>
+              <a:gd name="adj" fmla="val 11429"/>
+            </a:avLst>
+          </a:prstGeom>
+          <a:solidFill>
+            <a:srgbClr val="EEF4F0"/>
+          </a:solidFill>
+          <a:ln/>
+        </p:spPr>
+      </p:sp>
+      <p:sp>
+        <p:nvSpPr>
+          <p:cNvPr id="15" name="Shape 13"/>
+          <p:cNvSpPr/>
+          <p:nvPr/>
+        </p:nvSpPr>
+        <p:spPr>
+          <a:xfrm>
+            <a:off x="749808" y="3995928"/>
+            <a:ext cx="548640" cy="548640"/>
+          </a:xfrm>
+          <a:prstGeom prst="ellipse">
+            <a:avLst/>
+          </a:prstGeom>
+          <a:solidFill>
+            <a:srgbClr val="0E211A"/>
+          </a:solidFill>
+          <a:ln/>
+        </p:spPr>
+      </p:sp>
+      <p:sp>
+        <p:nvSpPr>
+          <p:cNvPr id="16" name="Text 14"/>
+          <p:cNvSpPr txBox="1"/>
+          <p:nvPr/>
+        </p:nvSpPr>
+        <p:spPr>
+          <a:xfrm>
+            <a:off x="749808" y="3995928"/>
+            <a:ext cx="548640" cy="548640"/>
+          </a:xfrm>
+          <a:prstGeom prst="rect">
+            <a:avLst/>
+          </a:prstGeom>
+          <a:noFill/>
+          <a:ln/>
+        </p:spPr>
+        <p:txBody>
+          <a:bodyPr wrap="square" lIns="0" tIns="0" rIns="0" bIns="0" rtlCol="0" anchor="ctr"/>
+          <a:lstStyle/>
+          <a:p>
+            <a:pPr algn="ctr" indent="0" marL="0">
+              <a:buNone/>
+            </a:pPr>
+            <a:r>
+              <a:rPr lang="en-US" sz="1800" b="1" dirty="0">
+                <a:solidFill>
+                  <a:srgbClr val="FFFFFF"/>
+                </a:solidFill>
+              </a:rPr>
+              <a:t>3</a:t>
+            </a:r>
+            <a:endParaRPr lang="en-US" sz="1800" dirty="0"/>
+          </a:p>
+        </p:txBody>
+      </p:sp>
+      <p:sp>
+        <p:nvSpPr>
+          <p:cNvPr id="17" name="Text 15"/>
+          <p:cNvSpPr txBox="1"/>
+          <p:nvPr/>
+        </p:nvSpPr>
+        <p:spPr>
+          <a:xfrm>
+            <a:off x="1508760" y="3904488"/>
+            <a:ext cx="3840480" cy="320040"/>
+          </a:xfrm>
+          <a:prstGeom prst="rect">
+            <a:avLst/>
+          </a:prstGeom>
+          <a:noFill/>
+          <a:ln/>
+        </p:spPr>
+        <p:txBody>
+          <a:bodyPr wrap="square" lIns="0" tIns="0" rIns="0" bIns="0" rtlCol="0" anchor="t"/>
+          <a:lstStyle/>
+          <a:p>
+            <a:pPr indent="0" marL="0">
+              <a:buNone/>
+            </a:pPr>
+            <a:r>
+              <a:rPr lang="en-US" sz="1600" b="1" dirty="0">
+                <a:solidFill>
+                  <a:srgbClr val="15291F"/>
+                </a:solidFill>
+              </a:rPr>
+              <a:t>Reinício</a:t>
+            </a:r>
+            <a:endParaRPr lang="en-US" sz="1600" dirty="0"/>
+          </a:p>
+        </p:txBody>
+      </p:sp>
+      <p:sp>
+        <p:nvSpPr>
+          <p:cNvPr id="18" name="Text 16"/>
+          <p:cNvSpPr txBox="1"/>
+          <p:nvPr/>
+        </p:nvSpPr>
+        <p:spPr>
+          <a:xfrm>
+            <a:off x="1508760" y="4233672"/>
+            <a:ext cx="3840480" cy="457200"/>
+          </a:xfrm>
+          <a:prstGeom prst="rect">
+            <a:avLst/>
+          </a:prstGeom>
+          <a:noFill/>
+          <a:ln/>
+        </p:spPr>
+        <p:txBody>
+          <a:bodyPr wrap="square" lIns="0" tIns="0" rIns="0" bIns="0" rtlCol="0" anchor="t"/>
+          <a:lstStyle/>
+          <a:p>
+            <a:pPr indent="0" marL="0">
+              <a:buNone/>
+            </a:pPr>
+            <a:r>
+              <a:rPr lang="en-US" sz="1200" dirty="0">
+                <a:solidFill>
+                  <a:srgbClr val="5E6F67"/>
+                </a:solidFill>
+              </a:rPr>
+              <a:t>O Pico inicia o firmware C++ automaticamente</a:t>
+            </a:r>
+            <a:endParaRPr lang="en-US" sz="1200" dirty="0"/>
+          </a:p>
+        </p:txBody>
+      </p:sp>
+      <p:sp>
+        <p:nvSpPr>
+          <p:cNvPr id="19" name="passo-3"/>
+          <p:cNvSpPr/>
+          <p:nvPr/>
+        </p:nvSpPr>
+        <p:spPr>
+          <a:xfrm>
+            <a:off x="548640" y="4892040"/>
+            <a:ext cx="4937760" cy="960120"/>
+          </a:xfrm>
+          <a:prstGeom prst="roundRect">
+            <a:avLst>
+              <a:gd name="adj" fmla="val 11429"/>
+            </a:avLst>
+          </a:prstGeom>
+          <a:solidFill>
+            <a:srgbClr val="EEF4F0"/>
+          </a:solidFill>
+          <a:ln/>
+        </p:spPr>
+      </p:sp>
+      <p:sp>
+        <p:nvSpPr>
+          <p:cNvPr id="20" name="Shape 18"/>
+          <p:cNvSpPr/>
+          <p:nvPr/>
+        </p:nvSpPr>
+        <p:spPr>
+          <a:xfrm>
+            <a:off x="749808" y="5093208"/>
+            <a:ext cx="548640" cy="548640"/>
+          </a:xfrm>
+          <a:prstGeom prst="ellipse">
+            <a:avLst/>
+          </a:prstGeom>
+          <a:solidFill>
+            <a:srgbClr val="0E211A"/>
+          </a:solidFill>
+          <a:ln/>
+        </p:spPr>
+      </p:sp>
+      <p:sp>
+        <p:nvSpPr>
+          <p:cNvPr id="21" name="Text 19"/>
+          <p:cNvSpPr txBox="1"/>
+          <p:nvPr/>
+        </p:nvSpPr>
+        <p:spPr>
+          <a:xfrm>
+            <a:off x="749808" y="5093208"/>
+            <a:ext cx="548640" cy="548640"/>
+          </a:xfrm>
+          <a:prstGeom prst="rect">
+            <a:avLst/>
+          </a:prstGeom>
+          <a:noFill/>
+          <a:ln/>
+        </p:spPr>
+        <p:txBody>
+          <a:bodyPr wrap="square" lIns="0" tIns="0" rIns="0" bIns="0" rtlCol="0" anchor="ctr"/>
+          <a:lstStyle/>
+          <a:p>
+            <a:pPr algn="ctr" indent="0" marL="0">
+              <a:buNone/>
+            </a:pPr>
+            <a:r>
+              <a:rPr lang="en-US" sz="1800" b="1" dirty="0">
+                <a:solidFill>
+                  <a:srgbClr val="FFFFFF"/>
+                </a:solidFill>
+              </a:rPr>
+              <a:t>4</a:t>
+            </a:r>
+            <a:endParaRPr lang="en-US" sz="1800" dirty="0"/>
+          </a:p>
+        </p:txBody>
+      </p:sp>
+      <p:sp>
+        <p:nvSpPr>
+          <p:cNvPr id="22" name="Text 20"/>
+          <p:cNvSpPr txBox="1"/>
+          <p:nvPr/>
+        </p:nvSpPr>
+        <p:spPr>
+          <a:xfrm>
+            <a:off x="1508760" y="5001768"/>
+            <a:ext cx="3840480" cy="320040"/>
+          </a:xfrm>
+          <a:prstGeom prst="rect">
+            <a:avLst/>
+          </a:prstGeom>
+          <a:noFill/>
+          <a:ln/>
+        </p:spPr>
+        <p:txBody>
+          <a:bodyPr wrap="square" lIns="0" tIns="0" rIns="0" bIns="0" rtlCol="0" anchor="t"/>
+          <a:lstStyle/>
+          <a:p>
+            <a:pPr indent="0" marL="0">
+              <a:buNone/>
+            </a:pPr>
+            <a:r>
+              <a:rPr lang="en-US" sz="1600" b="1" dirty="0">
+                <a:solidFill>
+                  <a:srgbClr val="15291F"/>
+                </a:solidFill>
+              </a:rPr>
+              <a:t>Serial</a:t>
+            </a:r>
+            <a:endParaRPr lang="en-US" sz="1600" dirty="0"/>
+          </a:p>
+        </p:txBody>
+      </p:sp>
+      <p:sp>
+        <p:nvSpPr>
+          <p:cNvPr id="23" name="Text 21"/>
+          <p:cNvSpPr txBox="1"/>
+          <p:nvPr/>
+        </p:nvSpPr>
+        <p:spPr>
+          <a:xfrm>
+            <a:off x="1508760" y="5330952"/>
+            <a:ext cx="3840480" cy="457200"/>
+          </a:xfrm>
+          <a:prstGeom prst="rect">
+            <a:avLst/>
+          </a:prstGeom>
+          <a:noFill/>
+          <a:ln/>
+        </p:spPr>
+        <p:txBody>
+          <a:bodyPr wrap="square" lIns="0" tIns="0" rIns="0" bIns="0" rtlCol="0" anchor="t"/>
+          <a:lstStyle/>
+          <a:p>
+            <a:pPr indent="0" marL="0">
+              <a:buNone/>
+            </a:pPr>
+            <a:r>
+              <a:rPr lang="en-US" sz="1200" dirty="0">
+                <a:solidFill>
+                  <a:srgbClr val="5E6F67"/>
+                </a:solidFill>
+              </a:rPr>
+              <a:t>Monitor a 115200 baud mostra a classe prevista</a:t>
+            </a:r>
+            <a:endParaRPr lang="en-US" sz="1200" dirty="0"/>
+          </a:p>
+        </p:txBody>
+      </p:sp>
+      <p:sp>
+        <p:nvSpPr>
+          <p:cNvPr id="24" name="serial-bg"/>
+          <p:cNvSpPr/>
+          <p:nvPr/>
+        </p:nvSpPr>
+        <p:spPr>
+          <a:xfrm>
+            <a:off x="5760720" y="1600200"/>
+            <a:ext cx="5852160" cy="4526280"/>
           </a:xfrm>
           <a:prstGeom prst="roundRect">
             <a:avLst>
@@ -9115,259 +9565,45 @@
             </a:avLst>
           </a:prstGeom>
           <a:solidFill>
-            <a:srgbClr val="EEF4F0"/>
-          </a:solidFill>
-          <a:ln/>
-        </p:spPr>
-      </p:sp>
-      <p:sp>
-        <p:nvSpPr>
-          <p:cNvPr id="8" name="Text 5"/>
-          <p:cNvSpPr txBox="1"/>
-          <p:nvPr/>
-        </p:nvSpPr>
-        <p:spPr>
-          <a:xfrm>
-            <a:off x="6537960" y="1783080"/>
-            <a:ext cx="4846320" cy="320040"/>
-          </a:xfrm>
-          <a:prstGeom prst="rect">
-            <a:avLst/>
-          </a:prstGeom>
-          <a:noFill/>
-          <a:ln/>
-        </p:spPr>
-        <p:txBody>
-          <a:bodyPr wrap="square" lIns="0" tIns="0" rIns="0" bIns="0" rtlCol="0" anchor="t"/>
-          <a:lstStyle/>
-          <a:p>
-            <a:pPr indent="0" marL="0">
-              <a:buNone/>
-            </a:pPr>
-            <a:r>
-              <a:rPr lang="en-US" sz="1600" b="1" dirty="0">
-                <a:solidFill>
-                  <a:srgbClr val="15291F"/>
-                </a:solidFill>
-              </a:rPr>
-              <a:t>Proteção fora do domínio de treino</a:t>
-            </a:r>
-            <a:endParaRPr lang="en-US" sz="1600" dirty="0"/>
-          </a:p>
-        </p:txBody>
-      </p:sp>
-      <p:sp>
-        <p:nvSpPr>
-          <p:cNvPr id="9" name="ood-leitura"/>
-          <p:cNvSpPr/>
-          <p:nvPr/>
-        </p:nvSpPr>
-        <p:spPr>
-          <a:xfrm>
-            <a:off x="7498080" y="2286000"/>
-            <a:ext cx="2880360" cy="548640"/>
-          </a:xfrm>
-          <a:prstGeom prst="roundRect">
-            <a:avLst>
-              <a:gd name="adj" fmla="val 20000"/>
-            </a:avLst>
-          </a:prstGeom>
-          <a:solidFill>
-            <a:srgbClr val="FFFFFF"/>
-          </a:solidFill>
-          <a:ln/>
-        </p:spPr>
-      </p:sp>
-      <p:sp>
-        <p:nvSpPr>
-          <p:cNvPr id="10" name="Text 7"/>
-          <p:cNvSpPr txBox="1"/>
-          <p:nvPr/>
-        </p:nvSpPr>
-        <p:spPr>
-          <a:xfrm>
-            <a:off x="7589520" y="2286000"/>
-            <a:ext cx="2697480" cy="548640"/>
-          </a:xfrm>
-          <a:prstGeom prst="rect">
-            <a:avLst/>
-          </a:prstGeom>
-          <a:noFill/>
-          <a:ln/>
-        </p:spPr>
-        <p:txBody>
-          <a:bodyPr wrap="square" lIns="0" tIns="0" rIns="0" bIns="0" rtlCol="0" anchor="ctr"/>
-          <a:lstStyle/>
-          <a:p>
-            <a:pPr algn="ctr" indent="0" marL="0">
-              <a:buNone/>
-            </a:pPr>
-            <a:r>
-              <a:rPr lang="en-US" sz="1300" b="1" dirty="0">
-                <a:solidFill>
-                  <a:srgbClr val="15291F"/>
-                </a:solidFill>
-              </a:rPr>
-              <a:t>Nova leitura</a:t>
-            </a:r>
-            <a:endParaRPr lang="en-US" sz="1300" dirty="0"/>
-          </a:p>
-        </p:txBody>
-      </p:sp>
-      <p:sp>
-        <p:nvSpPr>
-          <p:cNvPr id="11" name="Shape 8"/>
-          <p:cNvSpPr/>
-          <p:nvPr/>
-        </p:nvSpPr>
-        <p:spPr>
-          <a:xfrm>
-            <a:off x="8938260" y="2834640"/>
-            <a:ext cx="0" cy="320040"/>
-          </a:xfrm>
-          <a:prstGeom prst="line">
-            <a:avLst/>
-          </a:prstGeom>
-          <a:noFill/>
-          <a:ln w="19050">
-            <a:solidFill>
-              <a:srgbClr val="5E6F67"/>
-            </a:solidFill>
-            <a:prstDash val="solid"/>
-            <a:tailEnd type="triangle"/>
-          </a:ln>
-        </p:spPr>
-      </p:sp>
-      <p:sp>
-        <p:nvSpPr>
-          <p:cNvPr id="12" name="ood-teste"/>
-          <p:cNvSpPr/>
-          <p:nvPr/>
-        </p:nvSpPr>
-        <p:spPr>
-          <a:xfrm>
-            <a:off x="7040880" y="3154680"/>
-            <a:ext cx="3794760" cy="777240"/>
-          </a:xfrm>
-          <a:prstGeom prst="roundRect">
-            <a:avLst>
-              <a:gd name="adj" fmla="val 14118"/>
-            </a:avLst>
-          </a:prstGeom>
-          <a:solidFill>
             <a:srgbClr val="0E211A"/>
           </a:solidFill>
           <a:ln/>
         </p:spPr>
       </p:sp>
-      <p:sp>
-        <p:nvSpPr>
-          <p:cNvPr id="13" name="Text 10"/>
+      <p:pic>
+        <p:nvPicPr>
+          <p:cNvPr id="25" name="print-serial" descr="/tmp/claude-1000/-home-moas-Ambiente/386331d5-ebca-4b03-9626-03e5c259a926/scratchpad/img/saida-serial-pico.png">    </p:cNvPr>
+          <p:cNvPicPr>
+            <a:picLocks noChangeAspect="1"/>
+          </p:cNvPicPr>
+          <p:nvPr/>
+        </p:nvPicPr>
+        <p:blipFill>
+          <a:blip r:embed="rId1"/>
+          <a:stretch>
+            <a:fillRect/>
+          </a:stretch>
+        </p:blipFill>
+        <p:spPr>
+          <a:xfrm>
+            <a:off x="5989320" y="1828800"/>
+            <a:ext cx="5394960" cy="3849624"/>
+          </a:xfrm>
+          <a:prstGeom prst="rect">
+            <a:avLst/>
+          </a:prstGeom>
+        </p:spPr>
+      </p:pic>
+      <p:sp>
+        <p:nvSpPr>
+          <p:cNvPr id="26" name="Text 23"/>
           <p:cNvSpPr txBox="1"/>
           <p:nvPr/>
         </p:nvSpPr>
         <p:spPr>
           <a:xfrm>
-            <a:off x="7132320" y="3154680"/>
-            <a:ext cx="3611880" cy="777240"/>
-          </a:xfrm>
-          <a:prstGeom prst="rect">
-            <a:avLst/>
-          </a:prstGeom>
-          <a:noFill/>
-          <a:ln/>
-        </p:spPr>
-        <p:txBody>
-          <a:bodyPr wrap="square" lIns="0" tIns="0" rIns="0" bIns="0" rtlCol="0" anchor="ctr"/>
-          <a:lstStyle/>
-          <a:p>
-            <a:pPr algn="ctr" indent="0" marL="0">
-              <a:buNone/>
-            </a:pPr>
-            <a:r>
-              <a:rPr lang="en-US" sz="1300" b="1" dirty="0">
-                <a:solidFill>
-                  <a:srgbClr val="FFFFFF"/>
-                </a:solidFill>
-              </a:rPr>
-              <a:t>T entre 20 e 39,8 °C</a:t>
-            </a:r>
-            <a:endParaRPr lang="en-US" sz="1300" dirty="0"/>
-          </a:p>
-          <a:p>
-            <a:pPr algn="ctr" indent="0" marL="0">
-              <a:buNone/>
-            </a:pPr>
-            <a:r>
-              <a:rPr lang="en-US" sz="1300" b="1" dirty="0">
-                <a:solidFill>
-                  <a:srgbClr val="FFFFFF"/>
-                </a:solidFill>
-              </a:rPr>
-              <a:t>e U entre 40 e 98 %?</a:t>
-            </a:r>
-            <a:endParaRPr lang="en-US" sz="1300" dirty="0"/>
-          </a:p>
-        </p:txBody>
-      </p:sp>
-      <p:sp>
-        <p:nvSpPr>
-          <p:cNvPr id="14" name="Shape 11"/>
-          <p:cNvSpPr/>
-          <p:nvPr/>
-        </p:nvSpPr>
-        <p:spPr>
-          <a:xfrm>
-            <a:off x="7726680" y="3931920"/>
-            <a:ext cx="0" cy="457200"/>
-          </a:xfrm>
-          <a:prstGeom prst="line">
-            <a:avLst/>
-          </a:prstGeom>
-          <a:noFill/>
-          <a:ln w="19050">
-            <a:solidFill>
-              <a:srgbClr val="3F8A70"/>
-            </a:solidFill>
-            <a:prstDash val="solid"/>
-            <a:tailEnd type="triangle"/>
-          </a:ln>
-        </p:spPr>
-      </p:sp>
-      <p:sp>
-        <p:nvSpPr>
-          <p:cNvPr id="15" name="Shape 12"/>
-          <p:cNvSpPr/>
-          <p:nvPr/>
-        </p:nvSpPr>
-        <p:spPr>
-          <a:xfrm>
-            <a:off x="10241280" y="3931920"/>
-            <a:ext cx="0" cy="457200"/>
-          </a:xfrm>
-          <a:prstGeom prst="line">
-            <a:avLst/>
-          </a:prstGeom>
-          <a:noFill/>
-          <a:ln w="19050">
-            <a:solidFill>
-              <a:srgbClr val="CC665E"/>
-            </a:solidFill>
-            <a:prstDash val="solid"/>
-            <a:tailEnd type="triangle"/>
-          </a:ln>
-        </p:spPr>
-      </p:sp>
-      <p:sp>
-        <p:nvSpPr>
-          <p:cNvPr id="16" name="Text 13"/>
-          <p:cNvSpPr txBox="1"/>
-          <p:nvPr/>
-        </p:nvSpPr>
-        <p:spPr>
-          <a:xfrm>
-            <a:off x="7818120" y="4005072"/>
-            <a:ext cx="548640" cy="274320"/>
+            <a:off x="5989320" y="5742432"/>
+            <a:ext cx="5394960" cy="274320"/>
           </a:xfrm>
           <a:prstGeom prst="rect">
             <a:avLst/>
@@ -9383,200 +9619,12 @@
               <a:buNone/>
             </a:pPr>
             <a:r>
-              <a:rPr lang="en-US" sz="1100" b="1" dirty="0">
-                <a:solidFill>
-                  <a:srgbClr val="3F8A70"/>
-                </a:solidFill>
-              </a:rPr>
-              <a:t>sim</a:t>
-            </a:r>
-            <a:endParaRPr lang="en-US" sz="1100" dirty="0"/>
-          </a:p>
-        </p:txBody>
-      </p:sp>
-      <p:sp>
-        <p:nvSpPr>
-          <p:cNvPr id="17" name="Text 14"/>
-          <p:cNvSpPr txBox="1"/>
-          <p:nvPr/>
-        </p:nvSpPr>
-        <p:spPr>
-          <a:xfrm>
-            <a:off x="10332720" y="4005072"/>
-            <a:ext cx="548640" cy="274320"/>
-          </a:xfrm>
-          <a:prstGeom prst="rect">
-            <a:avLst/>
-          </a:prstGeom>
-          <a:noFill/>
-          <a:ln/>
-        </p:spPr>
-        <p:txBody>
-          <a:bodyPr wrap="square" lIns="0" tIns="0" rIns="0" bIns="0" rtlCol="0" anchor="t"/>
-          <a:lstStyle/>
-          <a:p>
-            <a:pPr indent="0" marL="0">
-              <a:buNone/>
-            </a:pPr>
-            <a:r>
-              <a:rPr lang="en-US" sz="1100" b="1" dirty="0">
-                <a:solidFill>
-                  <a:srgbClr val="CC665E"/>
-                </a:solidFill>
-              </a:rPr>
-              <a:t>não</a:t>
-            </a:r>
-            <a:endParaRPr lang="en-US" sz="1100" dirty="0"/>
-          </a:p>
-        </p:txBody>
-      </p:sp>
-      <p:sp>
-        <p:nvSpPr>
-          <p:cNvPr id="18" name="ood-arvore"/>
-          <p:cNvSpPr/>
-          <p:nvPr/>
-        </p:nvSpPr>
-        <p:spPr>
-          <a:xfrm>
-            <a:off x="6537960" y="4389120"/>
-            <a:ext cx="2377440" cy="685800"/>
-          </a:xfrm>
-          <a:prstGeom prst="roundRect">
-            <a:avLst>
-              <a:gd name="adj" fmla="val 16000"/>
-            </a:avLst>
-          </a:prstGeom>
-          <a:solidFill>
-            <a:srgbClr val="E1EFE8"/>
-          </a:solidFill>
-          <a:ln/>
-        </p:spPr>
-      </p:sp>
-      <p:sp>
-        <p:nvSpPr>
-          <p:cNvPr id="19" name="Text 16"/>
-          <p:cNvSpPr txBox="1"/>
-          <p:nvPr/>
-        </p:nvSpPr>
-        <p:spPr>
-          <a:xfrm>
-            <a:off x="6629400" y="4389120"/>
-            <a:ext cx="2194560" cy="685800"/>
-          </a:xfrm>
-          <a:prstGeom prst="rect">
-            <a:avLst/>
-          </a:prstGeom>
-          <a:noFill/>
-          <a:ln/>
-        </p:spPr>
-        <p:txBody>
-          <a:bodyPr wrap="square" lIns="0" tIns="0" rIns="0" bIns="0" rtlCol="0" anchor="ctr"/>
-          <a:lstStyle/>
-          <a:p>
-            <a:pPr algn="ctr" indent="0" marL="0">
-              <a:buNone/>
-            </a:pPr>
-            <a:r>
-              <a:rPr lang="en-US" sz="1300" b="1" dirty="0">
-                <a:solidFill>
-                  <a:srgbClr val="3F8A70"/>
-                </a:solidFill>
-              </a:rPr>
-              <a:t>Árvore de decisão</a:t>
-            </a:r>
-            <a:endParaRPr lang="en-US" sz="1300" dirty="0"/>
-          </a:p>
-        </p:txBody>
-      </p:sp>
-      <p:sp>
-        <p:nvSpPr>
-          <p:cNvPr id="20" name="ood-regras"/>
-          <p:cNvSpPr/>
-          <p:nvPr/>
-        </p:nvSpPr>
-        <p:spPr>
-          <a:xfrm>
-            <a:off x="9098280" y="4389120"/>
-            <a:ext cx="2331720" cy="685800"/>
-          </a:xfrm>
-          <a:prstGeom prst="roundRect">
-            <a:avLst>
-              <a:gd name="adj" fmla="val 16000"/>
-            </a:avLst>
-          </a:prstGeom>
-          <a:solidFill>
-            <a:srgbClr val="F6E1DF"/>
-          </a:solidFill>
-          <a:ln/>
-        </p:spPr>
-      </p:sp>
-      <p:sp>
-        <p:nvSpPr>
-          <p:cNvPr id="21" name="Text 18"/>
-          <p:cNvSpPr txBox="1"/>
-          <p:nvPr/>
-        </p:nvSpPr>
-        <p:spPr>
-          <a:xfrm>
-            <a:off x="9189720" y="4389120"/>
-            <a:ext cx="2148840" cy="685800"/>
-          </a:xfrm>
-          <a:prstGeom prst="rect">
-            <a:avLst/>
-          </a:prstGeom>
-          <a:noFill/>
-          <a:ln/>
-        </p:spPr>
-        <p:txBody>
-          <a:bodyPr wrap="square" lIns="0" tIns="0" rIns="0" bIns="0" rtlCol="0" anchor="ctr"/>
-          <a:lstStyle/>
-          <a:p>
-            <a:pPr algn="ctr" indent="0" marL="0">
-              <a:buNone/>
-            </a:pPr>
-            <a:r>
-              <a:rPr lang="en-US" sz="1300" b="1" dirty="0">
-                <a:solidFill>
-                  <a:srgbClr val="CC665E"/>
-                </a:solidFill>
-              </a:rPr>
-              <a:t>Regras determinísticas</a:t>
-            </a:r>
-            <a:endParaRPr lang="en-US" sz="1300" dirty="0"/>
-          </a:p>
-        </p:txBody>
-      </p:sp>
-      <p:sp>
-        <p:nvSpPr>
-          <p:cNvPr id="22" name="Text 19"/>
-          <p:cNvSpPr txBox="1"/>
-          <p:nvPr/>
-        </p:nvSpPr>
-        <p:spPr>
-          <a:xfrm>
-            <a:off x="6537960" y="5303520"/>
-            <a:ext cx="4892040" cy="640080"/>
-          </a:xfrm>
-          <a:prstGeom prst="rect">
-            <a:avLst/>
-          </a:prstGeom>
-          <a:noFill/>
-          <a:ln/>
-        </p:spPr>
-        <p:txBody>
-          <a:bodyPr wrap="square" lIns="0" tIns="0" rIns="0" bIns="0" rtlCol="0" anchor="t"/>
-          <a:lstStyle/>
-          <a:p>
-            <a:pPr indent="0" marL="0">
-              <a:buNone/>
-            </a:pPr>
-            <a:r>
-              <a:rPr lang="en-US" sz="1200" dirty="0">
-                <a:solidFill>
-                  <a:srgbClr val="5E6F67"/>
-                </a:solidFill>
-              </a:rPr>
-              <a:t>Leitura inválida (NaN ou fora dos limites físicos): inferência suspensa e atuadores desligados.</a:t>
+              <a:rPr lang="en-US" sz="1200" b="1" dirty="0">
+                <a:solidFill>
+                  <a:srgbClr val="B9E3CF"/>
+                </a:solidFill>
+              </a:rPr>
+              <a:t>Saída real: T=26,7 °C · U=61 % · classe=normal</a:t>
             </a:r>
             <a:endParaRPr lang="en-US" sz="1200" dirty="0"/>
           </a:p>
@@ -9684,7 +9732,7 @@
                   <a:srgbClr val="3F8A70"/>
                 </a:solidFill>
               </a:rPr>
-              <a:t>13 · GRAVAÇÃO E EXECUÇÃO</a:t>
+              <a:t>13 · NUVEM E PAINEL</a:t>
             </a:r>
             <a:endParaRPr lang="en-US" sz="1200" dirty="0"/>
           </a:p>
@@ -9722,7 +9770,7 @@
                   <a:srgbClr val="15291F"/>
                 </a:solidFill>
               </a:rPr>
-              <a:t>Firmware gravado e rodando no Pico W</a:t>
+              <a:t>Do Pico W ao navegador, com segurança</a:t>
             </a:r>
             <a:endParaRPr lang="en-US" sz="3400" dirty="0"/>
           </a:p>
@@ -9730,614 +9778,14 @@
       </p:sp>
       <p:sp>
         <p:nvSpPr>
-          <p:cNvPr id="4" name="passo-0"/>
+          <p:cNvPr id="4" name="dash-bg"/>
           <p:cNvSpPr/>
           <p:nvPr/>
         </p:nvSpPr>
         <p:spPr>
           <a:xfrm>
             <a:off x="548640" y="1600200"/>
-            <a:ext cx="4937760" cy="960120"/>
-          </a:xfrm>
-          <a:prstGeom prst="roundRect">
-            <a:avLst>
-              <a:gd name="adj" fmla="val 11429"/>
-            </a:avLst>
-          </a:prstGeom>
-          <a:solidFill>
-            <a:srgbClr val="EEF4F0"/>
-          </a:solidFill>
-          <a:ln/>
-        </p:spPr>
-      </p:sp>
-      <p:sp>
-        <p:nvSpPr>
-          <p:cNvPr id="5" name="Shape 3"/>
-          <p:cNvSpPr/>
-          <p:nvPr/>
-        </p:nvSpPr>
-        <p:spPr>
-          <a:xfrm>
-            <a:off x="749808" y="1801368"/>
-            <a:ext cx="548640" cy="548640"/>
-          </a:xfrm>
-          <a:prstGeom prst="ellipse">
-            <a:avLst/>
-          </a:prstGeom>
-          <a:solidFill>
-            <a:srgbClr val="0E211A"/>
-          </a:solidFill>
-          <a:ln/>
-        </p:spPr>
-      </p:sp>
-      <p:sp>
-        <p:nvSpPr>
-          <p:cNvPr id="6" name="Text 4"/>
-          <p:cNvSpPr txBox="1"/>
-          <p:nvPr/>
-        </p:nvSpPr>
-        <p:spPr>
-          <a:xfrm>
-            <a:off x="749808" y="1801368"/>
-            <a:ext cx="548640" cy="548640"/>
-          </a:xfrm>
-          <a:prstGeom prst="rect">
-            <a:avLst/>
-          </a:prstGeom>
-          <a:noFill/>
-          <a:ln/>
-        </p:spPr>
-        <p:txBody>
-          <a:bodyPr wrap="square" lIns="0" tIns="0" rIns="0" bIns="0" rtlCol="0" anchor="ctr"/>
-          <a:lstStyle/>
-          <a:p>
-            <a:pPr algn="ctr" indent="0" marL="0">
-              <a:buNone/>
-            </a:pPr>
-            <a:r>
-              <a:rPr lang="en-US" sz="1800" b="1" dirty="0">
-                <a:solidFill>
-                  <a:srgbClr val="FFFFFF"/>
-                </a:solidFill>
-              </a:rPr>
-              <a:t>1</a:t>
-            </a:r>
-            <a:endParaRPr lang="en-US" sz="1800" dirty="0"/>
-          </a:p>
-        </p:txBody>
-      </p:sp>
-      <p:sp>
-        <p:nvSpPr>
-          <p:cNvPr id="7" name="Text 5"/>
-          <p:cNvSpPr txBox="1"/>
-          <p:nvPr/>
-        </p:nvSpPr>
-        <p:spPr>
-          <a:xfrm>
-            <a:off x="1508760" y="1709928"/>
-            <a:ext cx="3840480" cy="320040"/>
-          </a:xfrm>
-          <a:prstGeom prst="rect">
-            <a:avLst/>
-          </a:prstGeom>
-          <a:noFill/>
-          <a:ln/>
-        </p:spPr>
-        <p:txBody>
-          <a:bodyPr wrap="square" lIns="0" tIns="0" rIns="0" bIns="0" rtlCol="0" anchor="t"/>
-          <a:lstStyle/>
-          <a:p>
-            <a:pPr indent="0" marL="0">
-              <a:buNone/>
-            </a:pPr>
-            <a:r>
-              <a:rPr lang="en-US" sz="1600" b="1" dirty="0">
-                <a:solidFill>
-                  <a:srgbClr val="15291F"/>
-                </a:solidFill>
-              </a:rPr>
-              <a:t>BOOTSEL</a:t>
-            </a:r>
-            <a:endParaRPr lang="en-US" sz="1600" dirty="0"/>
-          </a:p>
-        </p:txBody>
-      </p:sp>
-      <p:sp>
-        <p:nvSpPr>
-          <p:cNvPr id="8" name="Text 6"/>
-          <p:cNvSpPr txBox="1"/>
-          <p:nvPr/>
-        </p:nvSpPr>
-        <p:spPr>
-          <a:xfrm>
-            <a:off x="1508760" y="2039112"/>
-            <a:ext cx="3840480" cy="457200"/>
-          </a:xfrm>
-          <a:prstGeom prst="rect">
-            <a:avLst/>
-          </a:prstGeom>
-          <a:noFill/>
-          <a:ln/>
-        </p:spPr>
-        <p:txBody>
-          <a:bodyPr wrap="square" lIns="0" tIns="0" rIns="0" bIns="0" rtlCol="0" anchor="t"/>
-          <a:lstStyle/>
-          <a:p>
-            <a:pPr indent="0" marL="0">
-              <a:buNone/>
-            </a:pPr>
-            <a:r>
-              <a:rPr lang="en-US" sz="1200" dirty="0">
-                <a:solidFill>
-                  <a:srgbClr val="5E6F67"/>
-                </a:solidFill>
-              </a:rPr>
-              <a:t>Segurar o botão ao conectar: a placa vira o drive RPI-RP2</a:t>
-            </a:r>
-            <a:endParaRPr lang="en-US" sz="1200" dirty="0"/>
-          </a:p>
-        </p:txBody>
-      </p:sp>
-      <p:sp>
-        <p:nvSpPr>
-          <p:cNvPr id="9" name="passo-1"/>
-          <p:cNvSpPr/>
-          <p:nvPr/>
-        </p:nvSpPr>
-        <p:spPr>
-          <a:xfrm>
-            <a:off x="548640" y="2697480"/>
-            <a:ext cx="4937760" cy="960120"/>
-          </a:xfrm>
-          <a:prstGeom prst="roundRect">
-            <a:avLst>
-              <a:gd name="adj" fmla="val 11429"/>
-            </a:avLst>
-          </a:prstGeom>
-          <a:solidFill>
-            <a:srgbClr val="EEF4F0"/>
-          </a:solidFill>
-          <a:ln/>
-        </p:spPr>
-      </p:sp>
-      <p:sp>
-        <p:nvSpPr>
-          <p:cNvPr id="10" name="Shape 8"/>
-          <p:cNvSpPr/>
-          <p:nvPr/>
-        </p:nvSpPr>
-        <p:spPr>
-          <a:xfrm>
-            <a:off x="749808" y="2898648"/>
-            <a:ext cx="548640" cy="548640"/>
-          </a:xfrm>
-          <a:prstGeom prst="ellipse">
-            <a:avLst/>
-          </a:prstGeom>
-          <a:solidFill>
-            <a:srgbClr val="0E211A"/>
-          </a:solidFill>
-          <a:ln/>
-        </p:spPr>
-      </p:sp>
-      <p:sp>
-        <p:nvSpPr>
-          <p:cNvPr id="11" name="Text 9"/>
-          <p:cNvSpPr txBox="1"/>
-          <p:nvPr/>
-        </p:nvSpPr>
-        <p:spPr>
-          <a:xfrm>
-            <a:off x="749808" y="2898648"/>
-            <a:ext cx="548640" cy="548640"/>
-          </a:xfrm>
-          <a:prstGeom prst="rect">
-            <a:avLst/>
-          </a:prstGeom>
-          <a:noFill/>
-          <a:ln/>
-        </p:spPr>
-        <p:txBody>
-          <a:bodyPr wrap="square" lIns="0" tIns="0" rIns="0" bIns="0" rtlCol="0" anchor="ctr"/>
-          <a:lstStyle/>
-          <a:p>
-            <a:pPr algn="ctr" indent="0" marL="0">
-              <a:buNone/>
-            </a:pPr>
-            <a:r>
-              <a:rPr lang="en-US" sz="1800" b="1" dirty="0">
-                <a:solidFill>
-                  <a:srgbClr val="FFFFFF"/>
-                </a:solidFill>
-              </a:rPr>
-              <a:t>2</a:t>
-            </a:r>
-            <a:endParaRPr lang="en-US" sz="1800" dirty="0"/>
-          </a:p>
-        </p:txBody>
-      </p:sp>
-      <p:sp>
-        <p:nvSpPr>
-          <p:cNvPr id="12" name="Text 10"/>
-          <p:cNvSpPr txBox="1"/>
-          <p:nvPr/>
-        </p:nvSpPr>
-        <p:spPr>
-          <a:xfrm>
-            <a:off x="1508760" y="2807208"/>
-            <a:ext cx="3840480" cy="320040"/>
-          </a:xfrm>
-          <a:prstGeom prst="rect">
-            <a:avLst/>
-          </a:prstGeom>
-          <a:noFill/>
-          <a:ln/>
-        </p:spPr>
-        <p:txBody>
-          <a:bodyPr wrap="square" lIns="0" tIns="0" rIns="0" bIns="0" rtlCol="0" anchor="t"/>
-          <a:lstStyle/>
-          <a:p>
-            <a:pPr indent="0" marL="0">
-              <a:buNone/>
-            </a:pPr>
-            <a:r>
-              <a:rPr lang="en-US" sz="1600" b="1" dirty="0">
-                <a:solidFill>
-                  <a:srgbClr val="15291F"/>
-                </a:solidFill>
-              </a:rPr>
-              <a:t>UF2</a:t>
-            </a:r>
-            <a:endParaRPr lang="en-US" sz="1600" dirty="0"/>
-          </a:p>
-        </p:txBody>
-      </p:sp>
-      <p:sp>
-        <p:nvSpPr>
-          <p:cNvPr id="13" name="Text 11"/>
-          <p:cNvSpPr txBox="1"/>
-          <p:nvPr/>
-        </p:nvSpPr>
-        <p:spPr>
-          <a:xfrm>
-            <a:off x="1508760" y="3136392"/>
-            <a:ext cx="3840480" cy="457200"/>
-          </a:xfrm>
-          <a:prstGeom prst="rect">
-            <a:avLst/>
-          </a:prstGeom>
-          <a:noFill/>
-          <a:ln/>
-        </p:spPr>
-        <p:txBody>
-          <a:bodyPr wrap="square" lIns="0" tIns="0" rIns="0" bIns="0" rtlCol="0" anchor="t"/>
-          <a:lstStyle/>
-          <a:p>
-            <a:pPr indent="0" marL="0">
-              <a:buNone/>
-            </a:pPr>
-            <a:r>
-              <a:rPr lang="en-US" sz="1200" dirty="0">
-                <a:solidFill>
-                  <a:srgbClr val="5E6F67"/>
-                </a:solidFill>
-              </a:rPr>
-              <a:t>Copiar tinyml_tree.uf2 para o drive</a:t>
-            </a:r>
-            <a:endParaRPr lang="en-US" sz="1200" dirty="0"/>
-          </a:p>
-        </p:txBody>
-      </p:sp>
-      <p:sp>
-        <p:nvSpPr>
-          <p:cNvPr id="14" name="passo-2"/>
-          <p:cNvSpPr/>
-          <p:nvPr/>
-        </p:nvSpPr>
-        <p:spPr>
-          <a:xfrm>
-            <a:off x="548640" y="3794760"/>
-            <a:ext cx="4937760" cy="960120"/>
-          </a:xfrm>
-          <a:prstGeom prst="roundRect">
-            <a:avLst>
-              <a:gd name="adj" fmla="val 11429"/>
-            </a:avLst>
-          </a:prstGeom>
-          <a:solidFill>
-            <a:srgbClr val="EEF4F0"/>
-          </a:solidFill>
-          <a:ln/>
-        </p:spPr>
-      </p:sp>
-      <p:sp>
-        <p:nvSpPr>
-          <p:cNvPr id="15" name="Shape 13"/>
-          <p:cNvSpPr/>
-          <p:nvPr/>
-        </p:nvSpPr>
-        <p:spPr>
-          <a:xfrm>
-            <a:off x="749808" y="3995928"/>
-            <a:ext cx="548640" cy="548640"/>
-          </a:xfrm>
-          <a:prstGeom prst="ellipse">
-            <a:avLst/>
-          </a:prstGeom>
-          <a:solidFill>
-            <a:srgbClr val="0E211A"/>
-          </a:solidFill>
-          <a:ln/>
-        </p:spPr>
-      </p:sp>
-      <p:sp>
-        <p:nvSpPr>
-          <p:cNvPr id="16" name="Text 14"/>
-          <p:cNvSpPr txBox="1"/>
-          <p:nvPr/>
-        </p:nvSpPr>
-        <p:spPr>
-          <a:xfrm>
-            <a:off x="749808" y="3995928"/>
-            <a:ext cx="548640" cy="548640"/>
-          </a:xfrm>
-          <a:prstGeom prst="rect">
-            <a:avLst/>
-          </a:prstGeom>
-          <a:noFill/>
-          <a:ln/>
-        </p:spPr>
-        <p:txBody>
-          <a:bodyPr wrap="square" lIns="0" tIns="0" rIns="0" bIns="0" rtlCol="0" anchor="ctr"/>
-          <a:lstStyle/>
-          <a:p>
-            <a:pPr algn="ctr" indent="0" marL="0">
-              <a:buNone/>
-            </a:pPr>
-            <a:r>
-              <a:rPr lang="en-US" sz="1800" b="1" dirty="0">
-                <a:solidFill>
-                  <a:srgbClr val="FFFFFF"/>
-                </a:solidFill>
-              </a:rPr>
-              <a:t>3</a:t>
-            </a:r>
-            <a:endParaRPr lang="en-US" sz="1800" dirty="0"/>
-          </a:p>
-        </p:txBody>
-      </p:sp>
-      <p:sp>
-        <p:nvSpPr>
-          <p:cNvPr id="17" name="Text 15"/>
-          <p:cNvSpPr txBox="1"/>
-          <p:nvPr/>
-        </p:nvSpPr>
-        <p:spPr>
-          <a:xfrm>
-            <a:off x="1508760" y="3904488"/>
-            <a:ext cx="3840480" cy="320040"/>
-          </a:xfrm>
-          <a:prstGeom prst="rect">
-            <a:avLst/>
-          </a:prstGeom>
-          <a:noFill/>
-          <a:ln/>
-        </p:spPr>
-        <p:txBody>
-          <a:bodyPr wrap="square" lIns="0" tIns="0" rIns="0" bIns="0" rtlCol="0" anchor="t"/>
-          <a:lstStyle/>
-          <a:p>
-            <a:pPr indent="0" marL="0">
-              <a:buNone/>
-            </a:pPr>
-            <a:r>
-              <a:rPr lang="en-US" sz="1600" b="1" dirty="0">
-                <a:solidFill>
-                  <a:srgbClr val="15291F"/>
-                </a:solidFill>
-              </a:rPr>
-              <a:t>Reinício</a:t>
-            </a:r>
-            <a:endParaRPr lang="en-US" sz="1600" dirty="0"/>
-          </a:p>
-        </p:txBody>
-      </p:sp>
-      <p:sp>
-        <p:nvSpPr>
-          <p:cNvPr id="18" name="Text 16"/>
-          <p:cNvSpPr txBox="1"/>
-          <p:nvPr/>
-        </p:nvSpPr>
-        <p:spPr>
-          <a:xfrm>
-            <a:off x="1508760" y="4233672"/>
-            <a:ext cx="3840480" cy="457200"/>
-          </a:xfrm>
-          <a:prstGeom prst="rect">
-            <a:avLst/>
-          </a:prstGeom>
-          <a:noFill/>
-          <a:ln/>
-        </p:spPr>
-        <p:txBody>
-          <a:bodyPr wrap="square" lIns="0" tIns="0" rIns="0" bIns="0" rtlCol="0" anchor="t"/>
-          <a:lstStyle/>
-          <a:p>
-            <a:pPr indent="0" marL="0">
-              <a:buNone/>
-            </a:pPr>
-            <a:r>
-              <a:rPr lang="en-US" sz="1200" dirty="0">
-                <a:solidFill>
-                  <a:srgbClr val="5E6F67"/>
-                </a:solidFill>
-              </a:rPr>
-              <a:t>O Pico inicia o firmware C++ automaticamente</a:t>
-            </a:r>
-            <a:endParaRPr lang="en-US" sz="1200" dirty="0"/>
-          </a:p>
-        </p:txBody>
-      </p:sp>
-      <p:sp>
-        <p:nvSpPr>
-          <p:cNvPr id="19" name="passo-3"/>
-          <p:cNvSpPr/>
-          <p:nvPr/>
-        </p:nvSpPr>
-        <p:spPr>
-          <a:xfrm>
-            <a:off x="548640" y="4892040"/>
-            <a:ext cx="4937760" cy="960120"/>
-          </a:xfrm>
-          <a:prstGeom prst="roundRect">
-            <a:avLst>
-              <a:gd name="adj" fmla="val 11429"/>
-            </a:avLst>
-          </a:prstGeom>
-          <a:solidFill>
-            <a:srgbClr val="EEF4F0"/>
-          </a:solidFill>
-          <a:ln/>
-        </p:spPr>
-      </p:sp>
-      <p:sp>
-        <p:nvSpPr>
-          <p:cNvPr id="20" name="Shape 18"/>
-          <p:cNvSpPr/>
-          <p:nvPr/>
-        </p:nvSpPr>
-        <p:spPr>
-          <a:xfrm>
-            <a:off x="749808" y="5093208"/>
-            <a:ext cx="548640" cy="548640"/>
-          </a:xfrm>
-          <a:prstGeom prst="ellipse">
-            <a:avLst/>
-          </a:prstGeom>
-          <a:solidFill>
-            <a:srgbClr val="0E211A"/>
-          </a:solidFill>
-          <a:ln/>
-        </p:spPr>
-      </p:sp>
-      <p:sp>
-        <p:nvSpPr>
-          <p:cNvPr id="21" name="Text 19"/>
-          <p:cNvSpPr txBox="1"/>
-          <p:nvPr/>
-        </p:nvSpPr>
-        <p:spPr>
-          <a:xfrm>
-            <a:off x="749808" y="5093208"/>
-            <a:ext cx="548640" cy="548640"/>
-          </a:xfrm>
-          <a:prstGeom prst="rect">
-            <a:avLst/>
-          </a:prstGeom>
-          <a:noFill/>
-          <a:ln/>
-        </p:spPr>
-        <p:txBody>
-          <a:bodyPr wrap="square" lIns="0" tIns="0" rIns="0" bIns="0" rtlCol="0" anchor="ctr"/>
-          <a:lstStyle/>
-          <a:p>
-            <a:pPr algn="ctr" indent="0" marL="0">
-              <a:buNone/>
-            </a:pPr>
-            <a:r>
-              <a:rPr lang="en-US" sz="1800" b="1" dirty="0">
-                <a:solidFill>
-                  <a:srgbClr val="FFFFFF"/>
-                </a:solidFill>
-              </a:rPr>
-              <a:t>4</a:t>
-            </a:r>
-            <a:endParaRPr lang="en-US" sz="1800" dirty="0"/>
-          </a:p>
-        </p:txBody>
-      </p:sp>
-      <p:sp>
-        <p:nvSpPr>
-          <p:cNvPr id="22" name="Text 20"/>
-          <p:cNvSpPr txBox="1"/>
-          <p:nvPr/>
-        </p:nvSpPr>
-        <p:spPr>
-          <a:xfrm>
-            <a:off x="1508760" y="5001768"/>
-            <a:ext cx="3840480" cy="320040"/>
-          </a:xfrm>
-          <a:prstGeom prst="rect">
-            <a:avLst/>
-          </a:prstGeom>
-          <a:noFill/>
-          <a:ln/>
-        </p:spPr>
-        <p:txBody>
-          <a:bodyPr wrap="square" lIns="0" tIns="0" rIns="0" bIns="0" rtlCol="0" anchor="t"/>
-          <a:lstStyle/>
-          <a:p>
-            <a:pPr indent="0" marL="0">
-              <a:buNone/>
-            </a:pPr>
-            <a:r>
-              <a:rPr lang="en-US" sz="1600" b="1" dirty="0">
-                <a:solidFill>
-                  <a:srgbClr val="15291F"/>
-                </a:solidFill>
-              </a:rPr>
-              <a:t>Serial</a:t>
-            </a:r>
-            <a:endParaRPr lang="en-US" sz="1600" dirty="0"/>
-          </a:p>
-        </p:txBody>
-      </p:sp>
-      <p:sp>
-        <p:nvSpPr>
-          <p:cNvPr id="23" name="Text 21"/>
-          <p:cNvSpPr txBox="1"/>
-          <p:nvPr/>
-        </p:nvSpPr>
-        <p:spPr>
-          <a:xfrm>
-            <a:off x="1508760" y="5330952"/>
-            <a:ext cx="3840480" cy="457200"/>
-          </a:xfrm>
-          <a:prstGeom prst="rect">
-            <a:avLst/>
-          </a:prstGeom>
-          <a:noFill/>
-          <a:ln/>
-        </p:spPr>
-        <p:txBody>
-          <a:bodyPr wrap="square" lIns="0" tIns="0" rIns="0" bIns="0" rtlCol="0" anchor="t"/>
-          <a:lstStyle/>
-          <a:p>
-            <a:pPr indent="0" marL="0">
-              <a:buNone/>
-            </a:pPr>
-            <a:r>
-              <a:rPr lang="en-US" sz="1200" dirty="0">
-                <a:solidFill>
-                  <a:srgbClr val="5E6F67"/>
-                </a:solidFill>
-              </a:rPr>
-              <a:t>Monitor a 115200 baud mostra a classe prevista</a:t>
-            </a:r>
-            <a:endParaRPr lang="en-US" sz="1200" dirty="0"/>
-          </a:p>
-        </p:txBody>
-      </p:sp>
-      <p:sp>
-        <p:nvSpPr>
-          <p:cNvPr id="24" name="serial-bg"/>
-          <p:cNvSpPr/>
-          <p:nvPr/>
-        </p:nvSpPr>
-        <p:spPr>
-          <a:xfrm>
-            <a:off x="5760720" y="1600200"/>
-            <a:ext cx="5852160" cy="4526280"/>
+            <a:ext cx="6949440" cy="4526280"/>
           </a:xfrm>
           <a:prstGeom prst="roundRect">
             <a:avLst>
@@ -10345,14 +9793,14 @@
             </a:avLst>
           </a:prstGeom>
           <a:solidFill>
-            <a:srgbClr val="0E211A"/>
+            <a:srgbClr val="EEF4F0"/>
           </a:solidFill>
           <a:ln/>
         </p:spPr>
       </p:sp>
       <p:pic>
         <p:nvPicPr>
-          <p:cNvPr id="25" name="print-serial" descr="/tmp/claude-1000/-home-moas-Ambiente/386331d5-ebca-4b03-9626-03e5c259a926/scratchpad/img/saida-serial-pico.png">    </p:cNvPr>
+          <p:cNvPr id="5" name="print-painel" descr="/tmp/claude-1000/-home-moas-Ambiente/386331d5-ebca-4b03-9626-03e5c259a926/scratchpad/img/dash.jpg">    </p:cNvPr>
           <p:cNvPicPr>
             <a:picLocks noChangeAspect="1"/>
           </p:cNvPicPr>
@@ -10366,8 +9814,8 @@
         </p:blipFill>
         <p:spPr>
           <a:xfrm>
-            <a:off x="5989320" y="1828800"/>
-            <a:ext cx="5394960" cy="3849624"/>
+            <a:off x="731520" y="1783080"/>
+            <a:ext cx="6583680" cy="4114800"/>
           </a:xfrm>
           <a:prstGeom prst="rect">
             <a:avLst/>
@@ -10376,14 +9824,85 @@
       </p:pic>
       <p:sp>
         <p:nvSpPr>
-          <p:cNvPr id="26" name="Text 23"/>
+          <p:cNvPr id="6" name="nuvem-0"/>
+          <p:cNvSpPr/>
+          <p:nvPr/>
+        </p:nvSpPr>
+        <p:spPr>
+          <a:xfrm>
+            <a:off x="7726680" y="1600200"/>
+            <a:ext cx="3886200" cy="841248"/>
+          </a:xfrm>
+          <a:prstGeom prst="roundRect">
+            <a:avLst>
+              <a:gd name="adj" fmla="val 13043"/>
+            </a:avLst>
+          </a:prstGeom>
+          <a:solidFill>
+            <a:srgbClr val="FFFFFF"/>
+          </a:solidFill>
+          <a:ln w="12700">
+            <a:solidFill>
+              <a:srgbClr val="D7E2DB"/>
+            </a:solidFill>
+            <a:prstDash val="solid"/>
+          </a:ln>
+        </p:spPr>
+      </p:sp>
+      <p:sp>
+        <p:nvSpPr>
+          <p:cNvPr id="7" name="icon-bg-LuCpu"/>
+          <p:cNvSpPr/>
+          <p:nvPr/>
+        </p:nvSpPr>
+        <p:spPr>
+          <a:xfrm>
+            <a:off x="7863840" y="1746504"/>
+            <a:ext cx="548640" cy="548640"/>
+          </a:xfrm>
+          <a:prstGeom prst="ellipse">
+            <a:avLst/>
+          </a:prstGeom>
+          <a:solidFill>
+            <a:srgbClr val="E1EFE8"/>
+          </a:solidFill>
+          <a:ln/>
+        </p:spPr>
+      </p:sp>
+      <p:pic>
+        <p:nvPicPr>
+          <p:cNvPr id="8" name="icon-LuCpu" descr="preencoded.png">    </p:cNvPr>
+          <p:cNvPicPr>
+            <a:picLocks noChangeAspect="1"/>
+          </p:cNvPicPr>
+          <p:nvPr/>
+        </p:nvPicPr>
+        <p:blipFill>
+          <a:blip r:embed="rId2"/>
+          <a:stretch>
+            <a:fillRect/>
+          </a:stretch>
+        </p:blipFill>
+        <p:spPr>
+          <a:xfrm>
+            <a:off x="8001000" y="1883664"/>
+            <a:ext cx="274320" cy="274320"/>
+          </a:xfrm>
+          <a:prstGeom prst="rect">
+            <a:avLst/>
+          </a:prstGeom>
+        </p:spPr>
+      </p:pic>
+      <p:sp>
+        <p:nvSpPr>
+          <p:cNvPr id="9" name="Text 5"/>
           <p:cNvSpPr txBox="1"/>
           <p:nvPr/>
         </p:nvSpPr>
         <p:spPr>
           <a:xfrm>
-            <a:off x="5989320" y="5742432"/>
-            <a:ext cx="5394960" cy="274320"/>
+            <a:off x="8549640" y="1691640"/>
+            <a:ext cx="2926080" cy="292608"/>
           </a:xfrm>
           <a:prstGeom prst="rect">
             <a:avLst/>
@@ -10399,14 +9918,517 @@
               <a:buNone/>
             </a:pPr>
             <a:r>
-              <a:rPr lang="en-US" sz="1200" b="1" dirty="0">
-                <a:solidFill>
-                  <a:srgbClr val="B9E3CF"/>
-                </a:solidFill>
-              </a:rPr>
-              <a:t>Saída real: T=26,7 °C · U=61 % · classe=normal</a:t>
+              <a:rPr lang="en-US" sz="1500" b="1" dirty="0">
+                <a:solidFill>
+                  <a:srgbClr val="15291F"/>
+                </a:solidFill>
+              </a:rPr>
+              <a:t>Pico W</a:t>
+            </a:r>
+            <a:endParaRPr lang="en-US" sz="1500" dirty="0"/>
+          </a:p>
+        </p:txBody>
+      </p:sp>
+      <p:sp>
+        <p:nvSpPr>
+          <p:cNvPr id="10" name="Text 6"/>
+          <p:cNvSpPr txBox="1"/>
+          <p:nvPr/>
+        </p:nvSpPr>
+        <p:spPr>
+          <a:xfrm>
+            <a:off x="8549640" y="1993392"/>
+            <a:ext cx="2971800" cy="411480"/>
+          </a:xfrm>
+          <a:prstGeom prst="rect">
+            <a:avLst/>
+          </a:prstGeom>
+          <a:noFill/>
+          <a:ln/>
+        </p:spPr>
+        <p:txBody>
+          <a:bodyPr wrap="square" lIns="0" tIns="0" rIns="0" bIns="0" rtlCol="0" anchor="t"/>
+          <a:lstStyle/>
+          <a:p>
+            <a:pPr indent="0" marL="0">
+              <a:buNone/>
+            </a:pPr>
+            <a:r>
+              <a:rPr lang="en-US" sz="1200" dirty="0">
+                <a:solidFill>
+                  <a:srgbClr val="5E6F67"/>
+                </a:solidFill>
+              </a:rPr>
+              <a:t>POST HTTPS a cada 10 s com token</a:t>
             </a:r>
             <a:endParaRPr lang="en-US" sz="1200" dirty="0"/>
+          </a:p>
+        </p:txBody>
+      </p:sp>
+      <p:sp>
+        <p:nvSpPr>
+          <p:cNvPr id="11" name="nuvem-1"/>
+          <p:cNvSpPr/>
+          <p:nvPr/>
+        </p:nvSpPr>
+        <p:spPr>
+          <a:xfrm>
+            <a:off x="7726680" y="2587752"/>
+            <a:ext cx="3886200" cy="841248"/>
+          </a:xfrm>
+          <a:prstGeom prst="roundRect">
+            <a:avLst>
+              <a:gd name="adj" fmla="val 13043"/>
+            </a:avLst>
+          </a:prstGeom>
+          <a:solidFill>
+            <a:srgbClr val="FFFFFF"/>
+          </a:solidFill>
+          <a:ln w="12700">
+            <a:solidFill>
+              <a:srgbClr val="D7E2DB"/>
+            </a:solidFill>
+            <a:prstDash val="solid"/>
+          </a:ln>
+        </p:spPr>
+      </p:sp>
+      <p:sp>
+        <p:nvSpPr>
+          <p:cNvPr id="12" name="icon-bg-LuShieldCheck"/>
+          <p:cNvSpPr/>
+          <p:nvPr/>
+        </p:nvSpPr>
+        <p:spPr>
+          <a:xfrm>
+            <a:off x="7863840" y="2734056"/>
+            <a:ext cx="548640" cy="548640"/>
+          </a:xfrm>
+          <a:prstGeom prst="ellipse">
+            <a:avLst/>
+          </a:prstGeom>
+          <a:solidFill>
+            <a:srgbClr val="E1EFE8"/>
+          </a:solidFill>
+          <a:ln/>
+        </p:spPr>
+      </p:sp>
+      <p:pic>
+        <p:nvPicPr>
+          <p:cNvPr id="13" name="icon-LuShieldCheck" descr="preencoded.png">    </p:cNvPr>
+          <p:cNvPicPr>
+            <a:picLocks noChangeAspect="1"/>
+          </p:cNvPicPr>
+          <p:nvPr/>
+        </p:nvPicPr>
+        <p:blipFill>
+          <a:blip r:embed="rId3"/>
+          <a:stretch>
+            <a:fillRect/>
+          </a:stretch>
+        </p:blipFill>
+        <p:spPr>
+          <a:xfrm>
+            <a:off x="8001000" y="2871216"/>
+            <a:ext cx="274320" cy="274320"/>
+          </a:xfrm>
+          <a:prstGeom prst="rect">
+            <a:avLst/>
+          </a:prstGeom>
+        </p:spPr>
+      </p:pic>
+      <p:sp>
+        <p:nvSpPr>
+          <p:cNvPr id="14" name="Text 9"/>
+          <p:cNvSpPr txBox="1"/>
+          <p:nvPr/>
+        </p:nvSpPr>
+        <p:spPr>
+          <a:xfrm>
+            <a:off x="8549640" y="2679192"/>
+            <a:ext cx="2926080" cy="292608"/>
+          </a:xfrm>
+          <a:prstGeom prst="rect">
+            <a:avLst/>
+          </a:prstGeom>
+          <a:noFill/>
+          <a:ln/>
+        </p:spPr>
+        <p:txBody>
+          <a:bodyPr wrap="square" lIns="0" tIns="0" rIns="0" bIns="0" rtlCol="0" anchor="t"/>
+          <a:lstStyle/>
+          <a:p>
+            <a:pPr indent="0" marL="0">
+              <a:buNone/>
+            </a:pPr>
+            <a:r>
+              <a:rPr lang="en-US" sz="1500" b="1" dirty="0">
+                <a:solidFill>
+                  <a:srgbClr val="15291F"/>
+                </a:solidFill>
+              </a:rPr>
+              <a:t>Edge Function</a:t>
+            </a:r>
+            <a:endParaRPr lang="en-US" sz="1500" dirty="0"/>
+          </a:p>
+        </p:txBody>
+      </p:sp>
+      <p:sp>
+        <p:nvSpPr>
+          <p:cNvPr id="15" name="Text 10"/>
+          <p:cNvSpPr txBox="1"/>
+          <p:nvPr/>
+        </p:nvSpPr>
+        <p:spPr>
+          <a:xfrm>
+            <a:off x="8549640" y="2980944"/>
+            <a:ext cx="2971800" cy="411480"/>
+          </a:xfrm>
+          <a:prstGeom prst="rect">
+            <a:avLst/>
+          </a:prstGeom>
+          <a:noFill/>
+          <a:ln/>
+        </p:spPr>
+        <p:txBody>
+          <a:bodyPr wrap="square" lIns="0" tIns="0" rIns="0" bIns="0" rtlCol="0" anchor="t"/>
+          <a:lstStyle/>
+          <a:p>
+            <a:pPr indent="0" marL="0">
+              <a:buNone/>
+            </a:pPr>
+            <a:r>
+              <a:rPr lang="en-US" sz="1200" dirty="0">
+                <a:solidFill>
+                  <a:srgbClr val="5E6F67"/>
+                </a:solidFill>
+              </a:rPr>
+              <a:t>Valida o token e o conteúdo da leitura</a:t>
+            </a:r>
+            <a:endParaRPr lang="en-US" sz="1200" dirty="0"/>
+          </a:p>
+        </p:txBody>
+      </p:sp>
+      <p:sp>
+        <p:nvSpPr>
+          <p:cNvPr id="16" name="nuvem-2"/>
+          <p:cNvSpPr/>
+          <p:nvPr/>
+        </p:nvSpPr>
+        <p:spPr>
+          <a:xfrm>
+            <a:off x="7726680" y="3575304"/>
+            <a:ext cx="3886200" cy="841248"/>
+          </a:xfrm>
+          <a:prstGeom prst="roundRect">
+            <a:avLst>
+              <a:gd name="adj" fmla="val 13043"/>
+            </a:avLst>
+          </a:prstGeom>
+          <a:solidFill>
+            <a:srgbClr val="FFFFFF"/>
+          </a:solidFill>
+          <a:ln w="12700">
+            <a:solidFill>
+              <a:srgbClr val="D7E2DB"/>
+            </a:solidFill>
+            <a:prstDash val="solid"/>
+          </a:ln>
+        </p:spPr>
+      </p:sp>
+      <p:sp>
+        <p:nvSpPr>
+          <p:cNvPr id="17" name="icon-bg-LuDatabase"/>
+          <p:cNvSpPr/>
+          <p:nvPr/>
+        </p:nvSpPr>
+        <p:spPr>
+          <a:xfrm>
+            <a:off x="7863840" y="3721608"/>
+            <a:ext cx="548640" cy="548640"/>
+          </a:xfrm>
+          <a:prstGeom prst="ellipse">
+            <a:avLst/>
+          </a:prstGeom>
+          <a:solidFill>
+            <a:srgbClr val="E1EFE8"/>
+          </a:solidFill>
+          <a:ln/>
+        </p:spPr>
+      </p:sp>
+      <p:pic>
+        <p:nvPicPr>
+          <p:cNvPr id="18" name="icon-LuDatabase" descr="preencoded.png">    </p:cNvPr>
+          <p:cNvPicPr>
+            <a:picLocks noChangeAspect="1"/>
+          </p:cNvPicPr>
+          <p:nvPr/>
+        </p:nvPicPr>
+        <p:blipFill>
+          <a:blip r:embed="rId4"/>
+          <a:stretch>
+            <a:fillRect/>
+          </a:stretch>
+        </p:blipFill>
+        <p:spPr>
+          <a:xfrm>
+            <a:off x="8001000" y="3858768"/>
+            <a:ext cx="274320" cy="274320"/>
+          </a:xfrm>
+          <a:prstGeom prst="rect">
+            <a:avLst/>
+          </a:prstGeom>
+        </p:spPr>
+      </p:pic>
+      <p:sp>
+        <p:nvSpPr>
+          <p:cNvPr id="19" name="Text 13"/>
+          <p:cNvSpPr txBox="1"/>
+          <p:nvPr/>
+        </p:nvSpPr>
+        <p:spPr>
+          <a:xfrm>
+            <a:off x="8549640" y="3666744"/>
+            <a:ext cx="2926080" cy="292608"/>
+          </a:xfrm>
+          <a:prstGeom prst="rect">
+            <a:avLst/>
+          </a:prstGeom>
+          <a:noFill/>
+          <a:ln/>
+        </p:spPr>
+        <p:txBody>
+          <a:bodyPr wrap="square" lIns="0" tIns="0" rIns="0" bIns="0" rtlCol="0" anchor="t"/>
+          <a:lstStyle/>
+          <a:p>
+            <a:pPr indent="0" marL="0">
+              <a:buNone/>
+            </a:pPr>
+            <a:r>
+              <a:rPr lang="en-US" sz="1500" b="1" dirty="0">
+                <a:solidFill>
+                  <a:srgbClr val="15291F"/>
+                </a:solidFill>
+              </a:rPr>
+              <a:t>PostgreSQL</a:t>
+            </a:r>
+            <a:endParaRPr lang="en-US" sz="1500" dirty="0"/>
+          </a:p>
+        </p:txBody>
+      </p:sp>
+      <p:sp>
+        <p:nvSpPr>
+          <p:cNvPr id="20" name="Text 14"/>
+          <p:cNvSpPr txBox="1"/>
+          <p:nvPr/>
+        </p:nvSpPr>
+        <p:spPr>
+          <a:xfrm>
+            <a:off x="8549640" y="3968496"/>
+            <a:ext cx="2971800" cy="411480"/>
+          </a:xfrm>
+          <a:prstGeom prst="rect">
+            <a:avLst/>
+          </a:prstGeom>
+          <a:noFill/>
+          <a:ln/>
+        </p:spPr>
+        <p:txBody>
+          <a:bodyPr wrap="square" lIns="0" tIns="0" rIns="0" bIns="0" rtlCol="0" anchor="t"/>
+          <a:lstStyle/>
+          <a:p>
+            <a:pPr indent="0" marL="0">
+              <a:buNone/>
+            </a:pPr>
+            <a:r>
+              <a:rPr lang="en-US" sz="1200" dirty="0">
+                <a:solidFill>
+                  <a:srgbClr val="5E6F67"/>
+                </a:solidFill>
+              </a:rPr>
+              <a:t>Restrições CHECK + Row Level Security</a:t>
+            </a:r>
+            <a:endParaRPr lang="en-US" sz="1200" dirty="0"/>
+          </a:p>
+        </p:txBody>
+      </p:sp>
+      <p:sp>
+        <p:nvSpPr>
+          <p:cNvPr id="21" name="nuvem-3"/>
+          <p:cNvSpPr/>
+          <p:nvPr/>
+        </p:nvSpPr>
+        <p:spPr>
+          <a:xfrm>
+            <a:off x="7726680" y="4562856"/>
+            <a:ext cx="3886200" cy="841248"/>
+          </a:xfrm>
+          <a:prstGeom prst="roundRect">
+            <a:avLst>
+              <a:gd name="adj" fmla="val 13043"/>
+            </a:avLst>
+          </a:prstGeom>
+          <a:solidFill>
+            <a:srgbClr val="0E211A"/>
+          </a:solidFill>
+          <a:ln/>
+        </p:spPr>
+      </p:sp>
+      <p:sp>
+        <p:nvSpPr>
+          <p:cNvPr id="22" name="icon-bg-LuMonitor"/>
+          <p:cNvSpPr/>
+          <p:nvPr/>
+        </p:nvSpPr>
+        <p:spPr>
+          <a:xfrm>
+            <a:off x="7863840" y="4709160"/>
+            <a:ext cx="548640" cy="548640"/>
+          </a:xfrm>
+          <a:prstGeom prst="ellipse">
+            <a:avLst/>
+          </a:prstGeom>
+          <a:solidFill>
+            <a:srgbClr val="21453A"/>
+          </a:solidFill>
+          <a:ln/>
+        </p:spPr>
+      </p:sp>
+      <p:pic>
+        <p:nvPicPr>
+          <p:cNvPr id="23" name="icon-LuMonitor" descr="preencoded.png">    </p:cNvPr>
+          <p:cNvPicPr>
+            <a:picLocks noChangeAspect="1"/>
+          </p:cNvPicPr>
+          <p:nvPr/>
+        </p:nvPicPr>
+        <p:blipFill>
+          <a:blip r:embed="rId5"/>
+          <a:stretch>
+            <a:fillRect/>
+          </a:stretch>
+        </p:blipFill>
+        <p:spPr>
+          <a:xfrm>
+            <a:off x="8001000" y="4846320"/>
+            <a:ext cx="274320" cy="274320"/>
+          </a:xfrm>
+          <a:prstGeom prst="rect">
+            <a:avLst/>
+          </a:prstGeom>
+        </p:spPr>
+      </p:pic>
+      <p:sp>
+        <p:nvSpPr>
+          <p:cNvPr id="24" name="Text 17"/>
+          <p:cNvSpPr txBox="1"/>
+          <p:nvPr/>
+        </p:nvSpPr>
+        <p:spPr>
+          <a:xfrm>
+            <a:off x="8549640" y="4654296"/>
+            <a:ext cx="2926080" cy="292608"/>
+          </a:xfrm>
+          <a:prstGeom prst="rect">
+            <a:avLst/>
+          </a:prstGeom>
+          <a:noFill/>
+          <a:ln/>
+        </p:spPr>
+        <p:txBody>
+          <a:bodyPr wrap="square" lIns="0" tIns="0" rIns="0" bIns="0" rtlCol="0" anchor="t"/>
+          <a:lstStyle/>
+          <a:p>
+            <a:pPr indent="0" marL="0">
+              <a:buNone/>
+            </a:pPr>
+            <a:r>
+              <a:rPr lang="en-US" sz="1500" b="1" dirty="0">
+                <a:solidFill>
+                  <a:srgbClr val="FFFFFF"/>
+                </a:solidFill>
+              </a:rPr>
+              <a:t>Painel React</a:t>
+            </a:r>
+            <a:endParaRPr lang="en-US" sz="1500" dirty="0"/>
+          </a:p>
+        </p:txBody>
+      </p:sp>
+      <p:sp>
+        <p:nvSpPr>
+          <p:cNvPr id="25" name="Text 18"/>
+          <p:cNvSpPr txBox="1"/>
+          <p:nvPr/>
+        </p:nvSpPr>
+        <p:spPr>
+          <a:xfrm>
+            <a:off x="8549640" y="4956048"/>
+            <a:ext cx="2971800" cy="411480"/>
+          </a:xfrm>
+          <a:prstGeom prst="rect">
+            <a:avLst/>
+          </a:prstGeom>
+          <a:noFill/>
+          <a:ln/>
+        </p:spPr>
+        <p:txBody>
+          <a:bodyPr wrap="square" lIns="0" tIns="0" rIns="0" bIns="0" rtlCol="0" anchor="t"/>
+          <a:lstStyle/>
+          <a:p>
+            <a:pPr indent="0" marL="0">
+              <a:buNone/>
+            </a:pPr>
+            <a:r>
+              <a:rPr lang="en-US" sz="1200" dirty="0">
+                <a:solidFill>
+                  <a:srgbClr val="A9BEB4"/>
+                </a:solidFill>
+              </a:rPr>
+              <a:t>Vercel · USB, nuvem e simulador</a:t>
+            </a:r>
+            <a:endParaRPr lang="en-US" sz="1200" dirty="0"/>
+          </a:p>
+        </p:txBody>
+      </p:sp>
+      <p:sp>
+        <p:nvSpPr>
+          <p:cNvPr id="26" name="Text 19"/>
+          <p:cNvSpPr txBox="1"/>
+          <p:nvPr/>
+        </p:nvSpPr>
+        <p:spPr>
+          <a:xfrm>
+            <a:off x="7726680" y="5623560"/>
+            <a:ext cx="3886200" cy="365760"/>
+          </a:xfrm>
+          <a:prstGeom prst="rect">
+            <a:avLst/>
+          </a:prstGeom>
+          <a:noFill/>
+          <a:ln/>
+        </p:spPr>
+        <p:txBody>
+          <a:bodyPr wrap="square" lIns="0" tIns="0" rIns="0" bIns="0" rtlCol="0" anchor="ctr"/>
+          <a:lstStyle/>
+          <a:p>
+            <a:pPr indent="0" marL="0">
+              <a:buNone/>
+            </a:pPr>
+            <a:r>
+              <a:rPr lang="en-US" sz="1400" b="1" u="sng" dirty="0">
+                <a:solidFill>
+                  <a:srgbClr val="3F8A70"/>
+                </a:solidFill>
+                <a:hlinkClick r:id="rId6" invalidUrl="" action="" tgtFrame="" tooltip="" history="1" highlightClick="0" endSnd="0">
+                  <a:extLst>
+                    <a:ext uri="{A12FA001-AC4F-418D-AE19-62706E023703}">
+                      <ahyp:hlinkClr xmlns:ahyp="http://schemas.microsoft.com/office/drawing/2018/hyperlinkcolor" val="tx"/>
+                    </a:ext>
+                  </a:extLst>
+                </a:hlinkClick>
+              </a:rPr>
+              <a:t>classificador-de-ambiente.vercel.app</a:t>
+            </a:r>
+            <a:endParaRPr lang="en-US" sz="1400" dirty="0"/>
           </a:p>
         </p:txBody>
       </p:sp>
@@ -10509,10 +10531,10 @@
             <a:r>
               <a:rPr lang="en-US" sz="1200" b="1" spc="300" kern="0" dirty="0">
                 <a:solidFill>
-                  <a:srgbClr val="3F8A70"/>
-                </a:solidFill>
-              </a:rPr>
-              <a:t>14 · NUVEM E PAINEL</a:t>
+                  <a:srgbClr val="D9A24F"/>
+                </a:solidFill>
+              </a:rPr>
+              <a:t>14 · DEMONSTRAÇÃO</a:t>
             </a:r>
             <a:endParaRPr lang="en-US" sz="1200" dirty="0"/>
           </a:p>
@@ -10547,258 +10569,31 @@
             <a:r>
               <a:rPr lang="en-US" sz="3400" b="1" dirty="0">
                 <a:solidFill>
-                  <a:srgbClr val="15291F"/>
-                </a:solidFill>
-              </a:rPr>
-              <a:t>Do Pico W ao navegador, com segurança</a:t>
+                  <a:srgbClr val="FFFFFF"/>
+                </a:solidFill>
+              </a:rPr>
+              <a:t>Funcionando de ponta a ponta</a:t>
             </a:r>
             <a:endParaRPr lang="en-US" sz="3400" dirty="0"/>
           </a:p>
         </p:txBody>
-      </p:sp>
-      <p:sp>
-        <p:nvSpPr>
-          <p:cNvPr id="4" name="dash-bg"/>
-          <p:cNvSpPr/>
-          <p:nvPr/>
-        </p:nvSpPr>
-        <p:spPr>
-          <a:xfrm>
-            <a:off x="548640" y="1600200"/>
-            <a:ext cx="6949440" cy="4526280"/>
-          </a:xfrm>
-          <a:prstGeom prst="roundRect">
-            <a:avLst>
-              <a:gd name="adj" fmla="val 2424"/>
-            </a:avLst>
-          </a:prstGeom>
-          <a:solidFill>
-            <a:srgbClr val="EEF4F0"/>
-          </a:solidFill>
-          <a:ln/>
-        </p:spPr>
       </p:sp>
       <p:pic>
         <p:nvPicPr>
-          <p:cNvPr id="5" name="print-painel" descr="/tmp/claude-1000/-home-moas-Ambiente/386331d5-ebca-4b03-9626-03e5c259a926/scratchpad/img/dash.jpg">    </p:cNvPr>
+          <p:cNvPr id="3" name="video-demo">
+            <a:hlinkClick r:id="" action="ppaction://media"/>
+          </p:cNvPr>
           <p:cNvPicPr>
             <a:picLocks noChangeAspect="1"/>
           </p:cNvPicPr>
-          <p:nvPr/>
-        </p:nvPicPr>
-        <p:blipFill>
-          <a:blip r:embed="rId1"/>
-          <a:stretch>
-            <a:fillRect/>
-          </a:stretch>
-        </p:blipFill>
-        <p:spPr>
-          <a:xfrm>
-            <a:off x="731520" y="1783080"/>
-            <a:ext cx="6583680" cy="4114800"/>
-          </a:xfrm>
-          <a:prstGeom prst="rect">
-            <a:avLst/>
-          </a:prstGeom>
-        </p:spPr>
-      </p:pic>
-      <p:sp>
-        <p:nvSpPr>
-          <p:cNvPr id="6" name="nuvem-0"/>
-          <p:cNvSpPr/>
-          <p:nvPr/>
-        </p:nvSpPr>
-        <p:spPr>
-          <a:xfrm>
-            <a:off x="7726680" y="1600200"/>
-            <a:ext cx="3886200" cy="841248"/>
-          </a:xfrm>
-          <a:prstGeom prst="roundRect">
-            <a:avLst>
-              <a:gd name="adj" fmla="val 13043"/>
-            </a:avLst>
-          </a:prstGeom>
-          <a:solidFill>
-            <a:srgbClr val="FFFFFF"/>
-          </a:solidFill>
-          <a:ln w="12700">
-            <a:solidFill>
-              <a:srgbClr val="D7E2DB"/>
-            </a:solidFill>
-            <a:prstDash val="solid"/>
-          </a:ln>
-        </p:spPr>
-      </p:sp>
-      <p:sp>
-        <p:nvSpPr>
-          <p:cNvPr id="7" name="icon-bg-LuCpu"/>
-          <p:cNvSpPr/>
-          <p:nvPr/>
-        </p:nvSpPr>
-        <p:spPr>
-          <a:xfrm>
-            <a:off x="7863840" y="1746504"/>
-            <a:ext cx="548640" cy="548640"/>
-          </a:xfrm>
-          <a:prstGeom prst="ellipse">
-            <a:avLst/>
-          </a:prstGeom>
-          <a:solidFill>
-            <a:srgbClr val="E1EFE8"/>
-          </a:solidFill>
-          <a:ln/>
-        </p:spPr>
-      </p:sp>
-      <p:pic>
-        <p:nvPicPr>
-          <p:cNvPr id="8" name="icon-LuCpu" descr="preencoded.png">    </p:cNvPr>
-          <p:cNvPicPr>
-            <a:picLocks noChangeAspect="1"/>
-          </p:cNvPicPr>
-          <p:nvPr/>
-        </p:nvPicPr>
-        <p:blipFill>
-          <a:blip r:embed="rId2"/>
-          <a:stretch>
-            <a:fillRect/>
-          </a:stretch>
-        </p:blipFill>
-        <p:spPr>
-          <a:xfrm>
-            <a:off x="8001000" y="1883664"/>
-            <a:ext cx="274320" cy="274320"/>
-          </a:xfrm>
-          <a:prstGeom prst="rect">
-            <a:avLst/>
-          </a:prstGeom>
-        </p:spPr>
-      </p:pic>
-      <p:sp>
-        <p:nvSpPr>
-          <p:cNvPr id="9" name="Text 5"/>
-          <p:cNvSpPr txBox="1"/>
-          <p:nvPr/>
-        </p:nvSpPr>
-        <p:spPr>
-          <a:xfrm>
-            <a:off x="8549640" y="1691640"/>
-            <a:ext cx="2926080" cy="292608"/>
-          </a:xfrm>
-          <a:prstGeom prst="rect">
-            <a:avLst/>
-          </a:prstGeom>
-          <a:noFill/>
-          <a:ln/>
-        </p:spPr>
-        <p:txBody>
-          <a:bodyPr wrap="square" lIns="0" tIns="0" rIns="0" bIns="0" rtlCol="0" anchor="t"/>
-          <a:lstStyle/>
-          <a:p>
-            <a:pPr indent="0" marL="0">
-              <a:buNone/>
-            </a:pPr>
-            <a:r>
-              <a:rPr lang="en-US" sz="1500" b="1" dirty="0">
-                <a:solidFill>
-                  <a:srgbClr val="15291F"/>
-                </a:solidFill>
-              </a:rPr>
-              <a:t>Pico W</a:t>
-            </a:r>
-            <a:endParaRPr lang="en-US" sz="1500" dirty="0"/>
-          </a:p>
-        </p:txBody>
-      </p:sp>
-      <p:sp>
-        <p:nvSpPr>
-          <p:cNvPr id="10" name="Text 6"/>
-          <p:cNvSpPr txBox="1"/>
-          <p:nvPr/>
-        </p:nvSpPr>
-        <p:spPr>
-          <a:xfrm>
-            <a:off x="8549640" y="1993392"/>
-            <a:ext cx="2971800" cy="411480"/>
-          </a:xfrm>
-          <a:prstGeom prst="rect">
-            <a:avLst/>
-          </a:prstGeom>
-          <a:noFill/>
-          <a:ln/>
-        </p:spPr>
-        <p:txBody>
-          <a:bodyPr wrap="square" lIns="0" tIns="0" rIns="0" bIns="0" rtlCol="0" anchor="t"/>
-          <a:lstStyle/>
-          <a:p>
-            <a:pPr indent="0" marL="0">
-              <a:buNone/>
-            </a:pPr>
-            <a:r>
-              <a:rPr lang="en-US" sz="1200" dirty="0">
-                <a:solidFill>
-                  <a:srgbClr val="5E6F67"/>
-                </a:solidFill>
-              </a:rPr>
-              <a:t>POST HTTPS a cada 10 s com token</a:t>
-            </a:r>
-            <a:endParaRPr lang="en-US" sz="1200" dirty="0"/>
-          </a:p>
-        </p:txBody>
-      </p:sp>
-      <p:sp>
-        <p:nvSpPr>
-          <p:cNvPr id="11" name="nuvem-1"/>
-          <p:cNvSpPr/>
-          <p:nvPr/>
-        </p:nvSpPr>
-        <p:spPr>
-          <a:xfrm>
-            <a:off x="7726680" y="2587752"/>
-            <a:ext cx="3886200" cy="841248"/>
-          </a:xfrm>
-          <a:prstGeom prst="roundRect">
-            <a:avLst>
-              <a:gd name="adj" fmla="val 13043"/>
-            </a:avLst>
-          </a:prstGeom>
-          <a:solidFill>
-            <a:srgbClr val="FFFFFF"/>
-          </a:solidFill>
-          <a:ln w="12700">
-            <a:solidFill>
-              <a:srgbClr val="D7E2DB"/>
-            </a:solidFill>
-            <a:prstDash val="solid"/>
-          </a:ln>
-        </p:spPr>
-      </p:sp>
-      <p:sp>
-        <p:nvSpPr>
-          <p:cNvPr id="12" name="icon-bg-LuShieldCheck"/>
-          <p:cNvSpPr/>
-          <p:nvPr/>
-        </p:nvSpPr>
-        <p:spPr>
-          <a:xfrm>
-            <a:off x="7863840" y="2734056"/>
-            <a:ext cx="548640" cy="548640"/>
-          </a:xfrm>
-          <a:prstGeom prst="ellipse">
-            <a:avLst/>
-          </a:prstGeom>
-          <a:solidFill>
-            <a:srgbClr val="E1EFE8"/>
-          </a:solidFill>
-          <a:ln/>
-        </p:spPr>
-      </p:sp>
-      <p:pic>
-        <p:nvPicPr>
-          <p:cNvPr id="13" name="icon-LuShieldCheck" descr="preencoded.png">    </p:cNvPr>
-          <p:cNvPicPr>
-            <a:picLocks noChangeAspect="1"/>
-          </p:cNvPicPr>
-          <p:nvPr/>
+          <p:nvPr>
+            <a:videoFile r:link="rId1"/>
+            <p:extLst>
+              <p:ext uri="{DAA4B4D4-6D71-4841-9C94-3DE7FCFB9230}">
+                <p14:media xmlns:p14="http://schemas.microsoft.com/office/powerpoint/2010/main" r:embed="rId2"/>
+              </p:ext>
+            </p:extLst>
+          </p:nvPr>
         </p:nvPicPr>
         <p:blipFill>
           <a:blip r:embed="rId3"/>
@@ -10808,8 +10603,8 @@
         </p:blipFill>
         <p:spPr>
           <a:xfrm>
-            <a:off x="8001000" y="2871216"/>
-            <a:ext cx="274320" cy="274320"/>
+            <a:off x="548640" y="1554480"/>
+            <a:ext cx="2651760" cy="4754880"/>
           </a:xfrm>
           <a:prstGeom prst="rect">
             <a:avLst/>
@@ -10818,86 +10613,14 @@
       </p:pic>
       <p:sp>
         <p:nvSpPr>
-          <p:cNvPr id="14" name="Text 9"/>
-          <p:cNvSpPr txBox="1"/>
-          <p:nvPr/>
-        </p:nvSpPr>
-        <p:spPr>
-          <a:xfrm>
-            <a:off x="8549640" y="2679192"/>
-            <a:ext cx="2926080" cy="292608"/>
-          </a:xfrm>
-          <a:prstGeom prst="rect">
-            <a:avLst/>
-          </a:prstGeom>
-          <a:noFill/>
-          <a:ln/>
-        </p:spPr>
-        <p:txBody>
-          <a:bodyPr wrap="square" lIns="0" tIns="0" rIns="0" bIns="0" rtlCol="0" anchor="t"/>
-          <a:lstStyle/>
-          <a:p>
-            <a:pPr indent="0" marL="0">
-              <a:buNone/>
-            </a:pPr>
-            <a:r>
-              <a:rPr lang="en-US" sz="1500" b="1" dirty="0">
-                <a:solidFill>
-                  <a:srgbClr val="15291F"/>
-                </a:solidFill>
-              </a:rPr>
-              <a:t>Edge Function</a:t>
-            </a:r>
-            <a:endParaRPr lang="en-US" sz="1500" dirty="0"/>
-          </a:p>
-        </p:txBody>
-      </p:sp>
-      <p:sp>
-        <p:nvSpPr>
-          <p:cNvPr id="15" name="Text 10"/>
-          <p:cNvSpPr txBox="1"/>
-          <p:nvPr/>
-        </p:nvSpPr>
-        <p:spPr>
-          <a:xfrm>
-            <a:off x="8549640" y="2980944"/>
-            <a:ext cx="2971800" cy="411480"/>
-          </a:xfrm>
-          <a:prstGeom prst="rect">
-            <a:avLst/>
-          </a:prstGeom>
-          <a:noFill/>
-          <a:ln/>
-        </p:spPr>
-        <p:txBody>
-          <a:bodyPr wrap="square" lIns="0" tIns="0" rIns="0" bIns="0" rtlCol="0" anchor="t"/>
-          <a:lstStyle/>
-          <a:p>
-            <a:pPr indent="0" marL="0">
-              <a:buNone/>
-            </a:pPr>
-            <a:r>
-              <a:rPr lang="en-US" sz="1200" dirty="0">
-                <a:solidFill>
-                  <a:srgbClr val="5E6F67"/>
-                </a:solidFill>
-              </a:rPr>
-              <a:t>Valida o token e o conteúdo da leitura</a:t>
-            </a:r>
-            <a:endParaRPr lang="en-US" sz="1200" dirty="0"/>
-          </a:p>
-        </p:txBody>
-      </p:sp>
-      <p:sp>
-        <p:nvSpPr>
-          <p:cNvPr id="16" name="nuvem-2"/>
+          <p:cNvPr id="5" name="demo-0"/>
           <p:cNvSpPr/>
           <p:nvPr/>
         </p:nvSpPr>
         <p:spPr>
           <a:xfrm>
-            <a:off x="7726680" y="3575304"/>
-            <a:ext cx="3886200" cy="841248"/>
+            <a:off x="3657600" y="1554480"/>
+            <a:ext cx="5120640" cy="841248"/>
           </a:xfrm>
           <a:prstGeom prst="roundRect">
             <a:avLst>
@@ -10905,39 +10628,34 @@
             </a:avLst>
           </a:prstGeom>
           <a:solidFill>
-            <a:srgbClr val="FFFFFF"/>
+            <a:srgbClr val="17342B"/>
           </a:solidFill>
-          <a:ln w="12700">
-            <a:solidFill>
-              <a:srgbClr val="D7E2DB"/>
-            </a:solidFill>
-            <a:prstDash val="solid"/>
-          </a:ln>
-        </p:spPr>
-      </p:sp>
-      <p:sp>
-        <p:nvSpPr>
-          <p:cNvPr id="17" name="icon-bg-LuDatabase"/>
+          <a:ln/>
+        </p:spPr>
+      </p:sp>
+      <p:sp>
+        <p:nvSpPr>
+          <p:cNvPr id="6" name="icon-bg-LuRadar"/>
           <p:cNvSpPr/>
           <p:nvPr/>
         </p:nvSpPr>
         <p:spPr>
           <a:xfrm>
-            <a:off x="7863840" y="3721608"/>
+            <a:off x="3813048" y="1700784"/>
             <a:ext cx="548640" cy="548640"/>
           </a:xfrm>
           <a:prstGeom prst="ellipse">
             <a:avLst/>
           </a:prstGeom>
           <a:solidFill>
-            <a:srgbClr val="E1EFE8"/>
+            <a:srgbClr val="21453A"/>
           </a:solidFill>
           <a:ln/>
         </p:spPr>
       </p:sp>
       <p:pic>
         <p:nvPicPr>
-          <p:cNvPr id="18" name="icon-LuDatabase" descr="preencoded.png">    </p:cNvPr>
+          <p:cNvPr id="7" name="icon-LuRadar" descr="preencoded.png">    </p:cNvPr>
           <p:cNvPicPr>
             <a:picLocks noChangeAspect="1"/>
           </p:cNvPicPr>
@@ -10951,7 +10669,7 @@
         </p:blipFill>
         <p:spPr>
           <a:xfrm>
-            <a:off x="8001000" y="3858768"/>
+            <a:off x="3950208" y="1837944"/>
             <a:ext cx="274320" cy="274320"/>
           </a:xfrm>
           <a:prstGeom prst="rect">
@@ -10961,14 +10679,14 @@
       </p:pic>
       <p:sp>
         <p:nvSpPr>
-          <p:cNvPr id="19" name="Text 13"/>
+          <p:cNvPr id="8" name="Text 4"/>
           <p:cNvSpPr txBox="1"/>
           <p:nvPr/>
         </p:nvSpPr>
         <p:spPr>
           <a:xfrm>
-            <a:off x="8549640" y="3666744"/>
-            <a:ext cx="2926080" cy="292608"/>
+            <a:off x="4526280" y="1645920"/>
+            <a:ext cx="4114800" cy="310896"/>
           </a:xfrm>
           <a:prstGeom prst="rect">
             <a:avLst/>
@@ -10986,10 +10704,10 @@
             <a:r>
               <a:rPr lang="en-US" sz="1500" b="1" dirty="0">
                 <a:solidFill>
-                  <a:srgbClr val="15291F"/>
-                </a:solidFill>
-              </a:rPr>
-              <a:t>PostgreSQL</a:t>
+                  <a:srgbClr val="FFFFFF"/>
+                </a:solidFill>
+              </a:rPr>
+              <a:t>A placa lê os sensores</a:t>
             </a:r>
             <a:endParaRPr lang="en-US" sz="1500" dirty="0"/>
           </a:p>
@@ -10997,14 +10715,14 @@
       </p:sp>
       <p:sp>
         <p:nvSpPr>
-          <p:cNvPr id="20" name="Text 14"/>
+          <p:cNvPr id="9" name="Text 5"/>
           <p:cNvSpPr txBox="1"/>
           <p:nvPr/>
         </p:nvSpPr>
         <p:spPr>
           <a:xfrm>
-            <a:off x="8549640" y="3968496"/>
-            <a:ext cx="2971800" cy="411480"/>
+            <a:off x="4526280" y="1965960"/>
+            <a:ext cx="4114800" cy="365760"/>
           </a:xfrm>
           <a:prstGeom prst="rect">
             <a:avLst/>
@@ -11022,10 +10740,10 @@
             <a:r>
               <a:rPr lang="en-US" sz="1200" dirty="0">
                 <a:solidFill>
-                  <a:srgbClr val="5E6F67"/>
-                </a:solidFill>
-              </a:rPr>
-              <a:t>Restrições CHECK + Row Level Security</a:t>
+                  <a:srgbClr val="A9BEB4"/>
+                </a:solidFill>
+              </a:rPr>
+              <a:t>DHT11 e IR na protoboard, ciclo de 2 s</a:t>
             </a:r>
             <a:endParaRPr lang="en-US" sz="1200" dirty="0"/>
           </a:p>
@@ -11033,14 +10751,14 @@
       </p:sp>
       <p:sp>
         <p:nvSpPr>
-          <p:cNvPr id="21" name="nuvem-3"/>
+          <p:cNvPr id="10" name="demo-1"/>
           <p:cNvSpPr/>
           <p:nvPr/>
         </p:nvSpPr>
         <p:spPr>
           <a:xfrm>
-            <a:off x="7726680" y="4562856"/>
-            <a:ext cx="3886200" cy="841248"/>
+            <a:off x="3657600" y="2542032"/>
+            <a:ext cx="5120640" cy="841248"/>
           </a:xfrm>
           <a:prstGeom prst="roundRect">
             <a:avLst>
@@ -11048,20 +10766,20 @@
             </a:avLst>
           </a:prstGeom>
           <a:solidFill>
-            <a:srgbClr val="0E211A"/>
+            <a:srgbClr val="17342B"/>
           </a:solidFill>
           <a:ln/>
         </p:spPr>
       </p:sp>
       <p:sp>
         <p:nvSpPr>
-          <p:cNvPr id="22" name="icon-bg-LuMonitor"/>
+          <p:cNvPr id="11" name="icon-bg-LuCpu"/>
           <p:cNvSpPr/>
           <p:nvPr/>
         </p:nvSpPr>
         <p:spPr>
           <a:xfrm>
-            <a:off x="7863840" y="4709160"/>
+            <a:off x="3813048" y="2688336"/>
             <a:ext cx="548640" cy="548640"/>
           </a:xfrm>
           <a:prstGeom prst="ellipse">
@@ -11075,7 +10793,7 @@
       </p:sp>
       <p:pic>
         <p:nvPicPr>
-          <p:cNvPr id="23" name="icon-LuMonitor" descr="preencoded.png">    </p:cNvPr>
+          <p:cNvPr id="12" name="icon-LuCpu" descr="preencoded.png">    </p:cNvPr>
           <p:cNvPicPr>
             <a:picLocks noChangeAspect="1"/>
           </p:cNvPicPr>
@@ -11089,7 +10807,7 @@
         </p:blipFill>
         <p:spPr>
           <a:xfrm>
-            <a:off x="8001000" y="4846320"/>
+            <a:off x="3950208" y="2825496"/>
             <a:ext cx="274320" cy="274320"/>
           </a:xfrm>
           <a:prstGeom prst="rect">
@@ -11097,6 +10815,318 @@
           </a:prstGeom>
         </p:spPr>
       </p:pic>
+      <p:sp>
+        <p:nvSpPr>
+          <p:cNvPr id="13" name="Text 8"/>
+          <p:cNvSpPr txBox="1"/>
+          <p:nvPr/>
+        </p:nvSpPr>
+        <p:spPr>
+          <a:xfrm>
+            <a:off x="4526280" y="2633472"/>
+            <a:ext cx="4114800" cy="310896"/>
+          </a:xfrm>
+          <a:prstGeom prst="rect">
+            <a:avLst/>
+          </a:prstGeom>
+          <a:noFill/>
+          <a:ln/>
+        </p:spPr>
+        <p:txBody>
+          <a:bodyPr wrap="square" lIns="0" tIns="0" rIns="0" bIns="0" rtlCol="0" anchor="t"/>
+          <a:lstStyle/>
+          <a:p>
+            <a:pPr indent="0" marL="0">
+              <a:buNone/>
+            </a:pPr>
+            <a:r>
+              <a:rPr lang="en-US" sz="1500" b="1" dirty="0">
+                <a:solidFill>
+                  <a:srgbClr val="FFFFFF"/>
+                </a:solidFill>
+              </a:rPr>
+              <a:t>Classifica sem computador</a:t>
+            </a:r>
+            <a:endParaRPr lang="en-US" sz="1500" dirty="0"/>
+          </a:p>
+        </p:txBody>
+      </p:sp>
+      <p:sp>
+        <p:nvSpPr>
+          <p:cNvPr id="14" name="Text 9"/>
+          <p:cNvSpPr txBox="1"/>
+          <p:nvPr/>
+        </p:nvSpPr>
+        <p:spPr>
+          <a:xfrm>
+            <a:off x="4526280" y="2953512"/>
+            <a:ext cx="4114800" cy="365760"/>
+          </a:xfrm>
+          <a:prstGeom prst="rect">
+            <a:avLst/>
+          </a:prstGeom>
+          <a:noFill/>
+          <a:ln/>
+        </p:spPr>
+        <p:txBody>
+          <a:bodyPr wrap="square" lIns="0" tIns="0" rIns="0" bIns="0" rtlCol="0" anchor="t"/>
+          <a:lstStyle/>
+          <a:p>
+            <a:pPr indent="0" marL="0">
+              <a:buNone/>
+            </a:pPr>
+            <a:r>
+              <a:rPr lang="en-US" sz="1200" dirty="0">
+                <a:solidFill>
+                  <a:srgbClr val="A9BEB4"/>
+                </a:solidFill>
+              </a:rPr>
+              <a:t>A árvore roda no RP2040 e aciona o LED</a:t>
+            </a:r>
+            <a:endParaRPr lang="en-US" sz="1200" dirty="0"/>
+          </a:p>
+        </p:txBody>
+      </p:sp>
+      <p:sp>
+        <p:nvSpPr>
+          <p:cNvPr id="15" name="demo-2"/>
+          <p:cNvSpPr/>
+          <p:nvPr/>
+        </p:nvSpPr>
+        <p:spPr>
+          <a:xfrm>
+            <a:off x="3657600" y="3529584"/>
+            <a:ext cx="5120640" cy="841248"/>
+          </a:xfrm>
+          <a:prstGeom prst="roundRect">
+            <a:avLst>
+              <a:gd name="adj" fmla="val 13043"/>
+            </a:avLst>
+          </a:prstGeom>
+          <a:solidFill>
+            <a:srgbClr val="17342B"/>
+          </a:solidFill>
+          <a:ln/>
+        </p:spPr>
+      </p:sp>
+      <p:sp>
+        <p:nvSpPr>
+          <p:cNvPr id="16" name="icon-bg-LuCloud"/>
+          <p:cNvSpPr/>
+          <p:nvPr/>
+        </p:nvSpPr>
+        <p:spPr>
+          <a:xfrm>
+            <a:off x="3813048" y="3675888"/>
+            <a:ext cx="548640" cy="548640"/>
+          </a:xfrm>
+          <a:prstGeom prst="ellipse">
+            <a:avLst/>
+          </a:prstGeom>
+          <a:solidFill>
+            <a:srgbClr val="21453A"/>
+          </a:solidFill>
+          <a:ln/>
+        </p:spPr>
+      </p:sp>
+      <p:pic>
+        <p:nvPicPr>
+          <p:cNvPr id="17" name="icon-LuCloud" descr="preencoded.png">    </p:cNvPr>
+          <p:cNvPicPr>
+            <a:picLocks noChangeAspect="1"/>
+          </p:cNvPicPr>
+          <p:nvPr/>
+        </p:nvPicPr>
+        <p:blipFill>
+          <a:blip r:embed="rId6"/>
+          <a:stretch>
+            <a:fillRect/>
+          </a:stretch>
+        </p:blipFill>
+        <p:spPr>
+          <a:xfrm>
+            <a:off x="3950208" y="3813048"/>
+            <a:ext cx="274320" cy="274320"/>
+          </a:xfrm>
+          <a:prstGeom prst="rect">
+            <a:avLst/>
+          </a:prstGeom>
+        </p:spPr>
+      </p:pic>
+      <p:sp>
+        <p:nvSpPr>
+          <p:cNvPr id="18" name="Text 12"/>
+          <p:cNvSpPr txBox="1"/>
+          <p:nvPr/>
+        </p:nvSpPr>
+        <p:spPr>
+          <a:xfrm>
+            <a:off x="4526280" y="3621024"/>
+            <a:ext cx="4114800" cy="310896"/>
+          </a:xfrm>
+          <a:prstGeom prst="rect">
+            <a:avLst/>
+          </a:prstGeom>
+          <a:noFill/>
+          <a:ln/>
+        </p:spPr>
+        <p:txBody>
+          <a:bodyPr wrap="square" lIns="0" tIns="0" rIns="0" bIns="0" rtlCol="0" anchor="t"/>
+          <a:lstStyle/>
+          <a:p>
+            <a:pPr indent="0" marL="0">
+              <a:buNone/>
+            </a:pPr>
+            <a:r>
+              <a:rPr lang="en-US" sz="1500" b="1" dirty="0">
+                <a:solidFill>
+                  <a:srgbClr val="FFFFFF"/>
+                </a:solidFill>
+              </a:rPr>
+              <a:t>Envia por Wi-Fi</a:t>
+            </a:r>
+            <a:endParaRPr lang="en-US" sz="1500" dirty="0"/>
+          </a:p>
+        </p:txBody>
+      </p:sp>
+      <p:sp>
+        <p:nvSpPr>
+          <p:cNvPr id="19" name="Text 13"/>
+          <p:cNvSpPr txBox="1"/>
+          <p:nvPr/>
+        </p:nvSpPr>
+        <p:spPr>
+          <a:xfrm>
+            <a:off x="4526280" y="3941064"/>
+            <a:ext cx="4114800" cy="365760"/>
+          </a:xfrm>
+          <a:prstGeom prst="rect">
+            <a:avLst/>
+          </a:prstGeom>
+          <a:noFill/>
+          <a:ln/>
+        </p:spPr>
+        <p:txBody>
+          <a:bodyPr wrap="square" lIns="0" tIns="0" rIns="0" bIns="0" rtlCol="0" anchor="t"/>
+          <a:lstStyle/>
+          <a:p>
+            <a:pPr indent="0" marL="0">
+              <a:buNone/>
+            </a:pPr>
+            <a:r>
+              <a:rPr lang="en-US" sz="1200" dirty="0">
+                <a:solidFill>
+                  <a:srgbClr val="A9BEB4"/>
+                </a:solidFill>
+              </a:rPr>
+              <a:t>Leitura autenticada gravada no Supabase</a:t>
+            </a:r>
+            <a:endParaRPr lang="en-US" sz="1200" dirty="0"/>
+          </a:p>
+        </p:txBody>
+      </p:sp>
+      <p:sp>
+        <p:nvSpPr>
+          <p:cNvPr id="20" name="demo-3"/>
+          <p:cNvSpPr/>
+          <p:nvPr/>
+        </p:nvSpPr>
+        <p:spPr>
+          <a:xfrm>
+            <a:off x="3657600" y="4517136"/>
+            <a:ext cx="5120640" cy="841248"/>
+          </a:xfrm>
+          <a:prstGeom prst="roundRect">
+            <a:avLst>
+              <a:gd name="adj" fmla="val 13043"/>
+            </a:avLst>
+          </a:prstGeom>
+          <a:solidFill>
+            <a:srgbClr val="17342B"/>
+          </a:solidFill>
+          <a:ln/>
+        </p:spPr>
+      </p:sp>
+      <p:sp>
+        <p:nvSpPr>
+          <p:cNvPr id="21" name="icon-bg-LuMonitor"/>
+          <p:cNvSpPr/>
+          <p:nvPr/>
+        </p:nvSpPr>
+        <p:spPr>
+          <a:xfrm>
+            <a:off x="3813048" y="4663440"/>
+            <a:ext cx="548640" cy="548640"/>
+          </a:xfrm>
+          <a:prstGeom prst="ellipse">
+            <a:avLst/>
+          </a:prstGeom>
+          <a:solidFill>
+            <a:srgbClr val="21453A"/>
+          </a:solidFill>
+          <a:ln/>
+        </p:spPr>
+      </p:sp>
+      <p:pic>
+        <p:nvPicPr>
+          <p:cNvPr id="22" name="icon-LuMonitor" descr="preencoded.png">    </p:cNvPr>
+          <p:cNvPicPr>
+            <a:picLocks noChangeAspect="1"/>
+          </p:cNvPicPr>
+          <p:nvPr/>
+        </p:nvPicPr>
+        <p:blipFill>
+          <a:blip r:embed="rId7"/>
+          <a:stretch>
+            <a:fillRect/>
+          </a:stretch>
+        </p:blipFill>
+        <p:spPr>
+          <a:xfrm>
+            <a:off x="3950208" y="4800600"/>
+            <a:ext cx="274320" cy="274320"/>
+          </a:xfrm>
+          <a:prstGeom prst="rect">
+            <a:avLst/>
+          </a:prstGeom>
+        </p:spPr>
+      </p:pic>
+      <p:sp>
+        <p:nvSpPr>
+          <p:cNvPr id="23" name="Text 16"/>
+          <p:cNvSpPr txBox="1"/>
+          <p:nvPr/>
+        </p:nvSpPr>
+        <p:spPr>
+          <a:xfrm>
+            <a:off x="4526280" y="4608576"/>
+            <a:ext cx="4114800" cy="310896"/>
+          </a:xfrm>
+          <a:prstGeom prst="rect">
+            <a:avLst/>
+          </a:prstGeom>
+          <a:noFill/>
+          <a:ln/>
+        </p:spPr>
+        <p:txBody>
+          <a:bodyPr wrap="square" lIns="0" tIns="0" rIns="0" bIns="0" rtlCol="0" anchor="t"/>
+          <a:lstStyle/>
+          <a:p>
+            <a:pPr indent="0" marL="0">
+              <a:buNone/>
+            </a:pPr>
+            <a:r>
+              <a:rPr lang="en-US" sz="1500" b="1" dirty="0">
+                <a:solidFill>
+                  <a:srgbClr val="FFFFFF"/>
+                </a:solidFill>
+              </a:rPr>
+              <a:t>O painel atualiza</a:t>
+            </a:r>
+            <a:endParaRPr lang="en-US" sz="1500" dirty="0"/>
+          </a:p>
+        </p:txBody>
+      </p:sp>
       <p:sp>
         <p:nvSpPr>
           <p:cNvPr id="24" name="Text 17"/>
@@ -11105,8 +11135,8 @@
         </p:nvSpPr>
         <p:spPr>
           <a:xfrm>
-            <a:off x="8549640" y="4654296"/>
-            <a:ext cx="2926080" cy="292608"/>
+            <a:off x="4526280" y="4928616"/>
+            <a:ext cx="4114800" cy="365760"/>
           </a:xfrm>
           <a:prstGeom prst="rect">
             <a:avLst/>
@@ -11122,27 +11152,109 @@
               <a:buNone/>
             </a:pPr>
             <a:r>
-              <a:rPr lang="en-US" sz="1500" b="1" dirty="0">
-                <a:solidFill>
-                  <a:srgbClr val="FFFFFF"/>
-                </a:solidFill>
-              </a:rPr>
-              <a:t>Painel React</a:t>
-            </a:r>
-            <a:endParaRPr lang="en-US" sz="1500" dirty="0"/>
-          </a:p>
-        </p:txBody>
-      </p:sp>
-      <p:sp>
-        <p:nvSpPr>
-          <p:cNvPr id="25" name="Text 18"/>
+              <a:rPr lang="en-US" sz="1200" dirty="0">
+                <a:solidFill>
+                  <a:srgbClr val="A9BEB4"/>
+                </a:solidFill>
+              </a:rPr>
+              <a:t>O mesmo dado aparece no site em segundos</a:t>
+            </a:r>
+            <a:endParaRPr lang="en-US" sz="1200" dirty="0"/>
+          </a:p>
+        </p:txBody>
+      </p:sp>
+      <p:sp>
+        <p:nvSpPr>
+          <p:cNvPr id="25" name="qr-card"/>
+          <p:cNvSpPr/>
+          <p:nvPr/>
+        </p:nvSpPr>
+        <p:spPr>
+          <a:xfrm>
+            <a:off x="9144000" y="1554480"/>
+            <a:ext cx="2468880" cy="3108960"/>
+          </a:xfrm>
+          <a:prstGeom prst="roundRect">
+            <a:avLst>
+              <a:gd name="adj" fmla="val 4444"/>
+            </a:avLst>
+          </a:prstGeom>
+          <a:solidFill>
+            <a:srgbClr val="FFFFFF"/>
+          </a:solidFill>
+          <a:ln/>
+        </p:spPr>
+      </p:sp>
+      <p:pic>
+        <p:nvPicPr>
+          <p:cNvPr id="26" name="qr-demo" descr="preencoded.png">    </p:cNvPr>
+          <p:cNvPicPr>
+            <a:picLocks noChangeAspect="1"/>
+          </p:cNvPicPr>
+          <p:nvPr/>
+        </p:nvPicPr>
+        <p:blipFill>
+          <a:blip r:embed="rId8"/>
+          <a:stretch>
+            <a:fillRect/>
+          </a:stretch>
+        </p:blipFill>
+        <p:spPr>
+          <a:xfrm>
+            <a:off x="9326880" y="1737360"/>
+            <a:ext cx="2103120" cy="2103120"/>
+          </a:xfrm>
+          <a:prstGeom prst="rect">
+            <a:avLst/>
+          </a:prstGeom>
+        </p:spPr>
+      </p:pic>
+      <p:sp>
+        <p:nvSpPr>
+          <p:cNvPr id="27" name="Text 19"/>
           <p:cNvSpPr txBox="1"/>
           <p:nvPr/>
         </p:nvSpPr>
         <p:spPr>
           <a:xfrm>
-            <a:off x="8549640" y="4956048"/>
-            <a:ext cx="2971800" cy="411480"/>
+            <a:off x="9281160" y="3931920"/>
+            <a:ext cx="2194560" cy="548640"/>
+          </a:xfrm>
+          <a:prstGeom prst="rect">
+            <a:avLst/>
+          </a:prstGeom>
+          <a:noFill/>
+          <a:ln/>
+        </p:spPr>
+        <p:txBody>
+          <a:bodyPr wrap="square" lIns="0" tIns="0" rIns="0" bIns="0" rtlCol="0" anchor="ctr"/>
+          <a:lstStyle/>
+          <a:p>
+            <a:pPr algn="ctr" indent="0" marL="0">
+              <a:buNone/>
+            </a:pPr>
+            <a:r>
+              <a:rPr lang="en-US" sz="1300" b="1" dirty="0">
+                <a:solidFill>
+                  <a:srgbClr val="15291F"/>
+                </a:solidFill>
+              </a:rPr>
+              <a:t>Acesse o painel ao vivo</a:t>
+            </a:r>
+            <a:endParaRPr lang="en-US" sz="1300" dirty="0"/>
+          </a:p>
+        </p:txBody>
+      </p:sp>
+      <p:sp>
+        <p:nvSpPr>
+          <p:cNvPr id="28" name="Text 20"/>
+          <p:cNvSpPr txBox="1"/>
+          <p:nvPr/>
+        </p:nvSpPr>
+        <p:spPr>
+          <a:xfrm>
+            <a:off x="3657600" y="5623560"/>
+            <a:ext cx="7955280" cy="457200"/>
           </a:xfrm>
           <a:prstGeom prst="rect">
             <a:avLst/>
@@ -11158,55 +11270,12 @@
               <a:buNone/>
             </a:pPr>
             <a:r>
-              <a:rPr lang="en-US" sz="1200" dirty="0">
-                <a:solidFill>
-                  <a:srgbClr val="A9BEB4"/>
-                </a:solidFill>
-              </a:rPr>
-              <a:t>Vercel · USB, nuvem e simulador</a:t>
-            </a:r>
-            <a:endParaRPr lang="en-US" sz="1200" dirty="0"/>
-          </a:p>
-        </p:txBody>
-      </p:sp>
-      <p:sp>
-        <p:nvSpPr>
-          <p:cNvPr id="26" name="Text 19"/>
-          <p:cNvSpPr txBox="1"/>
-          <p:nvPr/>
-        </p:nvSpPr>
-        <p:spPr>
-          <a:xfrm>
-            <a:off x="7726680" y="5623560"/>
-            <a:ext cx="3886200" cy="365760"/>
-          </a:xfrm>
-          <a:prstGeom prst="rect">
-            <a:avLst/>
-          </a:prstGeom>
-          <a:noFill/>
-          <a:ln/>
-        </p:spPr>
-        <p:txBody>
-          <a:bodyPr wrap="square" lIns="0" tIns="0" rIns="0" bIns="0" rtlCol="0" anchor="ctr"/>
-          <a:lstStyle/>
-          <a:p>
-            <a:pPr indent="0" marL="0">
-              <a:buNone/>
-            </a:pPr>
-            <a:r>
-              <a:rPr lang="en-US" sz="1400" b="1" u="sng" dirty="0">
-                <a:solidFill>
-                  <a:srgbClr val="3F8A70"/>
-                </a:solidFill>
-                <a:hlinkClick r:id="rId6" invalidUrl="" action="" tgtFrame="" tooltip="" history="1" highlightClick="0" endSnd="0">
-                  <a:extLst>
-                    <a:ext uri="{A12FA001-AC4F-418D-AE19-62706E023703}">
-                      <ahyp:hlinkClr xmlns:ahyp="http://schemas.microsoft.com/office/drawing/2018/hyperlinkcolor" val="tx"/>
-                    </a:ext>
-                  </a:extLst>
-                </a:hlinkClick>
-              </a:rPr>
-              <a:t>classificador-de-ambiente.vercel.app</a:t>
+              <a:rPr lang="en-US" sz="1400" i="1" dirty="0">
+                <a:solidFill>
+                  <a:srgbClr val="B9E3CF"/>
+                </a:solidFill>
+              </a:rPr>
+              <a:t>O notebook só exibe o site: todo o processamento acontece na placa.</a:t>
             </a:r>
             <a:endParaRPr lang="en-US" sz="1400" dirty="0"/>
           </a:p>
@@ -11242,7 +11311,7 @@
             <a:lvl1pPr>
               <a:defRPr sz="1000">
                 <a:solidFill>
-                  <a:srgbClr val="5E6F67"/>
+                  <a:srgbClr val="A9BEB4"/>
                 </a:solidFill>
               </a:defRPr>
             </a:lvl1pPr>
@@ -11311,10 +11380,10 @@
             <a:r>
               <a:rPr lang="en-US" sz="1200" b="1" spc="300" kern="0" dirty="0">
                 <a:solidFill>
-                  <a:srgbClr val="D9A24F"/>
-                </a:solidFill>
-              </a:rPr>
-              <a:t>15 · DEMONSTRAÇÃO</a:t>
+                  <a:srgbClr val="3F8A70"/>
+                </a:solidFill>
+              </a:rPr>
+              <a:t>15 · CONCLUSÃO</a:t>
             </a:r>
             <a:endParaRPr lang="en-US" sz="1200" dirty="0"/>
           </a:p>
@@ -11349,31 +11418,456 @@
             <a:r>
               <a:rPr lang="en-US" sz="3400" b="1" dirty="0">
                 <a:solidFill>
-                  <a:srgbClr val="FFFFFF"/>
-                </a:solidFill>
-              </a:rPr>
-              <a:t>Funcionando de ponta a ponta</a:t>
+                  <a:srgbClr val="15291F"/>
+                </a:solidFill>
+              </a:rPr>
+              <a:t>Resultados, limitações e próximos passos</a:t>
             </a:r>
             <a:endParaRPr lang="en-US" sz="3400" dirty="0"/>
           </a:p>
         </p:txBody>
+      </p:sp>
+      <p:sp>
+        <p:nvSpPr>
+          <p:cNvPr id="4" name="conclusao-0"/>
+          <p:cNvSpPr/>
+          <p:nvPr/>
+        </p:nvSpPr>
+        <p:spPr>
+          <a:xfrm>
+            <a:off x="548640" y="1600200"/>
+            <a:ext cx="3520440" cy="3611880"/>
+          </a:xfrm>
+          <a:prstGeom prst="roundRect">
+            <a:avLst>
+              <a:gd name="adj" fmla="val 3117"/>
+            </a:avLst>
+          </a:prstGeom>
+          <a:solidFill>
+            <a:srgbClr val="EEF4F0"/>
+          </a:solidFill>
+          <a:ln/>
+        </p:spPr>
+      </p:sp>
+      <p:sp>
+        <p:nvSpPr>
+          <p:cNvPr id="5" name="icon-bg-LuCircleCheck"/>
+          <p:cNvSpPr/>
+          <p:nvPr/>
+        </p:nvSpPr>
+        <p:spPr>
+          <a:xfrm>
+            <a:off x="822960" y="1828800"/>
+            <a:ext cx="685800" cy="685800"/>
+          </a:xfrm>
+          <a:prstGeom prst="ellipse">
+            <a:avLst/>
+          </a:prstGeom>
+          <a:solidFill>
+            <a:srgbClr val="E1EFE8"/>
+          </a:solidFill>
+          <a:ln/>
+        </p:spPr>
       </p:sp>
       <p:pic>
         <p:nvPicPr>
-          <p:cNvPr id="3" name="video-demo">
-            <a:hlinkClick r:id="" action="ppaction://media"/>
-          </p:cNvPr>
+          <p:cNvPr id="6" name="icon-LuCircleCheck" descr="preencoded.png">    </p:cNvPr>
           <p:cNvPicPr>
             <a:picLocks noChangeAspect="1"/>
           </p:cNvPicPr>
-          <p:nvPr>
-            <a:videoFile r:link="rId1"/>
-            <p:extLst>
-              <p:ext uri="{DAA4B4D4-6D71-4841-9C94-3DE7FCFB9230}">
-                <p14:media xmlns:p14="http://schemas.microsoft.com/office/powerpoint/2010/main" r:embed="rId2"/>
-              </p:ext>
-            </p:extLst>
-          </p:nvPr>
+          <p:nvPr/>
+        </p:nvPicPr>
+        <p:blipFill>
+          <a:blip r:embed="rId1"/>
+          <a:stretch>
+            <a:fillRect/>
+          </a:stretch>
+        </p:blipFill>
+        <p:spPr>
+          <a:xfrm>
+            <a:off x="994410" y="2000250"/>
+            <a:ext cx="342900" cy="342900"/>
+          </a:xfrm>
+          <a:prstGeom prst="rect">
+            <a:avLst/>
+          </a:prstGeom>
+        </p:spPr>
+      </p:pic>
+      <p:sp>
+        <p:nvSpPr>
+          <p:cNvPr id="7" name="Text 4"/>
+          <p:cNvSpPr txBox="1"/>
+          <p:nvPr/>
+        </p:nvSpPr>
+        <p:spPr>
+          <a:xfrm>
+            <a:off x="822960" y="2697480"/>
+            <a:ext cx="3017520" cy="365760"/>
+          </a:xfrm>
+          <a:prstGeom prst="rect">
+            <a:avLst/>
+          </a:prstGeom>
+          <a:noFill/>
+          <a:ln/>
+        </p:spPr>
+        <p:txBody>
+          <a:bodyPr wrap="square" lIns="0" tIns="0" rIns="0" bIns="0" rtlCol="0" anchor="t"/>
+          <a:lstStyle/>
+          <a:p>
+            <a:pPr indent="0" marL="0">
+              <a:buNone/>
+            </a:pPr>
+            <a:r>
+              <a:rPr lang="en-US" sz="1900" b="1" dirty="0">
+                <a:solidFill>
+                  <a:srgbClr val="15291F"/>
+                </a:solidFill>
+              </a:rPr>
+              <a:t>O que alcançamos</a:t>
+            </a:r>
+            <a:endParaRPr lang="en-US" sz="1900" dirty="0"/>
+          </a:p>
+        </p:txBody>
+      </p:sp>
+      <p:sp>
+        <p:nvSpPr>
+          <p:cNvPr id="8" name="Text 5"/>
+          <p:cNvSpPr txBox="1"/>
+          <p:nvPr/>
+        </p:nvSpPr>
+        <p:spPr>
+          <a:xfrm>
+            <a:off x="822960" y="3154680"/>
+            <a:ext cx="3063240" cy="1965960"/>
+          </a:xfrm>
+          <a:prstGeom prst="rect">
+            <a:avLst/>
+          </a:prstGeom>
+          <a:noFill/>
+          <a:ln/>
+        </p:spPr>
+        <p:txBody>
+          <a:bodyPr wrap="square" lIns="0" tIns="0" rIns="0" bIns="0" rtlCol="0" anchor="t"/>
+          <a:lstStyle/>
+          <a:p>
+            <a:pPr marL="342900" indent="-342900">
+              <a:spcAft>
+                <a:spcPts val="600"/>
+              </a:spcAft>
+              <a:buSzPct val="100000"/>
+              <a:buChar char="•"/>
+            </a:pPr>
+            <a:r>
+              <a:rPr lang="en-US" sz="1400" dirty="0">
+                <a:solidFill>
+                  <a:srgbClr val="15291F"/>
+                </a:solidFill>
+              </a:rPr>
+              <a:t>Pipeline TinyML completo, do sensor ao firmware</a:t>
+            </a:r>
+            <a:endParaRPr lang="en-US" sz="1400" dirty="0"/>
+          </a:p>
+          <a:p>
+            <a:pPr marL="342900" indent="-342900">
+              <a:spcAft>
+                <a:spcPts val="600"/>
+              </a:spcAft>
+              <a:buSzPct val="100000"/>
+              <a:buChar char="•"/>
+            </a:pPr>
+            <a:r>
+              <a:rPr lang="en-US" sz="1400" dirty="0">
+                <a:solidFill>
+                  <a:srgbClr val="15291F"/>
+                </a:solidFill>
+              </a:rPr>
+              <a:t>F1 macro de 99,3 % com 25 nós</a:t>
+            </a:r>
+            <a:endParaRPr lang="en-US" sz="1400" dirty="0"/>
+          </a:p>
+          <a:p>
+            <a:pPr marL="342900" indent="-342900">
+              <a:spcAft>
+                <a:spcPts val="600"/>
+              </a:spcAft>
+              <a:buSzPct val="100000"/>
+              <a:buChar char="•"/>
+            </a:pPr>
+            <a:r>
+              <a:rPr lang="en-US" sz="1400" dirty="0">
+                <a:solidFill>
+                  <a:srgbClr val="15291F"/>
+                </a:solidFill>
+              </a:rPr>
+              <a:t>Previsão de +60 s e fallback seguro</a:t>
+            </a:r>
+            <a:endParaRPr lang="en-US" sz="1400" dirty="0"/>
+          </a:p>
+          <a:p>
+            <a:pPr marL="342900" indent="-342900">
+              <a:spcAft>
+                <a:spcPts val="600"/>
+              </a:spcAft>
+              <a:buSzPct val="100000"/>
+              <a:buChar char="•"/>
+            </a:pPr>
+            <a:r>
+              <a:rPr lang="en-US" sz="1400" dirty="0">
+                <a:solidFill>
+                  <a:srgbClr val="15291F"/>
+                </a:solidFill>
+              </a:rPr>
+              <a:t>Nuvem segura e painel publicado</a:t>
+            </a:r>
+            <a:endParaRPr lang="en-US" sz="1400" dirty="0"/>
+          </a:p>
+        </p:txBody>
+      </p:sp>
+      <p:sp>
+        <p:nvSpPr>
+          <p:cNvPr id="9" name="conclusao-1"/>
+          <p:cNvSpPr/>
+          <p:nvPr/>
+        </p:nvSpPr>
+        <p:spPr>
+          <a:xfrm>
+            <a:off x="4297680" y="1600200"/>
+            <a:ext cx="3520440" cy="3611880"/>
+          </a:xfrm>
+          <a:prstGeom prst="roundRect">
+            <a:avLst>
+              <a:gd name="adj" fmla="val 3117"/>
+            </a:avLst>
+          </a:prstGeom>
+          <a:solidFill>
+            <a:srgbClr val="EEF4F0"/>
+          </a:solidFill>
+          <a:ln/>
+        </p:spPr>
+      </p:sp>
+      <p:sp>
+        <p:nvSpPr>
+          <p:cNvPr id="10" name="icon-bg-LuTriangleAlert"/>
+          <p:cNvSpPr/>
+          <p:nvPr/>
+        </p:nvSpPr>
+        <p:spPr>
+          <a:xfrm>
+            <a:off x="4572000" y="1828800"/>
+            <a:ext cx="685800" cy="685800"/>
+          </a:xfrm>
+          <a:prstGeom prst="ellipse">
+            <a:avLst/>
+          </a:prstGeom>
+          <a:solidFill>
+            <a:srgbClr val="F7EDDA"/>
+          </a:solidFill>
+          <a:ln/>
+        </p:spPr>
+      </p:sp>
+      <p:pic>
+        <p:nvPicPr>
+          <p:cNvPr id="11" name="icon-LuTriangleAlert" descr="preencoded.png">    </p:cNvPr>
+          <p:cNvPicPr>
+            <a:picLocks noChangeAspect="1"/>
+          </p:cNvPicPr>
+          <p:nvPr/>
+        </p:nvPicPr>
+        <p:blipFill>
+          <a:blip r:embed="rId2"/>
+          <a:stretch>
+            <a:fillRect/>
+          </a:stretch>
+        </p:blipFill>
+        <p:spPr>
+          <a:xfrm>
+            <a:off x="4743450" y="2000250"/>
+            <a:ext cx="342900" cy="342900"/>
+          </a:xfrm>
+          <a:prstGeom prst="rect">
+            <a:avLst/>
+          </a:prstGeom>
+        </p:spPr>
+      </p:pic>
+      <p:sp>
+        <p:nvSpPr>
+          <p:cNvPr id="12" name="Text 8"/>
+          <p:cNvSpPr txBox="1"/>
+          <p:nvPr/>
+        </p:nvSpPr>
+        <p:spPr>
+          <a:xfrm>
+            <a:off x="4572000" y="2697480"/>
+            <a:ext cx="3017520" cy="365760"/>
+          </a:xfrm>
+          <a:prstGeom prst="rect">
+            <a:avLst/>
+          </a:prstGeom>
+          <a:noFill/>
+          <a:ln/>
+        </p:spPr>
+        <p:txBody>
+          <a:bodyPr wrap="square" lIns="0" tIns="0" rIns="0" bIns="0" rtlCol="0" anchor="t"/>
+          <a:lstStyle/>
+          <a:p>
+            <a:pPr indent="0" marL="0">
+              <a:buNone/>
+            </a:pPr>
+            <a:r>
+              <a:rPr lang="en-US" sz="1900" b="1" dirty="0">
+                <a:solidFill>
+                  <a:srgbClr val="15291F"/>
+                </a:solidFill>
+              </a:rPr>
+              <a:t>Limitações</a:t>
+            </a:r>
+            <a:endParaRPr lang="en-US" sz="1900" dirty="0"/>
+          </a:p>
+        </p:txBody>
+      </p:sp>
+      <p:sp>
+        <p:nvSpPr>
+          <p:cNvPr id="13" name="Text 9"/>
+          <p:cNvSpPr txBox="1"/>
+          <p:nvPr/>
+        </p:nvSpPr>
+        <p:spPr>
+          <a:xfrm>
+            <a:off x="4572000" y="3154680"/>
+            <a:ext cx="3063240" cy="1965960"/>
+          </a:xfrm>
+          <a:prstGeom prst="rect">
+            <a:avLst/>
+          </a:prstGeom>
+          <a:noFill/>
+          <a:ln/>
+        </p:spPr>
+        <p:txBody>
+          <a:bodyPr wrap="square" lIns="0" tIns="0" rIns="0" bIns="0" rtlCol="0" anchor="t"/>
+          <a:lstStyle/>
+          <a:p>
+            <a:pPr marL="342900" indent="-342900">
+              <a:spcAft>
+                <a:spcPts val="600"/>
+              </a:spcAft>
+              <a:buSzPct val="100000"/>
+              <a:buChar char="•"/>
+            </a:pPr>
+            <a:r>
+              <a:rPr lang="en-US" sz="1400" dirty="0">
+                <a:solidFill>
+                  <a:srgbClr val="15291F"/>
+                </a:solidFill>
+              </a:rPr>
+              <a:t>Rótulos derivados das regras</a:t>
+            </a:r>
+            <a:endParaRPr lang="en-US" sz="1400" dirty="0"/>
+          </a:p>
+          <a:p>
+            <a:pPr marL="342900" indent="-342900">
+              <a:spcAft>
+                <a:spcPts val="600"/>
+              </a:spcAft>
+              <a:buSzPct val="100000"/>
+              <a:buChar char="•"/>
+            </a:pPr>
+            <a:r>
+              <a:rPr lang="en-US" sz="1400" dirty="0">
+                <a:solidFill>
+                  <a:srgbClr val="15291F"/>
+                </a:solidFill>
+              </a:rPr>
+              <a:t>76 % do dataset é sintético</a:t>
+            </a:r>
+            <a:endParaRPr lang="en-US" sz="1400" dirty="0"/>
+          </a:p>
+          <a:p>
+            <a:pPr marL="342900" indent="-342900">
+              <a:spcAft>
+                <a:spcPts val="600"/>
+              </a:spcAft>
+              <a:buSzPct val="100000"/>
+              <a:buChar char="•"/>
+            </a:pPr>
+            <a:r>
+              <a:rPr lang="en-US" sz="1400" dirty="0">
+                <a:solidFill>
+                  <a:srgbClr val="15291F"/>
+                </a:solidFill>
+              </a:rPr>
+              <a:t>Sem sessões ou horários na coleta real</a:t>
+            </a:r>
+            <a:endParaRPr lang="en-US" sz="1400" dirty="0"/>
+          </a:p>
+          <a:p>
+            <a:pPr marL="342900" indent="-342900">
+              <a:spcAft>
+                <a:spcPts val="600"/>
+              </a:spcAft>
+              <a:buSzPct val="100000"/>
+              <a:buChar char="•"/>
+            </a:pPr>
+            <a:r>
+              <a:rPr lang="en-US" sz="1400" dirty="0">
+                <a:solidFill>
+                  <a:srgbClr val="15291F"/>
+                </a:solidFill>
+              </a:rPr>
+              <a:t>DHT11 com ±2 °C e ±5 % UR</a:t>
+            </a:r>
+            <a:endParaRPr lang="en-US" sz="1400" dirty="0"/>
+          </a:p>
+        </p:txBody>
+      </p:sp>
+      <p:sp>
+        <p:nvSpPr>
+          <p:cNvPr id="14" name="conclusao-2"/>
+          <p:cNvSpPr/>
+          <p:nvPr/>
+        </p:nvSpPr>
+        <p:spPr>
+          <a:xfrm>
+            <a:off x="8046720" y="1600200"/>
+            <a:ext cx="3520440" cy="3611880"/>
+          </a:xfrm>
+          <a:prstGeom prst="roundRect">
+            <a:avLst>
+              <a:gd name="adj" fmla="val 3117"/>
+            </a:avLst>
+          </a:prstGeom>
+          <a:solidFill>
+            <a:srgbClr val="EEF4F0"/>
+          </a:solidFill>
+          <a:ln/>
+        </p:spPr>
+      </p:sp>
+      <p:sp>
+        <p:nvSpPr>
+          <p:cNvPr id="15" name="icon-bg-LuTrendingUp"/>
+          <p:cNvSpPr/>
+          <p:nvPr/>
+        </p:nvSpPr>
+        <p:spPr>
+          <a:xfrm>
+            <a:off x="8321040" y="1828800"/>
+            <a:ext cx="685800" cy="685800"/>
+          </a:xfrm>
+          <a:prstGeom prst="ellipse">
+            <a:avLst/>
+          </a:prstGeom>
+          <a:solidFill>
+            <a:srgbClr val="ECE8F4"/>
+          </a:solidFill>
+          <a:ln/>
+        </p:spPr>
+      </p:sp>
+      <p:pic>
+        <p:nvPicPr>
+          <p:cNvPr id="16" name="icon-LuTrendingUp" descr="preencoded.png">    </p:cNvPr>
+          <p:cNvPicPr>
+            <a:picLocks noChangeAspect="1"/>
+          </p:cNvPicPr>
+          <p:nvPr/>
         </p:nvPicPr>
         <p:blipFill>
           <a:blip r:embed="rId3"/>
@@ -11383,8 +11877,8 @@
         </p:blipFill>
         <p:spPr>
           <a:xfrm>
-            <a:off x="548640" y="1554480"/>
-            <a:ext cx="2651760" cy="4754880"/>
+            <a:off x="8492490" y="2000250"/>
+            <a:ext cx="342900" cy="342900"/>
           </a:xfrm>
           <a:prstGeom prst="rect">
             <a:avLst/>
@@ -11393,36 +11887,166 @@
       </p:pic>
       <p:sp>
         <p:nvSpPr>
-          <p:cNvPr id="5" name="demo-0"/>
+          <p:cNvPr id="17" name="Text 12"/>
+          <p:cNvSpPr txBox="1"/>
+          <p:nvPr/>
+        </p:nvSpPr>
+        <p:spPr>
+          <a:xfrm>
+            <a:off x="8321040" y="2697480"/>
+            <a:ext cx="3017520" cy="365760"/>
+          </a:xfrm>
+          <a:prstGeom prst="rect">
+            <a:avLst/>
+          </a:prstGeom>
+          <a:noFill/>
+          <a:ln/>
+        </p:spPr>
+        <p:txBody>
+          <a:bodyPr wrap="square" lIns="0" tIns="0" rIns="0" bIns="0" rtlCol="0" anchor="t"/>
+          <a:lstStyle/>
+          <a:p>
+            <a:pPr indent="0" marL="0">
+              <a:buNone/>
+            </a:pPr>
+            <a:r>
+              <a:rPr lang="en-US" sz="1900" b="1" dirty="0">
+                <a:solidFill>
+                  <a:srgbClr val="15291F"/>
+                </a:solidFill>
+              </a:rPr>
+              <a:t>Próximos passos</a:t>
+            </a:r>
+            <a:endParaRPr lang="en-US" sz="1900" dirty="0"/>
+          </a:p>
+        </p:txBody>
+      </p:sp>
+      <p:sp>
+        <p:nvSpPr>
+          <p:cNvPr id="18" name="Text 13"/>
+          <p:cNvSpPr txBox="1"/>
+          <p:nvPr/>
+        </p:nvSpPr>
+        <p:spPr>
+          <a:xfrm>
+            <a:off x="8321040" y="3154680"/>
+            <a:ext cx="3063240" cy="1965960"/>
+          </a:xfrm>
+          <a:prstGeom prst="rect">
+            <a:avLst/>
+          </a:prstGeom>
+          <a:noFill/>
+          <a:ln/>
+        </p:spPr>
+        <p:txBody>
+          <a:bodyPr wrap="square" lIns="0" tIns="0" rIns="0" bIns="0" rtlCol="0" anchor="t"/>
+          <a:lstStyle/>
+          <a:p>
+            <a:pPr marL="342900" indent="-342900">
+              <a:spcAft>
+                <a:spcPts val="600"/>
+              </a:spcAft>
+              <a:buSzPct val="100000"/>
+              <a:buChar char="•"/>
+            </a:pPr>
+            <a:r>
+              <a:rPr lang="en-US" sz="1400" dirty="0">
+                <a:solidFill>
+                  <a:srgbClr val="15291F"/>
+                </a:solidFill>
+              </a:rPr>
+              <a:t>Coletar sessões reais com rótulos observados</a:t>
+            </a:r>
+            <a:endParaRPr lang="en-US" sz="1400" dirty="0"/>
+          </a:p>
+          <a:p>
+            <a:pPr marL="342900" indent="-342900">
+              <a:spcAft>
+                <a:spcPts val="600"/>
+              </a:spcAft>
+              <a:buSzPct val="100000"/>
+              <a:buChar char="•"/>
+            </a:pPr>
+            <a:r>
+              <a:rPr lang="en-US" sz="1400" dirty="0">
+                <a:solidFill>
+                  <a:srgbClr val="15291F"/>
+                </a:solidFill>
+              </a:rPr>
+              <a:t>Sensor mais preciso (SHT31) e histerese</a:t>
+            </a:r>
+            <a:endParaRPr lang="en-US" sz="1400" dirty="0"/>
+          </a:p>
+          <a:p>
+            <a:pPr marL="342900" indent="-342900">
+              <a:spcAft>
+                <a:spcPts val="600"/>
+              </a:spcAft>
+              <a:buSzPct val="100000"/>
+              <a:buChar char="•"/>
+            </a:pPr>
+            <a:r>
+              <a:rPr lang="en-US" sz="1400" dirty="0">
+                <a:solidFill>
+                  <a:srgbClr val="15291F"/>
+                </a:solidFill>
+              </a:rPr>
+              <a:t>Medir latência e consumo na placa</a:t>
+            </a:r>
+            <a:endParaRPr lang="en-US" sz="1400" dirty="0"/>
+          </a:p>
+          <a:p>
+            <a:pPr marL="342900" indent="-342900">
+              <a:spcAft>
+                <a:spcPts val="600"/>
+              </a:spcAft>
+              <a:buSzPct val="100000"/>
+              <a:buChar char="•"/>
+            </a:pPr>
+            <a:r>
+              <a:rPr lang="en-US" sz="1400" dirty="0">
+                <a:solidFill>
+                  <a:srgbClr val="15291F"/>
+                </a:solidFill>
+              </a:rPr>
+              <a:t>Guardar leituras offline e notificar alertas</a:t>
+            </a:r>
+            <a:endParaRPr lang="en-US" sz="1400" dirty="0"/>
+          </a:p>
+        </p:txBody>
+      </p:sp>
+      <p:sp>
+        <p:nvSpPr>
+          <p:cNvPr id="19" name="mensagem-final"/>
           <p:cNvSpPr/>
           <p:nvPr/>
         </p:nvSpPr>
         <p:spPr>
           <a:xfrm>
-            <a:off x="3657600" y="1554480"/>
-            <a:ext cx="5120640" cy="841248"/>
+            <a:off x="548640" y="5394960"/>
+            <a:ext cx="11064240" cy="731520"/>
           </a:xfrm>
           <a:prstGeom prst="roundRect">
             <a:avLst>
-              <a:gd name="adj" fmla="val 13043"/>
+              <a:gd name="adj" fmla="val 15000"/>
             </a:avLst>
           </a:prstGeom>
           <a:solidFill>
-            <a:srgbClr val="17342B"/>
+            <a:srgbClr val="0E211A"/>
           </a:solidFill>
           <a:ln/>
         </p:spPr>
       </p:sp>
       <p:sp>
         <p:nvSpPr>
-          <p:cNvPr id="6" name="icon-bg-LuRadar"/>
+          <p:cNvPr id="20" name="icon-bg-LuSparkles"/>
           <p:cNvSpPr/>
           <p:nvPr/>
         </p:nvSpPr>
         <p:spPr>
           <a:xfrm>
-            <a:off x="3813048" y="1700784"/>
-            <a:ext cx="548640" cy="548640"/>
+            <a:off x="777240" y="5532120"/>
+            <a:ext cx="457200" cy="457200"/>
           </a:xfrm>
           <a:prstGeom prst="ellipse">
             <a:avLst/>
@@ -11435,7 +12059,7 @@
       </p:sp>
       <p:pic>
         <p:nvPicPr>
-          <p:cNvPr id="7" name="icon-LuRadar" descr="preencoded.png">    </p:cNvPr>
+          <p:cNvPr id="21" name="icon-LuSparkles" descr="preencoded.png">    </p:cNvPr>
           <p:cNvPicPr>
             <a:picLocks noChangeAspect="1"/>
           </p:cNvPicPr>
@@ -11449,8 +12073,8 @@
         </p:blipFill>
         <p:spPr>
           <a:xfrm>
-            <a:off x="3950208" y="1837944"/>
-            <a:ext cx="274320" cy="274320"/>
+            <a:off x="891540" y="5646420"/>
+            <a:ext cx="228600" cy="228600"/>
           </a:xfrm>
           <a:prstGeom prst="rect">
             <a:avLst/>
@@ -11459,605 +12083,37 @@
       </p:pic>
       <p:sp>
         <p:nvSpPr>
-          <p:cNvPr id="8" name="Text 4"/>
+          <p:cNvPr id="22" name="Text 16"/>
           <p:cNvSpPr txBox="1"/>
           <p:nvPr/>
         </p:nvSpPr>
         <p:spPr>
           <a:xfrm>
-            <a:off x="4526280" y="1645920"/>
-            <a:ext cx="4114800" cy="310896"/>
-          </a:xfrm>
-          <a:prstGeom prst="rect">
-            <a:avLst/>
-          </a:prstGeom>
-          <a:noFill/>
-          <a:ln/>
-        </p:spPr>
-        <p:txBody>
-          <a:bodyPr wrap="square" lIns="0" tIns="0" rIns="0" bIns="0" rtlCol="0" anchor="t"/>
-          <a:lstStyle/>
-          <a:p>
-            <a:pPr indent="0" marL="0">
-              <a:buNone/>
-            </a:pPr>
-            <a:r>
-              <a:rPr lang="en-US" sz="1500" b="1" dirty="0">
+            <a:off x="1417320" y="5394960"/>
+            <a:ext cx="10058400" cy="731520"/>
+          </a:xfrm>
+          <a:prstGeom prst="rect">
+            <a:avLst/>
+          </a:prstGeom>
+          <a:noFill/>
+          <a:ln/>
+        </p:spPr>
+        <p:txBody>
+          <a:bodyPr wrap="square" lIns="0" tIns="0" rIns="0" bIns="0" rtlCol="0" anchor="ctr"/>
+          <a:lstStyle/>
+          <a:p>
+            <a:pPr indent="0" marL="0">
+              <a:buNone/>
+            </a:pPr>
+            <a:r>
+              <a:rPr lang="en-US" sz="1600" b="1" dirty="0">
                 <a:solidFill>
                   <a:srgbClr val="FFFFFF"/>
                 </a:solidFill>
               </a:rPr>
-              <a:t>A placa lê os sensores</a:t>
-            </a:r>
-            <a:endParaRPr lang="en-US" sz="1500" dirty="0"/>
-          </a:p>
-        </p:txBody>
-      </p:sp>
-      <p:sp>
-        <p:nvSpPr>
-          <p:cNvPr id="9" name="Text 5"/>
-          <p:cNvSpPr txBox="1"/>
-          <p:nvPr/>
-        </p:nvSpPr>
-        <p:spPr>
-          <a:xfrm>
-            <a:off x="4526280" y="1965960"/>
-            <a:ext cx="4114800" cy="365760"/>
-          </a:xfrm>
-          <a:prstGeom prst="rect">
-            <a:avLst/>
-          </a:prstGeom>
-          <a:noFill/>
-          <a:ln/>
-        </p:spPr>
-        <p:txBody>
-          <a:bodyPr wrap="square" lIns="0" tIns="0" rIns="0" bIns="0" rtlCol="0" anchor="t"/>
-          <a:lstStyle/>
-          <a:p>
-            <a:pPr indent="0" marL="0">
-              <a:buNone/>
-            </a:pPr>
-            <a:r>
-              <a:rPr lang="en-US" sz="1200" dirty="0">
-                <a:solidFill>
-                  <a:srgbClr val="A9BEB4"/>
-                </a:solidFill>
-              </a:rPr>
-              <a:t>DHT11 e IR na protoboard, ciclo de 2 s</a:t>
-            </a:r>
-            <a:endParaRPr lang="en-US" sz="1200" dirty="0"/>
-          </a:p>
-        </p:txBody>
-      </p:sp>
-      <p:sp>
-        <p:nvSpPr>
-          <p:cNvPr id="10" name="demo-1"/>
-          <p:cNvSpPr/>
-          <p:nvPr/>
-        </p:nvSpPr>
-        <p:spPr>
-          <a:xfrm>
-            <a:off x="3657600" y="2542032"/>
-            <a:ext cx="5120640" cy="841248"/>
-          </a:xfrm>
-          <a:prstGeom prst="roundRect">
-            <a:avLst>
-              <a:gd name="adj" fmla="val 13043"/>
-            </a:avLst>
-          </a:prstGeom>
-          <a:solidFill>
-            <a:srgbClr val="17342B"/>
-          </a:solidFill>
-          <a:ln/>
-        </p:spPr>
-      </p:sp>
-      <p:sp>
-        <p:nvSpPr>
-          <p:cNvPr id="11" name="icon-bg-LuCpu"/>
-          <p:cNvSpPr/>
-          <p:nvPr/>
-        </p:nvSpPr>
-        <p:spPr>
-          <a:xfrm>
-            <a:off x="3813048" y="2688336"/>
-            <a:ext cx="548640" cy="548640"/>
-          </a:xfrm>
-          <a:prstGeom prst="ellipse">
-            <a:avLst/>
-          </a:prstGeom>
-          <a:solidFill>
-            <a:srgbClr val="21453A"/>
-          </a:solidFill>
-          <a:ln/>
-        </p:spPr>
-      </p:sp>
-      <p:pic>
-        <p:nvPicPr>
-          <p:cNvPr id="12" name="icon-LuCpu" descr="preencoded.png">    </p:cNvPr>
-          <p:cNvPicPr>
-            <a:picLocks noChangeAspect="1"/>
-          </p:cNvPicPr>
-          <p:nvPr/>
-        </p:nvPicPr>
-        <p:blipFill>
-          <a:blip r:embed="rId5"/>
-          <a:stretch>
-            <a:fillRect/>
-          </a:stretch>
-        </p:blipFill>
-        <p:spPr>
-          <a:xfrm>
-            <a:off x="3950208" y="2825496"/>
-            <a:ext cx="274320" cy="274320"/>
-          </a:xfrm>
-          <a:prstGeom prst="rect">
-            <a:avLst/>
-          </a:prstGeom>
-        </p:spPr>
-      </p:pic>
-      <p:sp>
-        <p:nvSpPr>
-          <p:cNvPr id="13" name="Text 8"/>
-          <p:cNvSpPr txBox="1"/>
-          <p:nvPr/>
-        </p:nvSpPr>
-        <p:spPr>
-          <a:xfrm>
-            <a:off x="4526280" y="2633472"/>
-            <a:ext cx="4114800" cy="310896"/>
-          </a:xfrm>
-          <a:prstGeom prst="rect">
-            <a:avLst/>
-          </a:prstGeom>
-          <a:noFill/>
-          <a:ln/>
-        </p:spPr>
-        <p:txBody>
-          <a:bodyPr wrap="square" lIns="0" tIns="0" rIns="0" bIns="0" rtlCol="0" anchor="t"/>
-          <a:lstStyle/>
-          <a:p>
-            <a:pPr indent="0" marL="0">
-              <a:buNone/>
-            </a:pPr>
-            <a:r>
-              <a:rPr lang="en-US" sz="1500" b="1" dirty="0">
-                <a:solidFill>
-                  <a:srgbClr val="FFFFFF"/>
-                </a:solidFill>
-              </a:rPr>
-              <a:t>Classifica sem computador</a:t>
-            </a:r>
-            <a:endParaRPr lang="en-US" sz="1500" dirty="0"/>
-          </a:p>
-        </p:txBody>
-      </p:sp>
-      <p:sp>
-        <p:nvSpPr>
-          <p:cNvPr id="14" name="Text 9"/>
-          <p:cNvSpPr txBox="1"/>
-          <p:nvPr/>
-        </p:nvSpPr>
-        <p:spPr>
-          <a:xfrm>
-            <a:off x="4526280" y="2953512"/>
-            <a:ext cx="4114800" cy="365760"/>
-          </a:xfrm>
-          <a:prstGeom prst="rect">
-            <a:avLst/>
-          </a:prstGeom>
-          <a:noFill/>
-          <a:ln/>
-        </p:spPr>
-        <p:txBody>
-          <a:bodyPr wrap="square" lIns="0" tIns="0" rIns="0" bIns="0" rtlCol="0" anchor="t"/>
-          <a:lstStyle/>
-          <a:p>
-            <a:pPr indent="0" marL="0">
-              <a:buNone/>
-            </a:pPr>
-            <a:r>
-              <a:rPr lang="en-US" sz="1200" dirty="0">
-                <a:solidFill>
-                  <a:srgbClr val="A9BEB4"/>
-                </a:solidFill>
-              </a:rPr>
-              <a:t>A árvore roda no RP2040 e aciona o LED</a:t>
-            </a:r>
-            <a:endParaRPr lang="en-US" sz="1200" dirty="0"/>
-          </a:p>
-        </p:txBody>
-      </p:sp>
-      <p:sp>
-        <p:nvSpPr>
-          <p:cNvPr id="15" name="demo-2"/>
-          <p:cNvSpPr/>
-          <p:nvPr/>
-        </p:nvSpPr>
-        <p:spPr>
-          <a:xfrm>
-            <a:off x="3657600" y="3529584"/>
-            <a:ext cx="5120640" cy="841248"/>
-          </a:xfrm>
-          <a:prstGeom prst="roundRect">
-            <a:avLst>
-              <a:gd name="adj" fmla="val 13043"/>
-            </a:avLst>
-          </a:prstGeom>
-          <a:solidFill>
-            <a:srgbClr val="17342B"/>
-          </a:solidFill>
-          <a:ln/>
-        </p:spPr>
-      </p:sp>
-      <p:sp>
-        <p:nvSpPr>
-          <p:cNvPr id="16" name="icon-bg-LuCloud"/>
-          <p:cNvSpPr/>
-          <p:nvPr/>
-        </p:nvSpPr>
-        <p:spPr>
-          <a:xfrm>
-            <a:off x="3813048" y="3675888"/>
-            <a:ext cx="548640" cy="548640"/>
-          </a:xfrm>
-          <a:prstGeom prst="ellipse">
-            <a:avLst/>
-          </a:prstGeom>
-          <a:solidFill>
-            <a:srgbClr val="21453A"/>
-          </a:solidFill>
-          <a:ln/>
-        </p:spPr>
-      </p:sp>
-      <p:pic>
-        <p:nvPicPr>
-          <p:cNvPr id="17" name="icon-LuCloud" descr="preencoded.png">    </p:cNvPr>
-          <p:cNvPicPr>
-            <a:picLocks noChangeAspect="1"/>
-          </p:cNvPicPr>
-          <p:nvPr/>
-        </p:nvPicPr>
-        <p:blipFill>
-          <a:blip r:embed="rId6"/>
-          <a:stretch>
-            <a:fillRect/>
-          </a:stretch>
-        </p:blipFill>
-        <p:spPr>
-          <a:xfrm>
-            <a:off x="3950208" y="3813048"/>
-            <a:ext cx="274320" cy="274320"/>
-          </a:xfrm>
-          <a:prstGeom prst="rect">
-            <a:avLst/>
-          </a:prstGeom>
-        </p:spPr>
-      </p:pic>
-      <p:sp>
-        <p:nvSpPr>
-          <p:cNvPr id="18" name="Text 12"/>
-          <p:cNvSpPr txBox="1"/>
-          <p:nvPr/>
-        </p:nvSpPr>
-        <p:spPr>
-          <a:xfrm>
-            <a:off x="4526280" y="3621024"/>
-            <a:ext cx="4114800" cy="310896"/>
-          </a:xfrm>
-          <a:prstGeom prst="rect">
-            <a:avLst/>
-          </a:prstGeom>
-          <a:noFill/>
-          <a:ln/>
-        </p:spPr>
-        <p:txBody>
-          <a:bodyPr wrap="square" lIns="0" tIns="0" rIns="0" bIns="0" rtlCol="0" anchor="t"/>
-          <a:lstStyle/>
-          <a:p>
-            <a:pPr indent="0" marL="0">
-              <a:buNone/>
-            </a:pPr>
-            <a:r>
-              <a:rPr lang="en-US" sz="1500" b="1" dirty="0">
-                <a:solidFill>
-                  <a:srgbClr val="FFFFFF"/>
-                </a:solidFill>
-              </a:rPr>
-              <a:t>Envia por Wi-Fi</a:t>
-            </a:r>
-            <a:endParaRPr lang="en-US" sz="1500" dirty="0"/>
-          </a:p>
-        </p:txBody>
-      </p:sp>
-      <p:sp>
-        <p:nvSpPr>
-          <p:cNvPr id="19" name="Text 13"/>
-          <p:cNvSpPr txBox="1"/>
-          <p:nvPr/>
-        </p:nvSpPr>
-        <p:spPr>
-          <a:xfrm>
-            <a:off x="4526280" y="3941064"/>
-            <a:ext cx="4114800" cy="365760"/>
-          </a:xfrm>
-          <a:prstGeom prst="rect">
-            <a:avLst/>
-          </a:prstGeom>
-          <a:noFill/>
-          <a:ln/>
-        </p:spPr>
-        <p:txBody>
-          <a:bodyPr wrap="square" lIns="0" tIns="0" rIns="0" bIns="0" rtlCol="0" anchor="t"/>
-          <a:lstStyle/>
-          <a:p>
-            <a:pPr indent="0" marL="0">
-              <a:buNone/>
-            </a:pPr>
-            <a:r>
-              <a:rPr lang="en-US" sz="1200" dirty="0">
-                <a:solidFill>
-                  <a:srgbClr val="A9BEB4"/>
-                </a:solidFill>
-              </a:rPr>
-              <a:t>Leitura autenticada gravada no Supabase</a:t>
-            </a:r>
-            <a:endParaRPr lang="en-US" sz="1200" dirty="0"/>
-          </a:p>
-        </p:txBody>
-      </p:sp>
-      <p:sp>
-        <p:nvSpPr>
-          <p:cNvPr id="20" name="demo-3"/>
-          <p:cNvSpPr/>
-          <p:nvPr/>
-        </p:nvSpPr>
-        <p:spPr>
-          <a:xfrm>
-            <a:off x="3657600" y="4517136"/>
-            <a:ext cx="5120640" cy="841248"/>
-          </a:xfrm>
-          <a:prstGeom prst="roundRect">
-            <a:avLst>
-              <a:gd name="adj" fmla="val 13043"/>
-            </a:avLst>
-          </a:prstGeom>
-          <a:solidFill>
-            <a:srgbClr val="17342B"/>
-          </a:solidFill>
-          <a:ln/>
-        </p:spPr>
-      </p:sp>
-      <p:sp>
-        <p:nvSpPr>
-          <p:cNvPr id="21" name="icon-bg-LuMonitor"/>
-          <p:cNvSpPr/>
-          <p:nvPr/>
-        </p:nvSpPr>
-        <p:spPr>
-          <a:xfrm>
-            <a:off x="3813048" y="4663440"/>
-            <a:ext cx="548640" cy="548640"/>
-          </a:xfrm>
-          <a:prstGeom prst="ellipse">
-            <a:avLst/>
-          </a:prstGeom>
-          <a:solidFill>
-            <a:srgbClr val="21453A"/>
-          </a:solidFill>
-          <a:ln/>
-        </p:spPr>
-      </p:sp>
-      <p:pic>
-        <p:nvPicPr>
-          <p:cNvPr id="22" name="icon-LuMonitor" descr="preencoded.png">    </p:cNvPr>
-          <p:cNvPicPr>
-            <a:picLocks noChangeAspect="1"/>
-          </p:cNvPicPr>
-          <p:nvPr/>
-        </p:nvPicPr>
-        <p:blipFill>
-          <a:blip r:embed="rId7"/>
-          <a:stretch>
-            <a:fillRect/>
-          </a:stretch>
-        </p:blipFill>
-        <p:spPr>
-          <a:xfrm>
-            <a:off x="3950208" y="4800600"/>
-            <a:ext cx="274320" cy="274320"/>
-          </a:xfrm>
-          <a:prstGeom prst="rect">
-            <a:avLst/>
-          </a:prstGeom>
-        </p:spPr>
-      </p:pic>
-      <p:sp>
-        <p:nvSpPr>
-          <p:cNvPr id="23" name="Text 16"/>
-          <p:cNvSpPr txBox="1"/>
-          <p:nvPr/>
-        </p:nvSpPr>
-        <p:spPr>
-          <a:xfrm>
-            <a:off x="4526280" y="4608576"/>
-            <a:ext cx="4114800" cy="310896"/>
-          </a:xfrm>
-          <a:prstGeom prst="rect">
-            <a:avLst/>
-          </a:prstGeom>
-          <a:noFill/>
-          <a:ln/>
-        </p:spPr>
-        <p:txBody>
-          <a:bodyPr wrap="square" lIns="0" tIns="0" rIns="0" bIns="0" rtlCol="0" anchor="t"/>
-          <a:lstStyle/>
-          <a:p>
-            <a:pPr indent="0" marL="0">
-              <a:buNone/>
-            </a:pPr>
-            <a:r>
-              <a:rPr lang="en-US" sz="1500" b="1" dirty="0">
-                <a:solidFill>
-                  <a:srgbClr val="FFFFFF"/>
-                </a:solidFill>
-              </a:rPr>
-              <a:t>O painel atualiza</a:t>
-            </a:r>
-            <a:endParaRPr lang="en-US" sz="1500" dirty="0"/>
-          </a:p>
-        </p:txBody>
-      </p:sp>
-      <p:sp>
-        <p:nvSpPr>
-          <p:cNvPr id="24" name="Text 17"/>
-          <p:cNvSpPr txBox="1"/>
-          <p:nvPr/>
-        </p:nvSpPr>
-        <p:spPr>
-          <a:xfrm>
-            <a:off x="4526280" y="4928616"/>
-            <a:ext cx="4114800" cy="365760"/>
-          </a:xfrm>
-          <a:prstGeom prst="rect">
-            <a:avLst/>
-          </a:prstGeom>
-          <a:noFill/>
-          <a:ln/>
-        </p:spPr>
-        <p:txBody>
-          <a:bodyPr wrap="square" lIns="0" tIns="0" rIns="0" bIns="0" rtlCol="0" anchor="t"/>
-          <a:lstStyle/>
-          <a:p>
-            <a:pPr indent="0" marL="0">
-              <a:buNone/>
-            </a:pPr>
-            <a:r>
-              <a:rPr lang="en-US" sz="1200" dirty="0">
-                <a:solidFill>
-                  <a:srgbClr val="A9BEB4"/>
-                </a:solidFill>
-              </a:rPr>
-              <a:t>O mesmo dado aparece no site em segundos</a:t>
-            </a:r>
-            <a:endParaRPr lang="en-US" sz="1200" dirty="0"/>
-          </a:p>
-        </p:txBody>
-      </p:sp>
-      <p:sp>
-        <p:nvSpPr>
-          <p:cNvPr id="25" name="qr-card"/>
-          <p:cNvSpPr/>
-          <p:nvPr/>
-        </p:nvSpPr>
-        <p:spPr>
-          <a:xfrm>
-            <a:off x="9144000" y="1554480"/>
-            <a:ext cx="2468880" cy="3108960"/>
-          </a:xfrm>
-          <a:prstGeom prst="roundRect">
-            <a:avLst>
-              <a:gd name="adj" fmla="val 4444"/>
-            </a:avLst>
-          </a:prstGeom>
-          <a:solidFill>
-            <a:srgbClr val="FFFFFF"/>
-          </a:solidFill>
-          <a:ln/>
-        </p:spPr>
-      </p:sp>
-      <p:pic>
-        <p:nvPicPr>
-          <p:cNvPr id="26" name="qr-demo" descr="preencoded.png">    </p:cNvPr>
-          <p:cNvPicPr>
-            <a:picLocks noChangeAspect="1"/>
-          </p:cNvPicPr>
-          <p:nvPr/>
-        </p:nvPicPr>
-        <p:blipFill>
-          <a:blip r:embed="rId8"/>
-          <a:stretch>
-            <a:fillRect/>
-          </a:stretch>
-        </p:blipFill>
-        <p:spPr>
-          <a:xfrm>
-            <a:off x="9326880" y="1737360"/>
-            <a:ext cx="2103120" cy="2103120"/>
-          </a:xfrm>
-          <a:prstGeom prst="rect">
-            <a:avLst/>
-          </a:prstGeom>
-        </p:spPr>
-      </p:pic>
-      <p:sp>
-        <p:nvSpPr>
-          <p:cNvPr id="27" name="Text 19"/>
-          <p:cNvSpPr txBox="1"/>
-          <p:nvPr/>
-        </p:nvSpPr>
-        <p:spPr>
-          <a:xfrm>
-            <a:off x="9281160" y="3931920"/>
-            <a:ext cx="2194560" cy="548640"/>
-          </a:xfrm>
-          <a:prstGeom prst="rect">
-            <a:avLst/>
-          </a:prstGeom>
-          <a:noFill/>
-          <a:ln/>
-        </p:spPr>
-        <p:txBody>
-          <a:bodyPr wrap="square" lIns="0" tIns="0" rIns="0" bIns="0" rtlCol="0" anchor="ctr"/>
-          <a:lstStyle/>
-          <a:p>
-            <a:pPr algn="ctr" indent="0" marL="0">
-              <a:buNone/>
-            </a:pPr>
-            <a:r>
-              <a:rPr lang="en-US" sz="1300" b="1" dirty="0">
-                <a:solidFill>
-                  <a:srgbClr val="15291F"/>
-                </a:solidFill>
-              </a:rPr>
-              <a:t>Acesse o painel ao vivo</a:t>
-            </a:r>
-            <a:endParaRPr lang="en-US" sz="1300" dirty="0"/>
-          </a:p>
-        </p:txBody>
-      </p:sp>
-      <p:sp>
-        <p:nvSpPr>
-          <p:cNvPr id="28" name="Text 20"/>
-          <p:cNvSpPr txBox="1"/>
-          <p:nvPr/>
-        </p:nvSpPr>
-        <p:spPr>
-          <a:xfrm>
-            <a:off x="3657600" y="5623560"/>
-            <a:ext cx="7955280" cy="457200"/>
-          </a:xfrm>
-          <a:prstGeom prst="rect">
-            <a:avLst/>
-          </a:prstGeom>
-          <a:noFill/>
-          <a:ln/>
-        </p:spPr>
-        <p:txBody>
-          <a:bodyPr wrap="square" lIns="0" tIns="0" rIns="0" bIns="0" rtlCol="0" anchor="t"/>
-          <a:lstStyle/>
-          <a:p>
-            <a:pPr indent="0" marL="0">
-              <a:buNone/>
-            </a:pPr>
-            <a:r>
-              <a:rPr lang="en-US" sz="1400" i="1" dirty="0">
-                <a:solidFill>
-                  <a:srgbClr val="B9E3CF"/>
-                </a:solidFill>
-              </a:rPr>
-              <a:t>O notebook só exibe o site: todo o processamento acontece na placa.</a:t>
-            </a:r>
-            <a:endParaRPr lang="en-US" sz="1400" dirty="0"/>
+              <a:t>Resultado: um pipeline TinyML completo, do sensor físico ao firmware executando no microcontrolador.</a:t>
+            </a:r>
+            <a:endParaRPr lang="en-US" sz="1600" dirty="0"/>
           </a:p>
         </p:txBody>
       </p:sp>
@@ -12091,7 +12147,7 @@
             <a:lvl1pPr>
               <a:defRPr sz="1000">
                 <a:solidFill>
-                  <a:srgbClr val="A9BEB4"/>
+                  <a:srgbClr val="5E6F67"/>
                 </a:solidFill>
               </a:defRPr>
             </a:lvl1pPr>
@@ -12117,842 +12173,6 @@
 <file path=ppt/slides/slide17.xml><?xml version="1.0" encoding="utf-8"?>
 <p:sld xmlns:a="http://schemas.openxmlformats.org/drawingml/2006/main" xmlns:r="http://schemas.openxmlformats.org/officeDocument/2006/relationships" xmlns:p="http://schemas.openxmlformats.org/presentationml/2006/main">
   <p:cSld name="Slide 17">
-    <p:spTree>
-      <p:nvGrpSpPr>
-        <p:cNvPr id="1" name=""/>
-        <p:cNvGrpSpPr/>
-        <p:nvPr/>
-      </p:nvGrpSpPr>
-      <p:grpSpPr>
-        <a:xfrm>
-          <a:off x="0" y="0"/>
-          <a:ext cx="0" cy="0"/>
-          <a:chOff x="0" y="0"/>
-          <a:chExt cx="0" cy="0"/>
-        </a:xfrm>
-      </p:grpSpPr>
-      <p:sp>
-        <p:nvSpPr>
-          <p:cNvPr id="2" name="Text 0"/>
-          <p:cNvSpPr/>
-          <p:nvPr>
-            <p:ph idx="100" type="body" hasCustomPrompt="1"/>
-          </p:nvPr>
-        </p:nvSpPr>
-        <p:spPr>
-          <a:xfrm>
-            <a:off x="548640" y="365760"/>
-            <a:ext cx="8229600" cy="274320"/>
-          </a:xfrm>
-          <a:prstGeom prst="rect">
-            <a:avLst/>
-          </a:prstGeom>
-          <a:noFill/>
-          <a:ln/>
-        </p:spPr>
-        <p:txBody>
-          <a:bodyPr wrap="square" lIns="0" tIns="0" rIns="0" bIns="0" rtlCol="0"/>
-          <a:lstStyle/>
-          <a:p>
-            <a:pPr indent="0" marL="0">
-              <a:buNone/>
-            </a:pPr>
-            <a:r>
-              <a:rPr lang="en-US" sz="1200" b="1" spc="300" kern="0" dirty="0">
-                <a:solidFill>
-                  <a:srgbClr val="3F8A70"/>
-                </a:solidFill>
-              </a:rPr>
-              <a:t>16 · CONCLUSÃO</a:t>
-            </a:r>
-            <a:endParaRPr lang="en-US" sz="1200" dirty="0"/>
-          </a:p>
-        </p:txBody>
-      </p:sp>
-      <p:sp>
-        <p:nvSpPr>
-          <p:cNvPr id="3" name="Text 0"/>
-          <p:cNvSpPr/>
-          <p:nvPr>
-            <p:ph idx="101" type="title" hasCustomPrompt="1"/>
-          </p:nvPr>
-        </p:nvSpPr>
-        <p:spPr>
-          <a:xfrm>
-            <a:off x="548640" y="658368"/>
-            <a:ext cx="11064240" cy="685800"/>
-          </a:xfrm>
-          <a:prstGeom prst="rect">
-            <a:avLst/>
-          </a:prstGeom>
-          <a:noFill/>
-          <a:ln/>
-        </p:spPr>
-        <p:txBody>
-          <a:bodyPr wrap="square" lIns="0" tIns="0" rIns="0" bIns="0" rtlCol="0" anchor="ctr"/>
-          <a:lstStyle/>
-          <a:p>
-            <a:pPr algn="l" indent="0" marL="0">
-              <a:buNone/>
-            </a:pPr>
-            <a:r>
-              <a:rPr lang="en-US" sz="3400" b="1" dirty="0">
-                <a:solidFill>
-                  <a:srgbClr val="15291F"/>
-                </a:solidFill>
-              </a:rPr>
-              <a:t>Resultados, limitações e próximos passos</a:t>
-            </a:r>
-            <a:endParaRPr lang="en-US" sz="3400" dirty="0"/>
-          </a:p>
-        </p:txBody>
-      </p:sp>
-      <p:sp>
-        <p:nvSpPr>
-          <p:cNvPr id="4" name="conclusao-0"/>
-          <p:cNvSpPr/>
-          <p:nvPr/>
-        </p:nvSpPr>
-        <p:spPr>
-          <a:xfrm>
-            <a:off x="548640" y="1600200"/>
-            <a:ext cx="3520440" cy="3611880"/>
-          </a:xfrm>
-          <a:prstGeom prst="roundRect">
-            <a:avLst>
-              <a:gd name="adj" fmla="val 3117"/>
-            </a:avLst>
-          </a:prstGeom>
-          <a:solidFill>
-            <a:srgbClr val="EEF4F0"/>
-          </a:solidFill>
-          <a:ln/>
-        </p:spPr>
-      </p:sp>
-      <p:sp>
-        <p:nvSpPr>
-          <p:cNvPr id="5" name="icon-bg-LuCircleCheck"/>
-          <p:cNvSpPr/>
-          <p:nvPr/>
-        </p:nvSpPr>
-        <p:spPr>
-          <a:xfrm>
-            <a:off x="822960" y="1828800"/>
-            <a:ext cx="685800" cy="685800"/>
-          </a:xfrm>
-          <a:prstGeom prst="ellipse">
-            <a:avLst/>
-          </a:prstGeom>
-          <a:solidFill>
-            <a:srgbClr val="E1EFE8"/>
-          </a:solidFill>
-          <a:ln/>
-        </p:spPr>
-      </p:sp>
-      <p:pic>
-        <p:nvPicPr>
-          <p:cNvPr id="6" name="icon-LuCircleCheck" descr="preencoded.png">    </p:cNvPr>
-          <p:cNvPicPr>
-            <a:picLocks noChangeAspect="1"/>
-          </p:cNvPicPr>
-          <p:nvPr/>
-        </p:nvPicPr>
-        <p:blipFill>
-          <a:blip r:embed="rId1"/>
-          <a:stretch>
-            <a:fillRect/>
-          </a:stretch>
-        </p:blipFill>
-        <p:spPr>
-          <a:xfrm>
-            <a:off x="994410" y="2000250"/>
-            <a:ext cx="342900" cy="342900"/>
-          </a:xfrm>
-          <a:prstGeom prst="rect">
-            <a:avLst/>
-          </a:prstGeom>
-        </p:spPr>
-      </p:pic>
-      <p:sp>
-        <p:nvSpPr>
-          <p:cNvPr id="7" name="Text 4"/>
-          <p:cNvSpPr txBox="1"/>
-          <p:nvPr/>
-        </p:nvSpPr>
-        <p:spPr>
-          <a:xfrm>
-            <a:off x="822960" y="2697480"/>
-            <a:ext cx="3017520" cy="365760"/>
-          </a:xfrm>
-          <a:prstGeom prst="rect">
-            <a:avLst/>
-          </a:prstGeom>
-          <a:noFill/>
-          <a:ln/>
-        </p:spPr>
-        <p:txBody>
-          <a:bodyPr wrap="square" lIns="0" tIns="0" rIns="0" bIns="0" rtlCol="0" anchor="t"/>
-          <a:lstStyle/>
-          <a:p>
-            <a:pPr indent="0" marL="0">
-              <a:buNone/>
-            </a:pPr>
-            <a:r>
-              <a:rPr lang="en-US" sz="1900" b="1" dirty="0">
-                <a:solidFill>
-                  <a:srgbClr val="15291F"/>
-                </a:solidFill>
-              </a:rPr>
-              <a:t>O que alcançamos</a:t>
-            </a:r>
-            <a:endParaRPr lang="en-US" sz="1900" dirty="0"/>
-          </a:p>
-        </p:txBody>
-      </p:sp>
-      <p:sp>
-        <p:nvSpPr>
-          <p:cNvPr id="8" name="Text 5"/>
-          <p:cNvSpPr txBox="1"/>
-          <p:nvPr/>
-        </p:nvSpPr>
-        <p:spPr>
-          <a:xfrm>
-            <a:off x="822960" y="3154680"/>
-            <a:ext cx="3063240" cy="1965960"/>
-          </a:xfrm>
-          <a:prstGeom prst="rect">
-            <a:avLst/>
-          </a:prstGeom>
-          <a:noFill/>
-          <a:ln/>
-        </p:spPr>
-        <p:txBody>
-          <a:bodyPr wrap="square" lIns="0" tIns="0" rIns="0" bIns="0" rtlCol="0" anchor="t"/>
-          <a:lstStyle/>
-          <a:p>
-            <a:pPr marL="342900" indent="-342900">
-              <a:spcAft>
-                <a:spcPts val="600"/>
-              </a:spcAft>
-              <a:buSzPct val="100000"/>
-              <a:buChar char="•"/>
-            </a:pPr>
-            <a:r>
-              <a:rPr lang="en-US" sz="1400" dirty="0">
-                <a:solidFill>
-                  <a:srgbClr val="15291F"/>
-                </a:solidFill>
-              </a:rPr>
-              <a:t>Pipeline TinyML completo, do sensor ao firmware</a:t>
-            </a:r>
-            <a:endParaRPr lang="en-US" sz="1400" dirty="0"/>
-          </a:p>
-          <a:p>
-            <a:pPr marL="342900" indent="-342900">
-              <a:spcAft>
-                <a:spcPts val="600"/>
-              </a:spcAft>
-              <a:buSzPct val="100000"/>
-              <a:buChar char="•"/>
-            </a:pPr>
-            <a:r>
-              <a:rPr lang="en-US" sz="1400" dirty="0">
-                <a:solidFill>
-                  <a:srgbClr val="15291F"/>
-                </a:solidFill>
-              </a:rPr>
-              <a:t>F1 macro de 99,3 % com 25 nós</a:t>
-            </a:r>
-            <a:endParaRPr lang="en-US" sz="1400" dirty="0"/>
-          </a:p>
-          <a:p>
-            <a:pPr marL="342900" indent="-342900">
-              <a:spcAft>
-                <a:spcPts val="600"/>
-              </a:spcAft>
-              <a:buSzPct val="100000"/>
-              <a:buChar char="•"/>
-            </a:pPr>
-            <a:r>
-              <a:rPr lang="en-US" sz="1400" dirty="0">
-                <a:solidFill>
-                  <a:srgbClr val="15291F"/>
-                </a:solidFill>
-              </a:rPr>
-              <a:t>Previsão de +60 s e fallback seguro</a:t>
-            </a:r>
-            <a:endParaRPr lang="en-US" sz="1400" dirty="0"/>
-          </a:p>
-          <a:p>
-            <a:pPr marL="342900" indent="-342900">
-              <a:spcAft>
-                <a:spcPts val="600"/>
-              </a:spcAft>
-              <a:buSzPct val="100000"/>
-              <a:buChar char="•"/>
-            </a:pPr>
-            <a:r>
-              <a:rPr lang="en-US" sz="1400" dirty="0">
-                <a:solidFill>
-                  <a:srgbClr val="15291F"/>
-                </a:solidFill>
-              </a:rPr>
-              <a:t>Nuvem segura e painel publicado</a:t>
-            </a:r>
-            <a:endParaRPr lang="en-US" sz="1400" dirty="0"/>
-          </a:p>
-        </p:txBody>
-      </p:sp>
-      <p:sp>
-        <p:nvSpPr>
-          <p:cNvPr id="9" name="conclusao-1"/>
-          <p:cNvSpPr/>
-          <p:nvPr/>
-        </p:nvSpPr>
-        <p:spPr>
-          <a:xfrm>
-            <a:off x="4297680" y="1600200"/>
-            <a:ext cx="3520440" cy="3611880"/>
-          </a:xfrm>
-          <a:prstGeom prst="roundRect">
-            <a:avLst>
-              <a:gd name="adj" fmla="val 3117"/>
-            </a:avLst>
-          </a:prstGeom>
-          <a:solidFill>
-            <a:srgbClr val="EEF4F0"/>
-          </a:solidFill>
-          <a:ln/>
-        </p:spPr>
-      </p:sp>
-      <p:sp>
-        <p:nvSpPr>
-          <p:cNvPr id="10" name="icon-bg-LuTriangleAlert"/>
-          <p:cNvSpPr/>
-          <p:nvPr/>
-        </p:nvSpPr>
-        <p:spPr>
-          <a:xfrm>
-            <a:off x="4572000" y="1828800"/>
-            <a:ext cx="685800" cy="685800"/>
-          </a:xfrm>
-          <a:prstGeom prst="ellipse">
-            <a:avLst/>
-          </a:prstGeom>
-          <a:solidFill>
-            <a:srgbClr val="F7EDDA"/>
-          </a:solidFill>
-          <a:ln/>
-        </p:spPr>
-      </p:sp>
-      <p:pic>
-        <p:nvPicPr>
-          <p:cNvPr id="11" name="icon-LuTriangleAlert" descr="preencoded.png">    </p:cNvPr>
-          <p:cNvPicPr>
-            <a:picLocks noChangeAspect="1"/>
-          </p:cNvPicPr>
-          <p:nvPr/>
-        </p:nvPicPr>
-        <p:blipFill>
-          <a:blip r:embed="rId2"/>
-          <a:stretch>
-            <a:fillRect/>
-          </a:stretch>
-        </p:blipFill>
-        <p:spPr>
-          <a:xfrm>
-            <a:off x="4743450" y="2000250"/>
-            <a:ext cx="342900" cy="342900"/>
-          </a:xfrm>
-          <a:prstGeom prst="rect">
-            <a:avLst/>
-          </a:prstGeom>
-        </p:spPr>
-      </p:pic>
-      <p:sp>
-        <p:nvSpPr>
-          <p:cNvPr id="12" name="Text 8"/>
-          <p:cNvSpPr txBox="1"/>
-          <p:nvPr/>
-        </p:nvSpPr>
-        <p:spPr>
-          <a:xfrm>
-            <a:off x="4572000" y="2697480"/>
-            <a:ext cx="3017520" cy="365760"/>
-          </a:xfrm>
-          <a:prstGeom prst="rect">
-            <a:avLst/>
-          </a:prstGeom>
-          <a:noFill/>
-          <a:ln/>
-        </p:spPr>
-        <p:txBody>
-          <a:bodyPr wrap="square" lIns="0" tIns="0" rIns="0" bIns="0" rtlCol="0" anchor="t"/>
-          <a:lstStyle/>
-          <a:p>
-            <a:pPr indent="0" marL="0">
-              <a:buNone/>
-            </a:pPr>
-            <a:r>
-              <a:rPr lang="en-US" sz="1900" b="1" dirty="0">
-                <a:solidFill>
-                  <a:srgbClr val="15291F"/>
-                </a:solidFill>
-              </a:rPr>
-              <a:t>Limitações</a:t>
-            </a:r>
-            <a:endParaRPr lang="en-US" sz="1900" dirty="0"/>
-          </a:p>
-        </p:txBody>
-      </p:sp>
-      <p:sp>
-        <p:nvSpPr>
-          <p:cNvPr id="13" name="Text 9"/>
-          <p:cNvSpPr txBox="1"/>
-          <p:nvPr/>
-        </p:nvSpPr>
-        <p:spPr>
-          <a:xfrm>
-            <a:off x="4572000" y="3154680"/>
-            <a:ext cx="3063240" cy="1965960"/>
-          </a:xfrm>
-          <a:prstGeom prst="rect">
-            <a:avLst/>
-          </a:prstGeom>
-          <a:noFill/>
-          <a:ln/>
-        </p:spPr>
-        <p:txBody>
-          <a:bodyPr wrap="square" lIns="0" tIns="0" rIns="0" bIns="0" rtlCol="0" anchor="t"/>
-          <a:lstStyle/>
-          <a:p>
-            <a:pPr marL="342900" indent="-342900">
-              <a:spcAft>
-                <a:spcPts val="600"/>
-              </a:spcAft>
-              <a:buSzPct val="100000"/>
-              <a:buChar char="•"/>
-            </a:pPr>
-            <a:r>
-              <a:rPr lang="en-US" sz="1400" dirty="0">
-                <a:solidFill>
-                  <a:srgbClr val="15291F"/>
-                </a:solidFill>
-              </a:rPr>
-              <a:t>Rótulos derivados das regras</a:t>
-            </a:r>
-            <a:endParaRPr lang="en-US" sz="1400" dirty="0"/>
-          </a:p>
-          <a:p>
-            <a:pPr marL="342900" indent="-342900">
-              <a:spcAft>
-                <a:spcPts val="600"/>
-              </a:spcAft>
-              <a:buSzPct val="100000"/>
-              <a:buChar char="•"/>
-            </a:pPr>
-            <a:r>
-              <a:rPr lang="en-US" sz="1400" dirty="0">
-                <a:solidFill>
-                  <a:srgbClr val="15291F"/>
-                </a:solidFill>
-              </a:rPr>
-              <a:t>76 % do dataset é sintético</a:t>
-            </a:r>
-            <a:endParaRPr lang="en-US" sz="1400" dirty="0"/>
-          </a:p>
-          <a:p>
-            <a:pPr marL="342900" indent="-342900">
-              <a:spcAft>
-                <a:spcPts val="600"/>
-              </a:spcAft>
-              <a:buSzPct val="100000"/>
-              <a:buChar char="•"/>
-            </a:pPr>
-            <a:r>
-              <a:rPr lang="en-US" sz="1400" dirty="0">
-                <a:solidFill>
-                  <a:srgbClr val="15291F"/>
-                </a:solidFill>
-              </a:rPr>
-              <a:t>Sem sessões ou horários na coleta real</a:t>
-            </a:r>
-            <a:endParaRPr lang="en-US" sz="1400" dirty="0"/>
-          </a:p>
-          <a:p>
-            <a:pPr marL="342900" indent="-342900">
-              <a:spcAft>
-                <a:spcPts val="600"/>
-              </a:spcAft>
-              <a:buSzPct val="100000"/>
-              <a:buChar char="•"/>
-            </a:pPr>
-            <a:r>
-              <a:rPr lang="en-US" sz="1400" dirty="0">
-                <a:solidFill>
-                  <a:srgbClr val="15291F"/>
-                </a:solidFill>
-              </a:rPr>
-              <a:t>DHT11 com ±2 °C e ±5 % UR</a:t>
-            </a:r>
-            <a:endParaRPr lang="en-US" sz="1400" dirty="0"/>
-          </a:p>
-        </p:txBody>
-      </p:sp>
-      <p:sp>
-        <p:nvSpPr>
-          <p:cNvPr id="14" name="conclusao-2"/>
-          <p:cNvSpPr/>
-          <p:nvPr/>
-        </p:nvSpPr>
-        <p:spPr>
-          <a:xfrm>
-            <a:off x="8046720" y="1600200"/>
-            <a:ext cx="3520440" cy="3611880"/>
-          </a:xfrm>
-          <a:prstGeom prst="roundRect">
-            <a:avLst>
-              <a:gd name="adj" fmla="val 3117"/>
-            </a:avLst>
-          </a:prstGeom>
-          <a:solidFill>
-            <a:srgbClr val="EEF4F0"/>
-          </a:solidFill>
-          <a:ln/>
-        </p:spPr>
-      </p:sp>
-      <p:sp>
-        <p:nvSpPr>
-          <p:cNvPr id="15" name="icon-bg-LuTrendingUp"/>
-          <p:cNvSpPr/>
-          <p:nvPr/>
-        </p:nvSpPr>
-        <p:spPr>
-          <a:xfrm>
-            <a:off x="8321040" y="1828800"/>
-            <a:ext cx="685800" cy="685800"/>
-          </a:xfrm>
-          <a:prstGeom prst="ellipse">
-            <a:avLst/>
-          </a:prstGeom>
-          <a:solidFill>
-            <a:srgbClr val="ECE8F4"/>
-          </a:solidFill>
-          <a:ln/>
-        </p:spPr>
-      </p:sp>
-      <p:pic>
-        <p:nvPicPr>
-          <p:cNvPr id="16" name="icon-LuTrendingUp" descr="preencoded.png">    </p:cNvPr>
-          <p:cNvPicPr>
-            <a:picLocks noChangeAspect="1"/>
-          </p:cNvPicPr>
-          <p:nvPr/>
-        </p:nvPicPr>
-        <p:blipFill>
-          <a:blip r:embed="rId3"/>
-          <a:stretch>
-            <a:fillRect/>
-          </a:stretch>
-        </p:blipFill>
-        <p:spPr>
-          <a:xfrm>
-            <a:off x="8492490" y="2000250"/>
-            <a:ext cx="342900" cy="342900"/>
-          </a:xfrm>
-          <a:prstGeom prst="rect">
-            <a:avLst/>
-          </a:prstGeom>
-        </p:spPr>
-      </p:pic>
-      <p:sp>
-        <p:nvSpPr>
-          <p:cNvPr id="17" name="Text 12"/>
-          <p:cNvSpPr txBox="1"/>
-          <p:nvPr/>
-        </p:nvSpPr>
-        <p:spPr>
-          <a:xfrm>
-            <a:off x="8321040" y="2697480"/>
-            <a:ext cx="3017520" cy="365760"/>
-          </a:xfrm>
-          <a:prstGeom prst="rect">
-            <a:avLst/>
-          </a:prstGeom>
-          <a:noFill/>
-          <a:ln/>
-        </p:spPr>
-        <p:txBody>
-          <a:bodyPr wrap="square" lIns="0" tIns="0" rIns="0" bIns="0" rtlCol="0" anchor="t"/>
-          <a:lstStyle/>
-          <a:p>
-            <a:pPr indent="0" marL="0">
-              <a:buNone/>
-            </a:pPr>
-            <a:r>
-              <a:rPr lang="en-US" sz="1900" b="1" dirty="0">
-                <a:solidFill>
-                  <a:srgbClr val="15291F"/>
-                </a:solidFill>
-              </a:rPr>
-              <a:t>Próximos passos</a:t>
-            </a:r>
-            <a:endParaRPr lang="en-US" sz="1900" dirty="0"/>
-          </a:p>
-        </p:txBody>
-      </p:sp>
-      <p:sp>
-        <p:nvSpPr>
-          <p:cNvPr id="18" name="Text 13"/>
-          <p:cNvSpPr txBox="1"/>
-          <p:nvPr/>
-        </p:nvSpPr>
-        <p:spPr>
-          <a:xfrm>
-            <a:off x="8321040" y="3154680"/>
-            <a:ext cx="3063240" cy="1965960"/>
-          </a:xfrm>
-          <a:prstGeom prst="rect">
-            <a:avLst/>
-          </a:prstGeom>
-          <a:noFill/>
-          <a:ln/>
-        </p:spPr>
-        <p:txBody>
-          <a:bodyPr wrap="square" lIns="0" tIns="0" rIns="0" bIns="0" rtlCol="0" anchor="t"/>
-          <a:lstStyle/>
-          <a:p>
-            <a:pPr marL="342900" indent="-342900">
-              <a:spcAft>
-                <a:spcPts val="600"/>
-              </a:spcAft>
-              <a:buSzPct val="100000"/>
-              <a:buChar char="•"/>
-            </a:pPr>
-            <a:r>
-              <a:rPr lang="en-US" sz="1400" dirty="0">
-                <a:solidFill>
-                  <a:srgbClr val="15291F"/>
-                </a:solidFill>
-              </a:rPr>
-              <a:t>Coletar sessões reais com rótulos observados</a:t>
-            </a:r>
-            <a:endParaRPr lang="en-US" sz="1400" dirty="0"/>
-          </a:p>
-          <a:p>
-            <a:pPr marL="342900" indent="-342900">
-              <a:spcAft>
-                <a:spcPts val="600"/>
-              </a:spcAft>
-              <a:buSzPct val="100000"/>
-              <a:buChar char="•"/>
-            </a:pPr>
-            <a:r>
-              <a:rPr lang="en-US" sz="1400" dirty="0">
-                <a:solidFill>
-                  <a:srgbClr val="15291F"/>
-                </a:solidFill>
-              </a:rPr>
-              <a:t>Sensor mais preciso (SHT31) e histerese</a:t>
-            </a:r>
-            <a:endParaRPr lang="en-US" sz="1400" dirty="0"/>
-          </a:p>
-          <a:p>
-            <a:pPr marL="342900" indent="-342900">
-              <a:spcAft>
-                <a:spcPts val="600"/>
-              </a:spcAft>
-              <a:buSzPct val="100000"/>
-              <a:buChar char="•"/>
-            </a:pPr>
-            <a:r>
-              <a:rPr lang="en-US" sz="1400" dirty="0">
-                <a:solidFill>
-                  <a:srgbClr val="15291F"/>
-                </a:solidFill>
-              </a:rPr>
-              <a:t>Medir latência e consumo na placa</a:t>
-            </a:r>
-            <a:endParaRPr lang="en-US" sz="1400" dirty="0"/>
-          </a:p>
-          <a:p>
-            <a:pPr marL="342900" indent="-342900">
-              <a:spcAft>
-                <a:spcPts val="600"/>
-              </a:spcAft>
-              <a:buSzPct val="100000"/>
-              <a:buChar char="•"/>
-            </a:pPr>
-            <a:r>
-              <a:rPr lang="en-US" sz="1400" dirty="0">
-                <a:solidFill>
-                  <a:srgbClr val="15291F"/>
-                </a:solidFill>
-              </a:rPr>
-              <a:t>Guardar leituras offline e notificar alertas</a:t>
-            </a:r>
-            <a:endParaRPr lang="en-US" sz="1400" dirty="0"/>
-          </a:p>
-        </p:txBody>
-      </p:sp>
-      <p:sp>
-        <p:nvSpPr>
-          <p:cNvPr id="19" name="mensagem-final"/>
-          <p:cNvSpPr/>
-          <p:nvPr/>
-        </p:nvSpPr>
-        <p:spPr>
-          <a:xfrm>
-            <a:off x="548640" y="5394960"/>
-            <a:ext cx="11064240" cy="731520"/>
-          </a:xfrm>
-          <a:prstGeom prst="roundRect">
-            <a:avLst>
-              <a:gd name="adj" fmla="val 15000"/>
-            </a:avLst>
-          </a:prstGeom>
-          <a:solidFill>
-            <a:srgbClr val="0E211A"/>
-          </a:solidFill>
-          <a:ln/>
-        </p:spPr>
-      </p:sp>
-      <p:sp>
-        <p:nvSpPr>
-          <p:cNvPr id="20" name="icon-bg-LuSparkles"/>
-          <p:cNvSpPr/>
-          <p:nvPr/>
-        </p:nvSpPr>
-        <p:spPr>
-          <a:xfrm>
-            <a:off x="777240" y="5532120"/>
-            <a:ext cx="457200" cy="457200"/>
-          </a:xfrm>
-          <a:prstGeom prst="ellipse">
-            <a:avLst/>
-          </a:prstGeom>
-          <a:solidFill>
-            <a:srgbClr val="21453A"/>
-          </a:solidFill>
-          <a:ln/>
-        </p:spPr>
-      </p:sp>
-      <p:pic>
-        <p:nvPicPr>
-          <p:cNvPr id="21" name="icon-LuSparkles" descr="preencoded.png">    </p:cNvPr>
-          <p:cNvPicPr>
-            <a:picLocks noChangeAspect="1"/>
-          </p:cNvPicPr>
-          <p:nvPr/>
-        </p:nvPicPr>
-        <p:blipFill>
-          <a:blip r:embed="rId4"/>
-          <a:stretch>
-            <a:fillRect/>
-          </a:stretch>
-        </p:blipFill>
-        <p:spPr>
-          <a:xfrm>
-            <a:off x="891540" y="5646420"/>
-            <a:ext cx="228600" cy="228600"/>
-          </a:xfrm>
-          <a:prstGeom prst="rect">
-            <a:avLst/>
-          </a:prstGeom>
-        </p:spPr>
-      </p:pic>
-      <p:sp>
-        <p:nvSpPr>
-          <p:cNvPr id="22" name="Text 16"/>
-          <p:cNvSpPr txBox="1"/>
-          <p:nvPr/>
-        </p:nvSpPr>
-        <p:spPr>
-          <a:xfrm>
-            <a:off x="1417320" y="5394960"/>
-            <a:ext cx="10058400" cy="731520"/>
-          </a:xfrm>
-          <a:prstGeom prst="rect">
-            <a:avLst/>
-          </a:prstGeom>
-          <a:noFill/>
-          <a:ln/>
-        </p:spPr>
-        <p:txBody>
-          <a:bodyPr wrap="square" lIns="0" tIns="0" rIns="0" bIns="0" rtlCol="0" anchor="ctr"/>
-          <a:lstStyle/>
-          <a:p>
-            <a:pPr indent="0" marL="0">
-              <a:buNone/>
-            </a:pPr>
-            <a:r>
-              <a:rPr lang="en-US" sz="1600" b="1" dirty="0">
-                <a:solidFill>
-                  <a:srgbClr val="FFFFFF"/>
-                </a:solidFill>
-              </a:rPr>
-              <a:t>Resultado: um pipeline TinyML completo, do sensor físico ao firmware executando no microcontrolador.</a:t>
-            </a:r>
-            <a:endParaRPr lang="en-US" sz="1600" dirty="0"/>
-          </a:p>
-        </p:txBody>
-      </p:sp>
-      <p:sp>
-        <p:nvSpPr>
-          <p:cNvPr id="25" name="Slide Number Placeholder 0"/>
-          <p:cNvSpPr>
-            <a:spLocks noGrp="1"/>
-          </p:cNvSpPr>
-          <p:nvPr>
-            <p:ph type="sldNum" sz="quarter" idx="4294967295"/>
-          </p:nvPr>
-        </p:nvSpPr>
-        <p:spPr>
-          <a:xfrm>
-            <a:off x="11185855" y="6400800"/>
-            <a:ext cx="457200" cy="274320"/>
-          </a:xfrm>
-          <a:prstGeom prst="rect">
-            <a:avLst/>
-          </a:prstGeom>
-          <a:extLst>
-            <a:ext uri="{C572A759-6A51-4108-AA02-DFA0A04FC94B}">
-              <ma14:wrappingTextBoxFlag xmlns:ma14="http://schemas.microsoft.com/office/mac/drawingml/2011/main" val="0"/>
-            </a:ext>
-          </a:extLst>
-        </p:spPr>
-        <p:txBody>
-          <a:bodyPr/>
-          <a:lstStyle>
-            <a:lvl1pPr>
-              <a:defRPr sz="1000">
-                <a:solidFill>
-                  <a:srgbClr val="5E6F67"/>
-                </a:solidFill>
-              </a:defRPr>
-            </a:lvl1pPr>
-          </a:lstStyle>
-          <a:p>
-            <a:pPr algn="r"/>
-            <a:fld id="{F7021451-1387-4CA6-816F-3879F97B5CBC}" type="slidenum">
-              <a:rPr b="0" lang="en-US"/>
-              <a:t>17</a:t>
-            </a:fld>
-            <a:endParaRPr lang="en-US"/>
-          </a:p>
-        </p:txBody>
-      </p:sp>
-    </p:spTree>
-  </p:cSld>
-  <p:clrMapOvr>
-    <a:masterClrMapping/>
-  </p:clrMapOvr>
-</p:sld>
-</file>
-
-<file path=ppt/slides/slide18.xml><?xml version="1.0" encoding="utf-8"?>
-<p:sld xmlns:a="http://schemas.openxmlformats.org/drawingml/2006/main" xmlns:r="http://schemas.openxmlformats.org/officeDocument/2006/relationships" xmlns:p="http://schemas.openxmlformats.org/presentationml/2006/main">
-  <p:cSld name="Slide 18">
     <p:spTree>
       <p:nvGrpSpPr>
         <p:cNvPr id="1" name=""/>
